--- a/IA_na_Sala_de_Aula_CDC.pptx
+++ b/IA_na_Sala_de_Aula_CDC.pptx
@@ -16,9 +16,11 @@
     <p:sldId id="264" r:id="rId10"/>
     <p:sldId id="265" r:id="rId11"/>
     <p:sldId id="266" r:id="rId12"/>
+    <p:sldId id="267" r:id="rId13"/>
+    <p:sldId id="268" r:id="rId14"/>
   </p:sldIdLst>
   <p:notesMasterIdLst>
-    <p:notesMasterId r:id="rId13"/>
+    <p:notesMasterId r:id="rId15"/>
   </p:notesMasterIdLst>
   <p:sldSz cx="9144000" cy="5143500"/>
   <p:notesSz cx="5143500" cy="9144000"/>
@@ -712,6 +714,182 @@
             <a:fld id="{F7021451-1387-4CA6-816F-3879F97B5CBC}" type="slidenum">
               <a:rPr lang="en-US"/>
               <a:t>11</a:t>
+            </a:fld>
+            <a:endParaRPr lang="en-US"/>
+          </a:p>
+        </p:txBody>
+      </p:sp>
+    </p:spTree>
+    <p:extLst>
+      <p:ext uri="{BB962C8B-B14F-4D97-AF65-F5344CB8AC3E}">
+        <p14:creationId xmlns:p14="http://schemas.microsoft.com/office/powerpoint/2010/main" val="1024086991"/>
+      </p:ext>
+    </p:extLst>
+  </p:cSld>
+  <p:clrMapOvr>
+    <a:masterClrMapping/>
+  </p:clrMapOvr>
+</p:notes>
+</file>
+
+<file path=ppt/notesSlides/notesSlide12.xml><?xml version="1.0" encoding="utf-8"?>
+<p:notes xmlns:a="http://schemas.openxmlformats.org/drawingml/2006/main" xmlns:r="http://schemas.openxmlformats.org/officeDocument/2006/relationships" xmlns:p="http://schemas.openxmlformats.org/presentationml/2006/main">
+  <p:cSld>
+    <p:spTree>
+      <p:nvGrpSpPr>
+        <p:cNvPr id="1" name=""/>
+        <p:cNvGrpSpPr/>
+        <p:nvPr/>
+      </p:nvGrpSpPr>
+      <p:grpSpPr>
+        <a:xfrm>
+          <a:off x="0" y="0"/>
+          <a:ext cx="0" cy="0"/>
+          <a:chOff x="0" y="0"/>
+          <a:chExt cx="0" cy="0"/>
+        </a:xfrm>
+      </p:grpSpPr>
+      <p:sp>
+        <p:nvSpPr>
+          <p:cNvPr id="2" name="Slide Image Placeholder 1"/>
+          <p:cNvSpPr>
+            <a:spLocks noGrp="1" noRot="1" noChangeAspect="1"/>
+          </p:cNvSpPr>
+          <p:nvPr>
+            <p:ph type="sldImg"/>
+          </p:nvPr>
+        </p:nvSpPr>
+        <p:spPr/>
+      </p:sp>
+      <p:sp>
+        <p:nvSpPr>
+          <p:cNvPr id="3" name="Notes Placeholder 2"/>
+          <p:cNvSpPr>
+            <a:spLocks noGrp="1"/>
+          </p:cNvSpPr>
+          <p:nvPr>
+            <p:ph type="body" idx="1"/>
+          </p:nvPr>
+        </p:nvSpPr>
+        <p:spPr/>
+        <p:txBody>
+          <a:bodyPr/>
+          <a:lstStyle/>
+          <a:p>
+            <a:r>
+              <a:rPr lang="en-US" dirty="0"/>
+              <a:t/>
+            </a:r>
+            <a:endParaRPr lang="en-US" dirty="0"/>
+          </a:p>
+        </p:txBody>
+      </p:sp>
+      <p:sp>
+        <p:nvSpPr>
+          <p:cNvPr id="4" name="Slide Number Placeholder 3"/>
+          <p:cNvSpPr>
+            <a:spLocks noGrp="1"/>
+          </p:cNvSpPr>
+          <p:nvPr>
+            <p:ph type="sldNum" sz="quarter" idx="10"/>
+          </p:nvPr>
+        </p:nvSpPr>
+        <p:spPr/>
+        <p:txBody>
+          <a:bodyPr/>
+          <a:lstStyle/>
+          <a:p>
+            <a:fld id="{F7021451-1387-4CA6-816F-3879F97B5CBC}" type="slidenum">
+              <a:rPr lang="en-US"/>
+              <a:t>12</a:t>
+            </a:fld>
+            <a:endParaRPr lang="en-US"/>
+          </a:p>
+        </p:txBody>
+      </p:sp>
+    </p:spTree>
+    <p:extLst>
+      <p:ext uri="{BB962C8B-B14F-4D97-AF65-F5344CB8AC3E}">
+        <p14:creationId xmlns:p14="http://schemas.microsoft.com/office/powerpoint/2010/main" val="1024086991"/>
+      </p:ext>
+    </p:extLst>
+  </p:cSld>
+  <p:clrMapOvr>
+    <a:masterClrMapping/>
+  </p:clrMapOvr>
+</p:notes>
+</file>
+
+<file path=ppt/notesSlides/notesSlide13.xml><?xml version="1.0" encoding="utf-8"?>
+<p:notes xmlns:a="http://schemas.openxmlformats.org/drawingml/2006/main" xmlns:r="http://schemas.openxmlformats.org/officeDocument/2006/relationships" xmlns:p="http://schemas.openxmlformats.org/presentationml/2006/main">
+  <p:cSld>
+    <p:spTree>
+      <p:nvGrpSpPr>
+        <p:cNvPr id="1" name=""/>
+        <p:cNvGrpSpPr/>
+        <p:nvPr/>
+      </p:nvGrpSpPr>
+      <p:grpSpPr>
+        <a:xfrm>
+          <a:off x="0" y="0"/>
+          <a:ext cx="0" cy="0"/>
+          <a:chOff x="0" y="0"/>
+          <a:chExt cx="0" cy="0"/>
+        </a:xfrm>
+      </p:grpSpPr>
+      <p:sp>
+        <p:nvSpPr>
+          <p:cNvPr id="2" name="Slide Image Placeholder 1"/>
+          <p:cNvSpPr>
+            <a:spLocks noGrp="1" noRot="1" noChangeAspect="1"/>
+          </p:cNvSpPr>
+          <p:nvPr>
+            <p:ph type="sldImg"/>
+          </p:nvPr>
+        </p:nvSpPr>
+        <p:spPr/>
+      </p:sp>
+      <p:sp>
+        <p:nvSpPr>
+          <p:cNvPr id="3" name="Notes Placeholder 2"/>
+          <p:cNvSpPr>
+            <a:spLocks noGrp="1"/>
+          </p:cNvSpPr>
+          <p:nvPr>
+            <p:ph type="body" idx="1"/>
+          </p:nvPr>
+        </p:nvSpPr>
+        <p:spPr/>
+        <p:txBody>
+          <a:bodyPr/>
+          <a:lstStyle/>
+          <a:p>
+            <a:r>
+              <a:rPr lang="en-US" dirty="0"/>
+              <a:t/>
+            </a:r>
+            <a:endParaRPr lang="en-US" dirty="0"/>
+          </a:p>
+        </p:txBody>
+      </p:sp>
+      <p:sp>
+        <p:nvSpPr>
+          <p:cNvPr id="4" name="Slide Number Placeholder 3"/>
+          <p:cNvSpPr>
+            <a:spLocks noGrp="1"/>
+          </p:cNvSpPr>
+          <p:nvPr>
+            <p:ph type="sldNum" sz="quarter" idx="10"/>
+          </p:nvPr>
+        </p:nvSpPr>
+        <p:spPr/>
+        <p:txBody>
+          <a:bodyPr/>
+          <a:lstStyle/>
+          <a:p>
+            <a:fld id="{F7021451-1387-4CA6-816F-3879F97B5CBC}" type="slidenum">
+              <a:rPr lang="en-US"/>
+              <a:t>13</a:t>
             </a:fld>
             <a:endParaRPr lang="en-US"/>
           </a:p>
@@ -2082,6 +2260,1546 @@
                 <a:ea typeface="Georgia" pitchFamily="34" charset="-122"/>
                 <a:cs typeface="Georgia" pitchFamily="34" charset="-120"/>
               </a:rPr>
+              <a:t>Mão na Massa</a:t>
+            </a:r>
+            <a:endParaRPr lang="en-US" sz="2800" dirty="0"/>
+          </a:p>
+        </p:txBody>
+      </p:sp>
+      <p:sp>
+        <p:nvSpPr>
+          <p:cNvPr id="4" name="Shape 2"/>
+          <p:cNvSpPr/>
+          <p:nvPr/>
+        </p:nvSpPr>
+        <p:spPr>
+          <a:xfrm>
+            <a:off x="457200" y="1188720"/>
+            <a:ext cx="2606040" cy="1554480"/>
+          </a:xfrm>
+          <a:prstGeom prst="rect">
+            <a:avLst/>
+          </a:prstGeom>
+          <a:solidFill>
+            <a:srgbClr val="FFFFFF"/>
+          </a:solidFill>
+          <a:ln/>
+          <a:effectLst>
+            <a:outerShdw sx="100000" sy="100000" kx="0" ky="0" algn="bl" rotWithShape="0" blurRad="101600" dist="25400" dir="8100000">
+              <a:srgbClr val="000000">
+                <a:alpha val="12000"/>
+              </a:srgbClr>
+            </a:outerShdw>
+          </a:effectLst>
+        </p:spPr>
+      </p:sp>
+      <p:sp>
+        <p:nvSpPr>
+          <p:cNvPr id="5" name="Shape 3"/>
+          <p:cNvSpPr/>
+          <p:nvPr/>
+        </p:nvSpPr>
+        <p:spPr>
+          <a:xfrm>
+            <a:off x="594360" y="1325880"/>
+            <a:ext cx="411480" cy="411480"/>
+          </a:xfrm>
+          <a:prstGeom prst="ellipse">
+            <a:avLst/>
+          </a:prstGeom>
+          <a:solidFill>
+            <a:srgbClr val="C75B39"/>
+          </a:solidFill>
+          <a:ln/>
+        </p:spPr>
+      </p:sp>
+      <p:sp>
+        <p:nvSpPr>
+          <p:cNvPr id="6" name="Text 4"/>
+          <p:cNvSpPr/>
+          <p:nvPr/>
+        </p:nvSpPr>
+        <p:spPr>
+          <a:xfrm>
+            <a:off x="594360" y="1325880"/>
+            <a:ext cx="411480" cy="411480"/>
+          </a:xfrm>
+          <a:prstGeom prst="rect">
+            <a:avLst/>
+          </a:prstGeom>
+          <a:noFill/>
+          <a:ln/>
+        </p:spPr>
+        <p:txBody>
+          <a:bodyPr wrap="square" rtlCol="0" anchor="ctr"/>
+          <a:lstStyle/>
+          <a:p>
+            <a:pPr algn="ctr" indent="0" marL="0">
+              <a:buNone/>
+            </a:pPr>
+            <a:r>
+              <a:rPr lang="en-US" sz="1400" b="1" dirty="0">
+                <a:solidFill>
+                  <a:srgbClr val="FFFFFF"/>
+                </a:solidFill>
+                <a:latin typeface="Calibri" pitchFamily="34" charset="0"/>
+                <a:ea typeface="Calibri" pitchFamily="34" charset="-122"/>
+                <a:cs typeface="Calibri" pitchFamily="34" charset="-120"/>
+              </a:rPr>
+              <a:t>1</a:t>
+            </a:r>
+            <a:endParaRPr lang="en-US" sz="1400" dirty="0"/>
+          </a:p>
+        </p:txBody>
+      </p:sp>
+      <p:sp>
+        <p:nvSpPr>
+          <p:cNvPr id="7" name="Text 5"/>
+          <p:cNvSpPr/>
+          <p:nvPr/>
+        </p:nvSpPr>
+        <p:spPr>
+          <a:xfrm>
+            <a:off x="1097280" y="1325880"/>
+            <a:ext cx="1828800" cy="365760"/>
+          </a:xfrm>
+          <a:prstGeom prst="rect">
+            <a:avLst/>
+          </a:prstGeom>
+          <a:noFill/>
+          <a:ln/>
+        </p:spPr>
+        <p:txBody>
+          <a:bodyPr wrap="square" lIns="0" tIns="0" rIns="0" bIns="0" rtlCol="0" anchor="ctr"/>
+          <a:lstStyle/>
+          <a:p>
+            <a:pPr algn="l" indent="0" marL="0">
+              <a:buNone/>
+            </a:pPr>
+            <a:r>
+              <a:rPr lang="en-US" sz="1400" b="1" dirty="0">
+                <a:solidFill>
+                  <a:srgbClr val="1A3A3A"/>
+                </a:solidFill>
+                <a:latin typeface="Georgia" pitchFamily="34" charset="0"/>
+                <a:ea typeface="Georgia" pitchFamily="34" charset="-122"/>
+                <a:cs typeface="Georgia" pitchFamily="34" charset="-120"/>
+              </a:rPr>
+              <a:t>Baixe o arquivo Skill</a:t>
+            </a:r>
+            <a:endParaRPr lang="en-US" sz="1400" dirty="0"/>
+          </a:p>
+        </p:txBody>
+      </p:sp>
+      <p:sp>
+        <p:nvSpPr>
+          <p:cNvPr id="8" name="Text 6"/>
+          <p:cNvSpPr/>
+          <p:nvPr/>
+        </p:nvSpPr>
+        <p:spPr>
+          <a:xfrm>
+            <a:off x="594360" y="1783080"/>
+            <a:ext cx="2331720" cy="822960"/>
+          </a:xfrm>
+          <a:prstGeom prst="rect">
+            <a:avLst/>
+          </a:prstGeom>
+          <a:noFill/>
+          <a:ln/>
+        </p:spPr>
+        <p:txBody>
+          <a:bodyPr wrap="square" lIns="0" tIns="0" rIns="0" bIns="0" rtlCol="0" anchor="t"/>
+          <a:lstStyle/>
+          <a:p>
+            <a:pPr algn="l" indent="0" marL="0">
+              <a:buNone/>
+            </a:pPr>
+            <a:r>
+              <a:rPr lang="en-US" sz="1100" dirty="0">
+                <a:solidFill>
+                  <a:srgbClr val="5A5A5A"/>
+                </a:solidFill>
+                <a:latin typeface="Calibri" pitchFamily="34" charset="0"/>
+                <a:ea typeface="Calibri" pitchFamily="34" charset="-122"/>
+                <a:cs typeface="Calibri" pitchFamily="34" charset="-120"/>
+              </a:rPr>
+              <a:t>Acesse o repositório e baixe skill-assistente-pedagogico.md (link no README)</a:t>
+            </a:r>
+            <a:endParaRPr lang="en-US" sz="1100" dirty="0"/>
+          </a:p>
+        </p:txBody>
+      </p:sp>
+      <p:sp>
+        <p:nvSpPr>
+          <p:cNvPr id="9" name="Shape 7"/>
+          <p:cNvSpPr/>
+          <p:nvPr/>
+        </p:nvSpPr>
+        <p:spPr>
+          <a:xfrm>
+            <a:off x="3337560" y="1188720"/>
+            <a:ext cx="2606040" cy="1554480"/>
+          </a:xfrm>
+          <a:prstGeom prst="rect">
+            <a:avLst/>
+          </a:prstGeom>
+          <a:solidFill>
+            <a:srgbClr val="FFFFFF"/>
+          </a:solidFill>
+          <a:ln/>
+          <a:effectLst>
+            <a:outerShdw sx="100000" sy="100000" kx="0" ky="0" algn="bl" rotWithShape="0" blurRad="101600" dist="25400" dir="8100000">
+              <a:srgbClr val="000000">
+                <a:alpha val="12000"/>
+              </a:srgbClr>
+            </a:outerShdw>
+          </a:effectLst>
+        </p:spPr>
+      </p:sp>
+      <p:sp>
+        <p:nvSpPr>
+          <p:cNvPr id="10" name="Shape 8"/>
+          <p:cNvSpPr/>
+          <p:nvPr/>
+        </p:nvSpPr>
+        <p:spPr>
+          <a:xfrm>
+            <a:off x="3474720" y="1325880"/>
+            <a:ext cx="411480" cy="411480"/>
+          </a:xfrm>
+          <a:prstGeom prst="ellipse">
+            <a:avLst/>
+          </a:prstGeom>
+          <a:solidFill>
+            <a:srgbClr val="C75B39"/>
+          </a:solidFill>
+          <a:ln/>
+        </p:spPr>
+      </p:sp>
+      <p:sp>
+        <p:nvSpPr>
+          <p:cNvPr id="11" name="Text 9"/>
+          <p:cNvSpPr/>
+          <p:nvPr/>
+        </p:nvSpPr>
+        <p:spPr>
+          <a:xfrm>
+            <a:off x="3474720" y="1325880"/>
+            <a:ext cx="411480" cy="411480"/>
+          </a:xfrm>
+          <a:prstGeom prst="rect">
+            <a:avLst/>
+          </a:prstGeom>
+          <a:noFill/>
+          <a:ln/>
+        </p:spPr>
+        <p:txBody>
+          <a:bodyPr wrap="square" rtlCol="0" anchor="ctr"/>
+          <a:lstStyle/>
+          <a:p>
+            <a:pPr algn="ctr" indent="0" marL="0">
+              <a:buNone/>
+            </a:pPr>
+            <a:r>
+              <a:rPr lang="en-US" sz="1400" b="1" dirty="0">
+                <a:solidFill>
+                  <a:srgbClr val="FFFFFF"/>
+                </a:solidFill>
+                <a:latin typeface="Calibri" pitchFamily="34" charset="0"/>
+                <a:ea typeface="Calibri" pitchFamily="34" charset="-122"/>
+                <a:cs typeface="Calibri" pitchFamily="34" charset="-120"/>
+              </a:rPr>
+              <a:t>2</a:t>
+            </a:r>
+            <a:endParaRPr lang="en-US" sz="1400" dirty="0"/>
+          </a:p>
+        </p:txBody>
+      </p:sp>
+      <p:sp>
+        <p:nvSpPr>
+          <p:cNvPr id="12" name="Text 10"/>
+          <p:cNvSpPr/>
+          <p:nvPr/>
+        </p:nvSpPr>
+        <p:spPr>
+          <a:xfrm>
+            <a:off x="3977640" y="1325880"/>
+            <a:ext cx="1828800" cy="365760"/>
+          </a:xfrm>
+          <a:prstGeom prst="rect">
+            <a:avLst/>
+          </a:prstGeom>
+          <a:noFill/>
+          <a:ln/>
+        </p:spPr>
+        <p:txBody>
+          <a:bodyPr wrap="square" lIns="0" tIns="0" rIns="0" bIns="0" rtlCol="0" anchor="ctr"/>
+          <a:lstStyle/>
+          <a:p>
+            <a:pPr algn="l" indent="0" marL="0">
+              <a:buNone/>
+            </a:pPr>
+            <a:r>
+              <a:rPr lang="en-US" sz="1400" b="1" dirty="0">
+                <a:solidFill>
+                  <a:srgbClr val="1A3A3A"/>
+                </a:solidFill>
+                <a:latin typeface="Georgia" pitchFamily="34" charset="0"/>
+                <a:ea typeface="Georgia" pitchFamily="34" charset="-122"/>
+                <a:cs typeface="Georgia" pitchFamily="34" charset="-120"/>
+              </a:rPr>
+              <a:t>Abra o ChatGPT ou Gemini</a:t>
+            </a:r>
+            <a:endParaRPr lang="en-US" sz="1400" dirty="0"/>
+          </a:p>
+        </p:txBody>
+      </p:sp>
+      <p:sp>
+        <p:nvSpPr>
+          <p:cNvPr id="13" name="Text 11"/>
+          <p:cNvSpPr/>
+          <p:nvPr/>
+        </p:nvSpPr>
+        <p:spPr>
+          <a:xfrm>
+            <a:off x="3474720" y="1783080"/>
+            <a:ext cx="2331720" cy="822960"/>
+          </a:xfrm>
+          <a:prstGeom prst="rect">
+            <a:avLst/>
+          </a:prstGeom>
+          <a:noFill/>
+          <a:ln/>
+        </p:spPr>
+        <p:txBody>
+          <a:bodyPr wrap="square" lIns="0" tIns="0" rIns="0" bIns="0" rtlCol="0" anchor="t"/>
+          <a:lstStyle/>
+          <a:p>
+            <a:pPr algn="l" indent="0" marL="0">
+              <a:buNone/>
+            </a:pPr>
+            <a:r>
+              <a:rPr lang="en-US" sz="1100" dirty="0">
+                <a:solidFill>
+                  <a:srgbClr val="5A5A5A"/>
+                </a:solidFill>
+                <a:latin typeface="Calibri" pitchFamily="34" charset="0"/>
+                <a:ea typeface="Calibri" pitchFamily="34" charset="-122"/>
+                <a:cs typeface="Calibri" pitchFamily="34" charset="-120"/>
+              </a:rPr>
+              <a:t>Entre no chat da plataforma que você mais usa</a:t>
+            </a:r>
+            <a:endParaRPr lang="en-US" sz="1100" dirty="0"/>
+          </a:p>
+        </p:txBody>
+      </p:sp>
+      <p:sp>
+        <p:nvSpPr>
+          <p:cNvPr id="14" name="Shape 12"/>
+          <p:cNvSpPr/>
+          <p:nvPr/>
+        </p:nvSpPr>
+        <p:spPr>
+          <a:xfrm>
+            <a:off x="6217920" y="1188720"/>
+            <a:ext cx="2606040" cy="1554480"/>
+          </a:xfrm>
+          <a:prstGeom prst="rect">
+            <a:avLst/>
+          </a:prstGeom>
+          <a:solidFill>
+            <a:srgbClr val="FFFFFF"/>
+          </a:solidFill>
+          <a:ln/>
+          <a:effectLst>
+            <a:outerShdw sx="100000" sy="100000" kx="0" ky="0" algn="bl" rotWithShape="0" blurRad="101600" dist="25400" dir="8100000">
+              <a:srgbClr val="000000">
+                <a:alpha val="12000"/>
+              </a:srgbClr>
+            </a:outerShdw>
+          </a:effectLst>
+        </p:spPr>
+      </p:sp>
+      <p:sp>
+        <p:nvSpPr>
+          <p:cNvPr id="15" name="Shape 13"/>
+          <p:cNvSpPr/>
+          <p:nvPr/>
+        </p:nvSpPr>
+        <p:spPr>
+          <a:xfrm>
+            <a:off x="6355080" y="1325880"/>
+            <a:ext cx="411480" cy="411480"/>
+          </a:xfrm>
+          <a:prstGeom prst="ellipse">
+            <a:avLst/>
+          </a:prstGeom>
+          <a:solidFill>
+            <a:srgbClr val="C75B39"/>
+          </a:solidFill>
+          <a:ln/>
+        </p:spPr>
+      </p:sp>
+      <p:sp>
+        <p:nvSpPr>
+          <p:cNvPr id="16" name="Text 14"/>
+          <p:cNvSpPr/>
+          <p:nvPr/>
+        </p:nvSpPr>
+        <p:spPr>
+          <a:xfrm>
+            <a:off x="6355080" y="1325880"/>
+            <a:ext cx="411480" cy="411480"/>
+          </a:xfrm>
+          <a:prstGeom prst="rect">
+            <a:avLst/>
+          </a:prstGeom>
+          <a:noFill/>
+          <a:ln/>
+        </p:spPr>
+        <p:txBody>
+          <a:bodyPr wrap="square" rtlCol="0" anchor="ctr"/>
+          <a:lstStyle/>
+          <a:p>
+            <a:pPr algn="ctr" indent="0" marL="0">
+              <a:buNone/>
+            </a:pPr>
+            <a:r>
+              <a:rPr lang="en-US" sz="1400" b="1" dirty="0">
+                <a:solidFill>
+                  <a:srgbClr val="FFFFFF"/>
+                </a:solidFill>
+                <a:latin typeface="Calibri" pitchFamily="34" charset="0"/>
+                <a:ea typeface="Calibri" pitchFamily="34" charset="-122"/>
+                <a:cs typeface="Calibri" pitchFamily="34" charset="-120"/>
+              </a:rPr>
+              <a:t>3</a:t>
+            </a:r>
+            <a:endParaRPr lang="en-US" sz="1400" dirty="0"/>
+          </a:p>
+        </p:txBody>
+      </p:sp>
+      <p:sp>
+        <p:nvSpPr>
+          <p:cNvPr id="17" name="Text 15"/>
+          <p:cNvSpPr/>
+          <p:nvPr/>
+        </p:nvSpPr>
+        <p:spPr>
+          <a:xfrm>
+            <a:off x="6858000" y="1325880"/>
+            <a:ext cx="1828800" cy="365760"/>
+          </a:xfrm>
+          <a:prstGeom prst="rect">
+            <a:avLst/>
+          </a:prstGeom>
+          <a:noFill/>
+          <a:ln/>
+        </p:spPr>
+        <p:txBody>
+          <a:bodyPr wrap="square" lIns="0" tIns="0" rIns="0" bIns="0" rtlCol="0" anchor="ctr"/>
+          <a:lstStyle/>
+          <a:p>
+            <a:pPr algn="l" indent="0" marL="0">
+              <a:buNone/>
+            </a:pPr>
+            <a:r>
+              <a:rPr lang="en-US" sz="1400" b="1" dirty="0">
+                <a:solidFill>
+                  <a:srgbClr val="1A3A3A"/>
+                </a:solidFill>
+                <a:latin typeface="Georgia" pitchFamily="34" charset="0"/>
+                <a:ea typeface="Georgia" pitchFamily="34" charset="-122"/>
+                <a:cs typeface="Georgia" pitchFamily="34" charset="-120"/>
+              </a:rPr>
+              <a:t>Carregue o arquivo</a:t>
+            </a:r>
+            <a:endParaRPr lang="en-US" sz="1400" dirty="0"/>
+          </a:p>
+        </p:txBody>
+      </p:sp>
+      <p:sp>
+        <p:nvSpPr>
+          <p:cNvPr id="18" name="Text 16"/>
+          <p:cNvSpPr/>
+          <p:nvPr/>
+        </p:nvSpPr>
+        <p:spPr>
+          <a:xfrm>
+            <a:off x="6355080" y="1783080"/>
+            <a:ext cx="2331720" cy="822960"/>
+          </a:xfrm>
+          <a:prstGeom prst="rect">
+            <a:avLst/>
+          </a:prstGeom>
+          <a:noFill/>
+          <a:ln/>
+        </p:spPr>
+        <p:txBody>
+          <a:bodyPr wrap="square" lIns="0" tIns="0" rIns="0" bIns="0" rtlCol="0" anchor="t"/>
+          <a:lstStyle/>
+          <a:p>
+            <a:pPr algn="l" indent="0" marL="0">
+              <a:buNone/>
+            </a:pPr>
+            <a:r>
+              <a:rPr lang="en-US" sz="1100" dirty="0">
+                <a:solidFill>
+                  <a:srgbClr val="5A5A5A"/>
+                </a:solidFill>
+                <a:latin typeface="Calibri" pitchFamily="34" charset="0"/>
+                <a:ea typeface="Calibri" pitchFamily="34" charset="-122"/>
+                <a:cs typeface="Calibri" pitchFamily="34" charset="-120"/>
+              </a:rPr>
+              <a:t>Clique no botão de anexar e selecione o arquivo baixado</a:t>
+            </a:r>
+            <a:endParaRPr lang="en-US" sz="1100" dirty="0"/>
+          </a:p>
+        </p:txBody>
+      </p:sp>
+      <p:sp>
+        <p:nvSpPr>
+          <p:cNvPr id="19" name="Shape 17"/>
+          <p:cNvSpPr/>
+          <p:nvPr/>
+        </p:nvSpPr>
+        <p:spPr>
+          <a:xfrm>
+            <a:off x="457200" y="3017520"/>
+            <a:ext cx="2606040" cy="1554480"/>
+          </a:xfrm>
+          <a:prstGeom prst="rect">
+            <a:avLst/>
+          </a:prstGeom>
+          <a:solidFill>
+            <a:srgbClr val="FFFFFF"/>
+          </a:solidFill>
+          <a:ln/>
+          <a:effectLst>
+            <a:outerShdw sx="100000" sy="100000" kx="0" ky="0" algn="bl" rotWithShape="0" blurRad="101600" dist="25400" dir="8100000">
+              <a:srgbClr val="000000">
+                <a:alpha val="12000"/>
+              </a:srgbClr>
+            </a:outerShdw>
+          </a:effectLst>
+        </p:spPr>
+      </p:sp>
+      <p:sp>
+        <p:nvSpPr>
+          <p:cNvPr id="20" name="Shape 18"/>
+          <p:cNvSpPr/>
+          <p:nvPr/>
+        </p:nvSpPr>
+        <p:spPr>
+          <a:xfrm>
+            <a:off x="594360" y="3154680"/>
+            <a:ext cx="411480" cy="411480"/>
+          </a:xfrm>
+          <a:prstGeom prst="ellipse">
+            <a:avLst/>
+          </a:prstGeom>
+          <a:solidFill>
+            <a:srgbClr val="C75B39"/>
+          </a:solidFill>
+          <a:ln/>
+        </p:spPr>
+      </p:sp>
+      <p:sp>
+        <p:nvSpPr>
+          <p:cNvPr id="21" name="Text 19"/>
+          <p:cNvSpPr/>
+          <p:nvPr/>
+        </p:nvSpPr>
+        <p:spPr>
+          <a:xfrm>
+            <a:off x="594360" y="3154680"/>
+            <a:ext cx="411480" cy="411480"/>
+          </a:xfrm>
+          <a:prstGeom prst="rect">
+            <a:avLst/>
+          </a:prstGeom>
+          <a:noFill/>
+          <a:ln/>
+        </p:spPr>
+        <p:txBody>
+          <a:bodyPr wrap="square" rtlCol="0" anchor="ctr"/>
+          <a:lstStyle/>
+          <a:p>
+            <a:pPr algn="ctr" indent="0" marL="0">
+              <a:buNone/>
+            </a:pPr>
+            <a:r>
+              <a:rPr lang="en-US" sz="1400" b="1" dirty="0">
+                <a:solidFill>
+                  <a:srgbClr val="FFFFFF"/>
+                </a:solidFill>
+                <a:latin typeface="Calibri" pitchFamily="34" charset="0"/>
+                <a:ea typeface="Calibri" pitchFamily="34" charset="-122"/>
+                <a:cs typeface="Calibri" pitchFamily="34" charset="-120"/>
+              </a:rPr>
+              <a:t>4</a:t>
+            </a:r>
+            <a:endParaRPr lang="en-US" sz="1400" dirty="0"/>
+          </a:p>
+        </p:txBody>
+      </p:sp>
+      <p:sp>
+        <p:nvSpPr>
+          <p:cNvPr id="22" name="Text 20"/>
+          <p:cNvSpPr/>
+          <p:nvPr/>
+        </p:nvSpPr>
+        <p:spPr>
+          <a:xfrm>
+            <a:off x="1097280" y="3154680"/>
+            <a:ext cx="1828800" cy="365760"/>
+          </a:xfrm>
+          <a:prstGeom prst="rect">
+            <a:avLst/>
+          </a:prstGeom>
+          <a:noFill/>
+          <a:ln/>
+        </p:spPr>
+        <p:txBody>
+          <a:bodyPr wrap="square" lIns="0" tIns="0" rIns="0" bIns="0" rtlCol="0" anchor="ctr"/>
+          <a:lstStyle/>
+          <a:p>
+            <a:pPr algn="l" indent="0" marL="0">
+              <a:buNone/>
+            </a:pPr>
+            <a:r>
+              <a:rPr lang="en-US" sz="1400" b="1" dirty="0">
+                <a:solidFill>
+                  <a:srgbClr val="1A3A3A"/>
+                </a:solidFill>
+                <a:latin typeface="Georgia" pitchFamily="34" charset="0"/>
+                <a:ea typeface="Georgia" pitchFamily="34" charset="-122"/>
+                <a:cs typeface="Georgia" pitchFamily="34" charset="-120"/>
+              </a:rPr>
+              <a:t>Faça um pedido</a:t>
+            </a:r>
+            <a:endParaRPr lang="en-US" sz="1400" dirty="0"/>
+          </a:p>
+        </p:txBody>
+      </p:sp>
+      <p:sp>
+        <p:nvSpPr>
+          <p:cNvPr id="23" name="Text 21"/>
+          <p:cNvSpPr/>
+          <p:nvPr/>
+        </p:nvSpPr>
+        <p:spPr>
+          <a:xfrm>
+            <a:off x="594360" y="3611880"/>
+            <a:ext cx="2331720" cy="822960"/>
+          </a:xfrm>
+          <a:prstGeom prst="rect">
+            <a:avLst/>
+          </a:prstGeom>
+          <a:noFill/>
+          <a:ln/>
+        </p:spPr>
+        <p:txBody>
+          <a:bodyPr wrap="square" lIns="0" tIns="0" rIns="0" bIns="0" rtlCol="0" anchor="t"/>
+          <a:lstStyle/>
+          <a:p>
+            <a:pPr algn="l" indent="0" marL="0">
+              <a:buNone/>
+            </a:pPr>
+            <a:r>
+              <a:rPr lang="en-US" sz="1100" dirty="0">
+                <a:solidFill>
+                  <a:srgbClr val="5A5A5A"/>
+                </a:solidFill>
+                <a:latin typeface="Calibri" pitchFamily="34" charset="0"/>
+                <a:ea typeface="Calibri" pitchFamily="34" charset="-122"/>
+                <a:cs typeface="Calibri" pitchFamily="34" charset="-120"/>
+              </a:rPr>
+              <a:t>Escreva algo como: "Crie um plano de aula de Ciências para o 6º ano sobre cadeia alimentar"</a:t>
+            </a:r>
+            <a:endParaRPr lang="en-US" sz="1100" dirty="0"/>
+          </a:p>
+        </p:txBody>
+      </p:sp>
+      <p:sp>
+        <p:nvSpPr>
+          <p:cNvPr id="24" name="Shape 22"/>
+          <p:cNvSpPr/>
+          <p:nvPr/>
+        </p:nvSpPr>
+        <p:spPr>
+          <a:xfrm>
+            <a:off x="3337560" y="3017520"/>
+            <a:ext cx="2606040" cy="1554480"/>
+          </a:xfrm>
+          <a:prstGeom prst="rect">
+            <a:avLst/>
+          </a:prstGeom>
+          <a:solidFill>
+            <a:srgbClr val="FFFFFF"/>
+          </a:solidFill>
+          <a:ln/>
+          <a:effectLst>
+            <a:outerShdw sx="100000" sy="100000" kx="0" ky="0" algn="bl" rotWithShape="0" blurRad="101600" dist="25400" dir="8100000">
+              <a:srgbClr val="000000">
+                <a:alpha val="12000"/>
+              </a:srgbClr>
+            </a:outerShdw>
+          </a:effectLst>
+        </p:spPr>
+      </p:sp>
+      <p:sp>
+        <p:nvSpPr>
+          <p:cNvPr id="25" name="Shape 23"/>
+          <p:cNvSpPr/>
+          <p:nvPr/>
+        </p:nvSpPr>
+        <p:spPr>
+          <a:xfrm>
+            <a:off x="3474720" y="3154680"/>
+            <a:ext cx="411480" cy="411480"/>
+          </a:xfrm>
+          <a:prstGeom prst="ellipse">
+            <a:avLst/>
+          </a:prstGeom>
+          <a:solidFill>
+            <a:srgbClr val="C75B39"/>
+          </a:solidFill>
+          <a:ln/>
+        </p:spPr>
+      </p:sp>
+      <p:sp>
+        <p:nvSpPr>
+          <p:cNvPr id="26" name="Text 24"/>
+          <p:cNvSpPr/>
+          <p:nvPr/>
+        </p:nvSpPr>
+        <p:spPr>
+          <a:xfrm>
+            <a:off x="3474720" y="3154680"/>
+            <a:ext cx="411480" cy="411480"/>
+          </a:xfrm>
+          <a:prstGeom prst="rect">
+            <a:avLst/>
+          </a:prstGeom>
+          <a:noFill/>
+          <a:ln/>
+        </p:spPr>
+        <p:txBody>
+          <a:bodyPr wrap="square" rtlCol="0" anchor="ctr"/>
+          <a:lstStyle/>
+          <a:p>
+            <a:pPr algn="ctr" indent="0" marL="0">
+              <a:buNone/>
+            </a:pPr>
+            <a:r>
+              <a:rPr lang="en-US" sz="1400" b="1" dirty="0">
+                <a:solidFill>
+                  <a:srgbClr val="FFFFFF"/>
+                </a:solidFill>
+                <a:latin typeface="Calibri" pitchFamily="34" charset="0"/>
+                <a:ea typeface="Calibri" pitchFamily="34" charset="-122"/>
+                <a:cs typeface="Calibri" pitchFamily="34" charset="-120"/>
+              </a:rPr>
+              <a:t>5</a:t>
+            </a:r>
+            <a:endParaRPr lang="en-US" sz="1400" dirty="0"/>
+          </a:p>
+        </p:txBody>
+      </p:sp>
+      <p:sp>
+        <p:nvSpPr>
+          <p:cNvPr id="27" name="Text 25"/>
+          <p:cNvSpPr/>
+          <p:nvPr/>
+        </p:nvSpPr>
+        <p:spPr>
+          <a:xfrm>
+            <a:off x="3977640" y="3154680"/>
+            <a:ext cx="1828800" cy="365760"/>
+          </a:xfrm>
+          <a:prstGeom prst="rect">
+            <a:avLst/>
+          </a:prstGeom>
+          <a:noFill/>
+          <a:ln/>
+        </p:spPr>
+        <p:txBody>
+          <a:bodyPr wrap="square" lIns="0" tIns="0" rIns="0" bIns="0" rtlCol="0" anchor="ctr"/>
+          <a:lstStyle/>
+          <a:p>
+            <a:pPr algn="l" indent="0" marL="0">
+              <a:buNone/>
+            </a:pPr>
+            <a:r>
+              <a:rPr lang="en-US" sz="1400" b="1" dirty="0">
+                <a:solidFill>
+                  <a:srgbClr val="1A3A3A"/>
+                </a:solidFill>
+                <a:latin typeface="Georgia" pitchFamily="34" charset="0"/>
+                <a:ea typeface="Georgia" pitchFamily="34" charset="-122"/>
+                <a:cs typeface="Georgia" pitchFamily="34" charset="-120"/>
+              </a:rPr>
+              <a:t>Refine</a:t>
+            </a:r>
+            <a:endParaRPr lang="en-US" sz="1400" dirty="0"/>
+          </a:p>
+        </p:txBody>
+      </p:sp>
+      <p:sp>
+        <p:nvSpPr>
+          <p:cNvPr id="28" name="Text 26"/>
+          <p:cNvSpPr/>
+          <p:nvPr/>
+        </p:nvSpPr>
+        <p:spPr>
+          <a:xfrm>
+            <a:off x="3474720" y="3611880"/>
+            <a:ext cx="2331720" cy="822960"/>
+          </a:xfrm>
+          <a:prstGeom prst="rect">
+            <a:avLst/>
+          </a:prstGeom>
+          <a:noFill/>
+          <a:ln/>
+        </p:spPr>
+        <p:txBody>
+          <a:bodyPr wrap="square" lIns="0" tIns="0" rIns="0" bIns="0" rtlCol="0" anchor="t"/>
+          <a:lstStyle/>
+          <a:p>
+            <a:pPr algn="l" indent="0" marL="0">
+              <a:buNone/>
+            </a:pPr>
+            <a:r>
+              <a:rPr lang="en-US" sz="1100" dirty="0">
+                <a:solidFill>
+                  <a:srgbClr val="5A5A5A"/>
+                </a:solidFill>
+                <a:latin typeface="Calibri" pitchFamily="34" charset="0"/>
+                <a:ea typeface="Calibri" pitchFamily="34" charset="-122"/>
+                <a:cs typeface="Calibri" pitchFamily="34" charset="-120"/>
+              </a:rPr>
+              <a:t>Peça ajustes: "Coloque uma atividade lúdica" ou "Adicione um momento de oração inicial"</a:t>
+            </a:r>
+            <a:endParaRPr lang="en-US" sz="1100" dirty="0"/>
+          </a:p>
+        </p:txBody>
+      </p:sp>
+      <p:sp>
+        <p:nvSpPr>
+          <p:cNvPr id="29" name="Shape 27"/>
+          <p:cNvSpPr/>
+          <p:nvPr/>
+        </p:nvSpPr>
+        <p:spPr>
+          <a:xfrm>
+            <a:off x="6217920" y="3017520"/>
+            <a:ext cx="2606040" cy="1554480"/>
+          </a:xfrm>
+          <a:prstGeom prst="rect">
+            <a:avLst/>
+          </a:prstGeom>
+          <a:solidFill>
+            <a:srgbClr val="FFFFFF"/>
+          </a:solidFill>
+          <a:ln/>
+          <a:effectLst>
+            <a:outerShdw sx="100000" sy="100000" kx="0" ky="0" algn="bl" rotWithShape="0" blurRad="101600" dist="25400" dir="8100000">
+              <a:srgbClr val="000000">
+                <a:alpha val="12000"/>
+              </a:srgbClr>
+            </a:outerShdw>
+          </a:effectLst>
+        </p:spPr>
+      </p:sp>
+      <p:sp>
+        <p:nvSpPr>
+          <p:cNvPr id="30" name="Shape 28"/>
+          <p:cNvSpPr/>
+          <p:nvPr/>
+        </p:nvSpPr>
+        <p:spPr>
+          <a:xfrm>
+            <a:off x="6355080" y="3154680"/>
+            <a:ext cx="411480" cy="411480"/>
+          </a:xfrm>
+          <a:prstGeom prst="ellipse">
+            <a:avLst/>
+          </a:prstGeom>
+          <a:solidFill>
+            <a:srgbClr val="C75B39"/>
+          </a:solidFill>
+          <a:ln/>
+        </p:spPr>
+      </p:sp>
+      <p:sp>
+        <p:nvSpPr>
+          <p:cNvPr id="31" name="Text 29"/>
+          <p:cNvSpPr/>
+          <p:nvPr/>
+        </p:nvSpPr>
+        <p:spPr>
+          <a:xfrm>
+            <a:off x="6355080" y="3154680"/>
+            <a:ext cx="411480" cy="411480"/>
+          </a:xfrm>
+          <a:prstGeom prst="rect">
+            <a:avLst/>
+          </a:prstGeom>
+          <a:noFill/>
+          <a:ln/>
+        </p:spPr>
+        <p:txBody>
+          <a:bodyPr wrap="square" rtlCol="0" anchor="ctr"/>
+          <a:lstStyle/>
+          <a:p>
+            <a:pPr algn="ctr" indent="0" marL="0">
+              <a:buNone/>
+            </a:pPr>
+            <a:r>
+              <a:rPr lang="en-US" sz="1400" b="1" dirty="0">
+                <a:solidFill>
+                  <a:srgbClr val="FFFFFF"/>
+                </a:solidFill>
+                <a:latin typeface="Calibri" pitchFamily="34" charset="0"/>
+                <a:ea typeface="Calibri" pitchFamily="34" charset="-122"/>
+                <a:cs typeface="Calibri" pitchFamily="34" charset="-120"/>
+              </a:rPr>
+              <a:t>6</a:t>
+            </a:r>
+            <a:endParaRPr lang="en-US" sz="1400" dirty="0"/>
+          </a:p>
+        </p:txBody>
+      </p:sp>
+      <p:sp>
+        <p:nvSpPr>
+          <p:cNvPr id="32" name="Text 30"/>
+          <p:cNvSpPr/>
+          <p:nvPr/>
+        </p:nvSpPr>
+        <p:spPr>
+          <a:xfrm>
+            <a:off x="6858000" y="3154680"/>
+            <a:ext cx="1828800" cy="365760"/>
+          </a:xfrm>
+          <a:prstGeom prst="rect">
+            <a:avLst/>
+          </a:prstGeom>
+          <a:noFill/>
+          <a:ln/>
+        </p:spPr>
+        <p:txBody>
+          <a:bodyPr wrap="square" lIns="0" tIns="0" rIns="0" bIns="0" rtlCol="0" anchor="ctr"/>
+          <a:lstStyle/>
+          <a:p>
+            <a:pPr algn="l" indent="0" marL="0">
+              <a:buNone/>
+            </a:pPr>
+            <a:r>
+              <a:rPr lang="en-US" sz="1400" b="1" dirty="0">
+                <a:solidFill>
+                  <a:srgbClr val="1A3A3A"/>
+                </a:solidFill>
+                <a:latin typeface="Georgia" pitchFamily="34" charset="0"/>
+                <a:ea typeface="Georgia" pitchFamily="34" charset="-122"/>
+                <a:cs typeface="Georgia" pitchFamily="34" charset="-120"/>
+              </a:rPr>
+              <a:t>Aproveite</a:t>
+            </a:r>
+            <a:endParaRPr lang="en-US" sz="1400" dirty="0"/>
+          </a:p>
+        </p:txBody>
+      </p:sp>
+      <p:sp>
+        <p:nvSpPr>
+          <p:cNvPr id="33" name="Text 31"/>
+          <p:cNvSpPr/>
+          <p:nvPr/>
+        </p:nvSpPr>
+        <p:spPr>
+          <a:xfrm>
+            <a:off x="6355080" y="3611880"/>
+            <a:ext cx="2331720" cy="822960"/>
+          </a:xfrm>
+          <a:prstGeom prst="rect">
+            <a:avLst/>
+          </a:prstGeom>
+          <a:noFill/>
+          <a:ln/>
+        </p:spPr>
+        <p:txBody>
+          <a:bodyPr wrap="square" lIns="0" tIns="0" rIns="0" bIns="0" rtlCol="0" anchor="t"/>
+          <a:lstStyle/>
+          <a:p>
+            <a:pPr algn="l" indent="0" marL="0">
+              <a:buNone/>
+            </a:pPr>
+            <a:r>
+              <a:rPr lang="en-US" sz="1100" dirty="0">
+                <a:solidFill>
+                  <a:srgbClr val="5A5A5A"/>
+                </a:solidFill>
+                <a:latin typeface="Calibri" pitchFamily="34" charset="0"/>
+                <a:ea typeface="Calibri" pitchFamily="34" charset="-122"/>
+                <a:cs typeface="Calibri" pitchFamily="34" charset="-120"/>
+              </a:rPr>
+              <a:t>Copie o resultado para seu plano de aula, salve ou peça um arquivo .docx</a:t>
+            </a:r>
+            <a:endParaRPr lang="en-US" sz="1100" dirty="0"/>
+          </a:p>
+        </p:txBody>
+      </p:sp>
+    </p:spTree>
+  </p:cSld>
+  <p:clrMapOvr>
+    <a:masterClrMapping/>
+  </p:clrMapOvr>
+</p:sld>
+</file>
+
+<file path=ppt/slides/slide11.xml><?xml version="1.0" encoding="utf-8"?>
+<p:sld xmlns:a="http://schemas.openxmlformats.org/drawingml/2006/main" xmlns:r="http://schemas.openxmlformats.org/officeDocument/2006/relationships" xmlns:p="http://schemas.openxmlformats.org/presentationml/2006/main">
+  <p:cSld name="Slide 11">
+    <p:bg>
+      <p:bgPr>
+        <a:solidFill>
+          <a:srgbClr val="F7F3EE"/>
+        </a:solidFill>
+      </p:bgPr>
+    </p:bg>
+    <p:spTree>
+      <p:nvGrpSpPr>
+        <p:cNvPr id="1" name=""/>
+        <p:cNvGrpSpPr/>
+        <p:nvPr/>
+      </p:nvGrpSpPr>
+      <p:grpSpPr>
+        <a:xfrm>
+          <a:off x="0" y="0"/>
+          <a:ext cx="0" cy="0"/>
+          <a:chOff x="0" y="0"/>
+          <a:chExt cx="0" cy="0"/>
+        </a:xfrm>
+      </p:grpSpPr>
+      <p:sp>
+        <p:nvSpPr>
+          <p:cNvPr id="2" name="Shape 0"/>
+          <p:cNvSpPr/>
+          <p:nvPr/>
+        </p:nvSpPr>
+        <p:spPr>
+          <a:xfrm>
+            <a:off x="0" y="0"/>
+            <a:ext cx="9144000" cy="822960"/>
+          </a:xfrm>
+          <a:prstGeom prst="rect">
+            <a:avLst/>
+          </a:prstGeom>
+          <a:solidFill>
+            <a:srgbClr val="1A3A3A"/>
+          </a:solidFill>
+          <a:ln/>
+        </p:spPr>
+      </p:sp>
+      <p:sp>
+        <p:nvSpPr>
+          <p:cNvPr id="3" name="Text 1"/>
+          <p:cNvSpPr/>
+          <p:nvPr/>
+        </p:nvSpPr>
+        <p:spPr>
+          <a:xfrm>
+            <a:off x="548640" y="137160"/>
+            <a:ext cx="8046720" cy="548640"/>
+          </a:xfrm>
+          <a:prstGeom prst="rect">
+            <a:avLst/>
+          </a:prstGeom>
+          <a:noFill/>
+          <a:ln/>
+        </p:spPr>
+        <p:txBody>
+          <a:bodyPr wrap="square" rtlCol="0" anchor="ctr"/>
+          <a:lstStyle/>
+          <a:p>
+            <a:pPr indent="0" marL="0">
+              <a:buNone/>
+            </a:pPr>
+            <a:r>
+              <a:rPr lang="en-US" sz="2400" b="1" dirty="0">
+                <a:solidFill>
+                  <a:srgbClr val="FFFFFF"/>
+                </a:solidFill>
+                <a:latin typeface="Georgia" pitchFamily="34" charset="0"/>
+                <a:ea typeface="Georgia" pitchFamily="34" charset="-122"/>
+                <a:cs typeface="Georgia" pitchFamily="34" charset="-120"/>
+              </a:rPr>
+              <a:t>Exemplo Prático com a Skill CDC</a:t>
+            </a:r>
+            <a:endParaRPr lang="en-US" sz="2400" dirty="0"/>
+          </a:p>
+        </p:txBody>
+      </p:sp>
+      <p:sp>
+        <p:nvSpPr>
+          <p:cNvPr id="4" name="Shape 2"/>
+          <p:cNvSpPr/>
+          <p:nvPr/>
+        </p:nvSpPr>
+        <p:spPr>
+          <a:xfrm>
+            <a:off x="0" y="822960"/>
+            <a:ext cx="9144000" cy="36576"/>
+          </a:xfrm>
+          <a:prstGeom prst="rect">
+            <a:avLst/>
+          </a:prstGeom>
+          <a:solidFill>
+            <a:srgbClr val="C75B39"/>
+          </a:solidFill>
+          <a:ln/>
+        </p:spPr>
+      </p:sp>
+      <p:sp>
+        <p:nvSpPr>
+          <p:cNvPr id="5" name="Shape 3"/>
+          <p:cNvSpPr/>
+          <p:nvPr/>
+        </p:nvSpPr>
+        <p:spPr>
+          <a:xfrm>
+            <a:off x="457200" y="1097280"/>
+            <a:ext cx="8229600" cy="1463040"/>
+          </a:xfrm>
+          <a:prstGeom prst="rect">
+            <a:avLst/>
+          </a:prstGeom>
+          <a:solidFill>
+            <a:srgbClr val="FFFFFF"/>
+          </a:solidFill>
+          <a:ln/>
+          <a:effectLst>
+            <a:outerShdw sx="100000" sy="100000" kx="0" ky="0" algn="bl" rotWithShape="0" blurRad="101600" dist="25400" dir="8100000">
+              <a:srgbClr val="000000">
+                <a:alpha val="12000"/>
+              </a:srgbClr>
+            </a:outerShdw>
+          </a:effectLst>
+        </p:spPr>
+      </p:sp>
+      <p:sp>
+        <p:nvSpPr>
+          <p:cNvPr id="6" name="Shape 4"/>
+          <p:cNvSpPr/>
+          <p:nvPr/>
+        </p:nvSpPr>
+        <p:spPr>
+          <a:xfrm>
+            <a:off x="457200" y="1097280"/>
+            <a:ext cx="54864" cy="1463040"/>
+          </a:xfrm>
+          <a:prstGeom prst="rect">
+            <a:avLst/>
+          </a:prstGeom>
+          <a:solidFill>
+            <a:srgbClr val="C75B39"/>
+          </a:solidFill>
+          <a:ln/>
+        </p:spPr>
+      </p:sp>
+      <p:sp>
+        <p:nvSpPr>
+          <p:cNvPr id="7" name="Text 5"/>
+          <p:cNvSpPr/>
+          <p:nvPr/>
+        </p:nvSpPr>
+        <p:spPr>
+          <a:xfrm>
+            <a:off x="731520" y="1188720"/>
+            <a:ext cx="7772400" cy="274320"/>
+          </a:xfrm>
+          <a:prstGeom prst="rect">
+            <a:avLst/>
+          </a:prstGeom>
+          <a:noFill/>
+          <a:ln/>
+        </p:spPr>
+        <p:txBody>
+          <a:bodyPr wrap="square" lIns="0" tIns="0" rIns="0" bIns="0" rtlCol="0" anchor="ctr"/>
+          <a:lstStyle/>
+          <a:p>
+            <a:pPr indent="0" marL="0">
+              <a:buNone/>
+            </a:pPr>
+            <a:r>
+              <a:rPr lang="en-US" sz="1200" i="1" dirty="0">
+                <a:solidFill>
+                  <a:srgbClr val="5A5A5A"/>
+                </a:solidFill>
+                <a:latin typeface="Calibri" pitchFamily="34" charset="0"/>
+                <a:ea typeface="Calibri" pitchFamily="34" charset="-122"/>
+                <a:cs typeface="Calibri" pitchFamily="34" charset="-120"/>
+              </a:rPr>
+              <a:t>Prompt para testar (copie e cole no chat após carregar a skill):</a:t>
+            </a:r>
+            <a:endParaRPr lang="en-US" sz="1200" dirty="0"/>
+          </a:p>
+        </p:txBody>
+      </p:sp>
+      <p:sp>
+        <p:nvSpPr>
+          <p:cNvPr id="8" name="Text 6"/>
+          <p:cNvSpPr/>
+          <p:nvPr/>
+        </p:nvSpPr>
+        <p:spPr>
+          <a:xfrm>
+            <a:off x="731520" y="1463040"/>
+            <a:ext cx="7772400" cy="914400"/>
+          </a:xfrm>
+          <a:prstGeom prst="rect">
+            <a:avLst/>
+          </a:prstGeom>
+          <a:noFill/>
+          <a:ln/>
+        </p:spPr>
+        <p:txBody>
+          <a:bodyPr wrap="square" lIns="0" tIns="0" rIns="0" bIns="0" rtlCol="0" anchor="t"/>
+          <a:lstStyle/>
+          <a:p>
+            <a:pPr algn="l" indent="0" marL="0">
+              <a:buNone/>
+            </a:pPr>
+            <a:r>
+              <a:rPr lang="en-US" sz="1300" dirty="0">
+                <a:solidFill>
+                  <a:srgbClr val="2D2D2D"/>
+                </a:solidFill>
+                <a:latin typeface="Consolas" pitchFamily="34" charset="0"/>
+                <a:ea typeface="Consolas" pitchFamily="34" charset="-122"/>
+                <a:cs typeface="Consolas" pitchFamily="34" charset="-120"/>
+              </a:rPr>
+              <a:t>"Sou professor do 4º ano do Colégio Divino Coração.</a:t>
+            </a:r>
+            <a:endParaRPr lang="en-US" sz="1300" dirty="0"/>
+          </a:p>
+          <a:p>
+            <a:pPr algn="l" indent="0" marL="0">
+              <a:buNone/>
+            </a:pPr>
+            <a:r>
+              <a:rPr lang="en-US" sz="1300" dirty="0">
+                <a:solidFill>
+                  <a:srgbClr val="2D2D2D"/>
+                </a:solidFill>
+                <a:latin typeface="Consolas" pitchFamily="34" charset="0"/>
+                <a:ea typeface="Consolas" pitchFamily="34" charset="-122"/>
+                <a:cs typeface="Consolas" pitchFamily="34" charset="-120"/>
+              </a:rPr>
+              <a:t>Preciso de um parecer descritivo trimestral para um aluno</a:t>
+            </a:r>
+            <a:endParaRPr lang="en-US" sz="1300" dirty="0"/>
+          </a:p>
+          <a:p>
+            <a:pPr algn="l" indent="0" marL="0">
+              <a:buNone/>
+            </a:pPr>
+            <a:r>
+              <a:rPr lang="en-US" sz="1300" dirty="0">
+                <a:solidFill>
+                  <a:srgbClr val="2D2D2D"/>
+                </a:solidFill>
+                <a:latin typeface="Consolas" pitchFamily="34" charset="0"/>
+                <a:ea typeface="Consolas" pitchFamily="34" charset="-122"/>
+                <a:cs typeface="Consolas" pitchFamily="34" charset="-120"/>
+              </a:rPr>
+              <a:t>que está com dificuldades em leitura e interpretação de texto.</a:t>
+            </a:r>
+            <a:endParaRPr lang="en-US" sz="1300" dirty="0"/>
+          </a:p>
+          <a:p>
+            <a:pPr algn="l" indent="0" marL="0">
+              <a:buNone/>
+            </a:pPr>
+            <a:r>
+              <a:rPr lang="en-US" sz="1300" dirty="0">
+                <a:solidFill>
+                  <a:srgbClr val="2D2D2D"/>
+                </a:solidFill>
+                <a:latin typeface="Consolas" pitchFamily="34" charset="0"/>
+                <a:ea typeface="Consolas" pitchFamily="34" charset="-122"/>
+                <a:cs typeface="Consolas" pitchFamily="34" charset="-120"/>
+              </a:rPr>
+              <a:t>Inclua sugestões para a família e alinhamento ao PPPP da ACSC."</a:t>
+            </a:r>
+            <a:endParaRPr lang="en-US" sz="1300" dirty="0"/>
+          </a:p>
+        </p:txBody>
+      </p:sp>
+      <p:sp>
+        <p:nvSpPr>
+          <p:cNvPr id="9" name="Shape 7"/>
+          <p:cNvSpPr/>
+          <p:nvPr/>
+        </p:nvSpPr>
+        <p:spPr>
+          <a:xfrm>
+            <a:off x="457200" y="2834640"/>
+            <a:ext cx="8229600" cy="1828800"/>
+          </a:xfrm>
+          <a:prstGeom prst="rect">
+            <a:avLst/>
+          </a:prstGeom>
+          <a:solidFill>
+            <a:srgbClr val="1A3A3A"/>
+          </a:solidFill>
+          <a:ln/>
+          <a:effectLst>
+            <a:outerShdw sx="100000" sy="100000" kx="0" ky="0" algn="bl" rotWithShape="0" blurRad="101600" dist="25400" dir="8100000">
+              <a:srgbClr val="000000">
+                <a:alpha val="12000"/>
+              </a:srgbClr>
+            </a:outerShdw>
+          </a:effectLst>
+        </p:spPr>
+      </p:sp>
+      <p:sp>
+        <p:nvSpPr>
+          <p:cNvPr id="10" name="Text 8"/>
+          <p:cNvSpPr/>
+          <p:nvPr/>
+        </p:nvSpPr>
+        <p:spPr>
+          <a:xfrm>
+            <a:off x="731520" y="2926080"/>
+            <a:ext cx="7772400" cy="274320"/>
+          </a:xfrm>
+          <a:prstGeom prst="rect">
+            <a:avLst/>
+          </a:prstGeom>
+          <a:noFill/>
+          <a:ln/>
+        </p:spPr>
+        <p:txBody>
+          <a:bodyPr wrap="square" lIns="0" tIns="0" rIns="0" bIns="0" rtlCol="0" anchor="ctr"/>
+          <a:lstStyle/>
+          <a:p>
+            <a:pPr indent="0" marL="0">
+              <a:buNone/>
+            </a:pPr>
+            <a:r>
+              <a:rPr lang="en-US" sz="1200" b="1" dirty="0">
+                <a:solidFill>
+                  <a:srgbClr val="D4A843"/>
+                </a:solidFill>
+                <a:latin typeface="Calibri" pitchFamily="34" charset="0"/>
+                <a:ea typeface="Calibri" pitchFamily="34" charset="-122"/>
+                <a:cs typeface="Calibri" pitchFamily="34" charset="-120"/>
+              </a:rPr>
+              <a:t>O que a IA vai responder:</a:t>
+            </a:r>
+            <a:endParaRPr lang="en-US" sz="1200" dirty="0"/>
+          </a:p>
+        </p:txBody>
+      </p:sp>
+      <p:sp>
+        <p:nvSpPr>
+          <p:cNvPr id="11" name="Text 9"/>
+          <p:cNvSpPr/>
+          <p:nvPr/>
+        </p:nvSpPr>
+        <p:spPr>
+          <a:xfrm>
+            <a:off x="731520" y="3200400"/>
+            <a:ext cx="7772400" cy="1280160"/>
+          </a:xfrm>
+          <a:prstGeom prst="rect">
+            <a:avLst/>
+          </a:prstGeom>
+          <a:noFill/>
+          <a:ln/>
+        </p:spPr>
+        <p:txBody>
+          <a:bodyPr wrap="square" lIns="0" tIns="0" rIns="0" bIns="0" rtlCol="0" anchor="t"/>
+          <a:lstStyle/>
+          <a:p>
+            <a:pPr algn="l" marL="342900" indent="-342900">
+              <a:buSzPct val="100000"/>
+              <a:buChar char="•"/>
+            </a:pPr>
+            <a:r>
+              <a:rPr lang="en-US" sz="1300" dirty="0">
+                <a:solidFill>
+                  <a:srgbClr val="F7F3EE"/>
+                </a:solidFill>
+                <a:latin typeface="Calibri" pitchFamily="34" charset="0"/>
+                <a:ea typeface="Calibri" pitchFamily="34" charset="-122"/>
+                <a:cs typeface="Calibri" pitchFamily="34" charset="-120"/>
+              </a:rPr>
+              <a:t>Um parecer descritivo completo nos padrões do Colégio</a:t>
+            </a:r>
+            <a:endParaRPr lang="en-US" sz="1300" dirty="0"/>
+          </a:p>
+          <a:p>
+            <a:pPr algn="l" marL="342900" indent="-342900">
+              <a:buSzPct val="100000"/>
+              <a:buChar char="•"/>
+            </a:pPr>
+            <a:r>
+              <a:rPr lang="en-US" sz="1300" dirty="0">
+                <a:solidFill>
+                  <a:srgbClr val="F7F3EE"/>
+                </a:solidFill>
+                <a:latin typeface="Calibri" pitchFamily="34" charset="0"/>
+                <a:ea typeface="Calibri" pitchFamily="34" charset="-122"/>
+                <a:cs typeface="Calibri" pitchFamily="34" charset="-120"/>
+              </a:rPr>
+              <a:t>Alinhado ao sistema trimestral e ao PPPP</a:t>
+            </a:r>
+            <a:endParaRPr lang="en-US" sz="1300" dirty="0"/>
+          </a:p>
+          <a:p>
+            <a:pPr algn="l" marL="342900" indent="-342900">
+              <a:buSzPct val="100000"/>
+              <a:buChar char="•"/>
+            </a:pPr>
+            <a:r>
+              <a:rPr lang="en-US" sz="1300" dirty="0">
+                <a:solidFill>
+                  <a:srgbClr val="F7F3EE"/>
+                </a:solidFill>
+                <a:latin typeface="Calibri" pitchFamily="34" charset="0"/>
+                <a:ea typeface="Calibri" pitchFamily="34" charset="-122"/>
+                <a:cs typeface="Calibri" pitchFamily="34" charset="-120"/>
+              </a:rPr>
+              <a:t>Com linguagem adequada para o boletim escolar</a:t>
+            </a:r>
+            <a:endParaRPr lang="en-US" sz="1300" dirty="0"/>
+          </a:p>
+          <a:p>
+            <a:pPr algn="l" marL="342900" indent="-342900">
+              <a:buSzPct val="100000"/>
+              <a:buChar char="•"/>
+            </a:pPr>
+            <a:r>
+              <a:rPr lang="en-US" sz="1300" dirty="0">
+                <a:solidFill>
+                  <a:srgbClr val="F7F3EE"/>
+                </a:solidFill>
+                <a:latin typeface="Calibri" pitchFamily="34" charset="0"/>
+                <a:ea typeface="Calibri" pitchFamily="34" charset="-122"/>
+                <a:cs typeface="Calibri" pitchFamily="34" charset="-120"/>
+              </a:rPr>
+              <a:t>Sugestões pedagógicas para a família</a:t>
+            </a:r>
+            <a:endParaRPr lang="en-US" sz="1300" dirty="0"/>
+          </a:p>
+          <a:p>
+            <a:pPr algn="l" marL="342900" indent="-342900">
+              <a:buSzPct val="100000"/>
+              <a:buChar char="•"/>
+            </a:pPr>
+            <a:r>
+              <a:rPr lang="en-US" sz="1300" dirty="0">
+                <a:solidFill>
+                  <a:srgbClr val="F7F3EE"/>
+                </a:solidFill>
+                <a:latin typeface="Calibri" pitchFamily="34" charset="0"/>
+                <a:ea typeface="Calibri" pitchFamily="34" charset="-122"/>
+                <a:cs typeface="Calibri" pitchFamily="34" charset="-120"/>
+              </a:rPr>
+              <a:t>Estratégias de intervenção em sala de aula</a:t>
+            </a:r>
+            <a:endParaRPr lang="en-US" sz="1300" dirty="0"/>
+          </a:p>
+        </p:txBody>
+      </p:sp>
+    </p:spTree>
+  </p:cSld>
+  <p:clrMapOvr>
+    <a:masterClrMapping/>
+  </p:clrMapOvr>
+</p:sld>
+</file>
+
+<file path=ppt/slides/slide12.xml><?xml version="1.0" encoding="utf-8"?>
+<p:sld xmlns:a="http://schemas.openxmlformats.org/drawingml/2006/main" xmlns:r="http://schemas.openxmlformats.org/officeDocument/2006/relationships" xmlns:p="http://schemas.openxmlformats.org/presentationml/2006/main">
+  <p:cSld name="Slide 12">
+    <p:bg>
+      <p:bgPr>
+        <a:solidFill>
+          <a:srgbClr val="1A3A3A"/>
+        </a:solidFill>
+      </p:bgPr>
+    </p:bg>
+    <p:spTree>
+      <p:nvGrpSpPr>
+        <p:cNvPr id="1" name=""/>
+        <p:cNvGrpSpPr/>
+        <p:nvPr/>
+      </p:nvGrpSpPr>
+      <p:grpSpPr>
+        <a:xfrm>
+          <a:off x="0" y="0"/>
+          <a:ext cx="0" cy="0"/>
+          <a:chOff x="0" y="0"/>
+          <a:chExt cx="0" cy="0"/>
+        </a:xfrm>
+      </p:grpSpPr>
+      <p:sp>
+        <p:nvSpPr>
+          <p:cNvPr id="2" name="Shape 0"/>
+          <p:cNvSpPr/>
+          <p:nvPr/>
+        </p:nvSpPr>
+        <p:spPr>
+          <a:xfrm>
+            <a:off x="0" y="0"/>
+            <a:ext cx="9144000" cy="54864"/>
+          </a:xfrm>
+          <a:prstGeom prst="rect">
+            <a:avLst/>
+          </a:prstGeom>
+          <a:solidFill>
+            <a:srgbClr val="D4A843"/>
+          </a:solidFill>
+          <a:ln/>
+        </p:spPr>
+      </p:sp>
+      <p:sp>
+        <p:nvSpPr>
+          <p:cNvPr id="3" name="Text 1"/>
+          <p:cNvSpPr/>
+          <p:nvPr/>
+        </p:nvSpPr>
+        <p:spPr>
+          <a:xfrm>
+            <a:off x="731520" y="274320"/>
+            <a:ext cx="7680960" cy="640080"/>
+          </a:xfrm>
+          <a:prstGeom prst="rect">
+            <a:avLst/>
+          </a:prstGeom>
+          <a:noFill/>
+          <a:ln/>
+        </p:spPr>
+        <p:txBody>
+          <a:bodyPr wrap="square" rtlCol="0" anchor="ctr"/>
+          <a:lstStyle/>
+          <a:p>
+            <a:pPr indent="0" marL="0">
+              <a:buNone/>
+            </a:pPr>
+            <a:r>
+              <a:rPr lang="en-US" sz="2800" b="1" dirty="0">
+                <a:solidFill>
+                  <a:srgbClr val="FFFFFF"/>
+                </a:solidFill>
+                <a:latin typeface="Georgia" pitchFamily="34" charset="0"/>
+                <a:ea typeface="Georgia" pitchFamily="34" charset="-122"/>
+                <a:cs typeface="Georgia" pitchFamily="34" charset="-120"/>
+              </a:rPr>
               <a:t>Resumo da Metáfora</a:t>
             </a:r>
             <a:endParaRPr lang="en-US" sz="2800" dirty="0"/>
@@ -2090,7 +3808,7 @@
       </p:sp>
       <p:graphicFrame>
         <p:nvGraphicFramePr>
-          <p:cNvPr id="11" name="Table 0"/>
+          <p:cNvPr id="13" name="Table 0"/>
           <p:cNvGraphicFramePr>
             <a:graphicFrameLocks noGrp="1"/>
           </p:cNvGraphicFramePr>
@@ -2909,9 +4627,9 @@
 </p:sld>
 </file>
 
-<file path=ppt/slides/slide11.xml><?xml version="1.0" encoding="utf-8"?>
+<file path=ppt/slides/slide13.xml><?xml version="1.0" encoding="utf-8"?>
 <p:sld xmlns:a="http://schemas.openxmlformats.org/drawingml/2006/main" xmlns:r="http://schemas.openxmlformats.org/officeDocument/2006/relationships" xmlns:p="http://schemas.openxmlformats.org/presentationml/2006/main">
-  <p:cSld name="Slide 11">
+  <p:cSld name="Slide 13">
     <p:bg>
       <p:bgPr>
         <a:solidFill>
@@ -3516,7 +5234,7 @@
           <a:bodyPr wrap="square" rtlCol="0" anchor="ctr"/>
           <a:lstStyle/>
           <a:p>
-            <a:pPr algn="l" indent="0" marL="0">
+            <a:pPr indent="0" marL="0">
               <a:buNone/>
             </a:pPr>
             <a:r>
@@ -3528,7 +5246,7 @@
                 <a:ea typeface="Georgia" pitchFamily="34" charset="-122"/>
                 <a:cs typeface="Georgia" pitchFamily="34" charset="-120"/>
               </a:rPr>
-              <a:t>Modelos de IA = Montadoras de Veículos</a:t>
+              <a:t>Como os Modelos de IA Funcionam?</a:t>
             </a:r>
             <a:endParaRPr lang="en-US" sz="2400" dirty="0"/>
           </a:p>
@@ -3563,7 +5281,7 @@
         <p:spPr>
           <a:xfrm>
             <a:off x="548640" y="1097280"/>
-            <a:ext cx="8046720" cy="3657600"/>
+            <a:ext cx="5029200" cy="1097280"/>
           </a:xfrm>
           <a:prstGeom prst="rect">
             <a:avLst/>
@@ -3590,7 +5308,7 @@
                 <a:ea typeface="Calibri" pitchFamily="34" charset="-122"/>
                 <a:cs typeface="Calibri" pitchFamily="34" charset="-120"/>
               </a:rPr>
-              <a:t>Se a IA é a indústria automotiva, os modelos de IA são as montadoras:</a:t>
+              <a:t>Diferente do que muitos pensam, a IA não "pensa" ou "entende" como uma pessoa.</a:t>
             </a:r>
             <a:endParaRPr lang="en-US" sz="1400" dirty="0"/>
           </a:p>
@@ -3602,7 +5320,107 @@
               <a:buNone/>
             </a:pPr>
             <a:r>
-              <a:rPr lang="en-US" sz="1400" dirty="0">
+              <a:rPr lang="en-US" sz="1600" b="1" dirty="0">
+                <a:solidFill>
+                  <a:srgbClr val="C75B39"/>
+                </a:solidFill>
+                <a:latin typeface="Calibri" pitchFamily="34" charset="0"/>
+                <a:ea typeface="Calibri" pitchFamily="34" charset="-122"/>
+                <a:cs typeface="Calibri" pitchFamily="34" charset="-120"/>
+              </a:rPr>
+              <a:t>Ela funciona com dois ingredientes:</a:t>
+            </a:r>
+            <a:endParaRPr lang="en-US" sz="1400" dirty="0"/>
+          </a:p>
+        </p:txBody>
+      </p:sp>
+      <p:sp>
+        <p:nvSpPr>
+          <p:cNvPr id="6" name="Shape 4"/>
+          <p:cNvSpPr/>
+          <p:nvPr/>
+        </p:nvSpPr>
+        <p:spPr>
+          <a:xfrm>
+            <a:off x="548640" y="2103120"/>
+            <a:ext cx="5029200" cy="640080"/>
+          </a:xfrm>
+          <a:prstGeom prst="rect">
+            <a:avLst/>
+          </a:prstGeom>
+          <a:solidFill>
+            <a:srgbClr val="FFFFFF"/>
+          </a:solidFill>
+          <a:ln/>
+          <a:effectLst>
+            <a:outerShdw sx="100000" sy="100000" kx="0" ky="0" algn="bl" rotWithShape="0" blurRad="101600" dist="25400" dir="8100000">
+              <a:srgbClr val="000000">
+                <a:alpha val="12000"/>
+              </a:srgbClr>
+            </a:outerShdw>
+          </a:effectLst>
+        </p:spPr>
+      </p:sp>
+      <p:sp>
+        <p:nvSpPr>
+          <p:cNvPr id="7" name="Shape 5"/>
+          <p:cNvSpPr/>
+          <p:nvPr/>
+        </p:nvSpPr>
+        <p:spPr>
+          <a:xfrm>
+            <a:off x="548640" y="2103120"/>
+            <a:ext cx="54864" cy="640080"/>
+          </a:xfrm>
+          <a:prstGeom prst="rect">
+            <a:avLst/>
+          </a:prstGeom>
+          <a:solidFill>
+            <a:srgbClr val="C75B39"/>
+          </a:solidFill>
+          <a:ln/>
+        </p:spPr>
+      </p:sp>
+      <p:sp>
+        <p:nvSpPr>
+          <p:cNvPr id="8" name="Text 6"/>
+          <p:cNvSpPr/>
+          <p:nvPr/>
+        </p:nvSpPr>
+        <p:spPr>
+          <a:xfrm>
+            <a:off x="777240" y="2148840"/>
+            <a:ext cx="4663440" cy="548640"/>
+          </a:xfrm>
+          <a:prstGeom prst="rect">
+            <a:avLst/>
+          </a:prstGeom>
+          <a:noFill/>
+          <a:ln/>
+        </p:spPr>
+        <p:txBody>
+          <a:bodyPr wrap="square" lIns="0" tIns="0" rIns="0" bIns="0" rtlCol="0" anchor="ctr"/>
+          <a:lstStyle/>
+          <a:p>
+            <a:pPr algn="l" indent="0" marL="0">
+              <a:buNone/>
+            </a:pPr>
+            <a:r>
+              <a:rPr lang="en-US" sz="1300" b="1" dirty="0">
+                <a:solidFill>
+                  <a:srgbClr val="1A3A3A"/>
+                </a:solidFill>
+                <a:latin typeface="Calibri" pitchFamily="34" charset="0"/>
+                <a:ea typeface="Calibri" pitchFamily="34" charset="-122"/>
+                <a:cs typeface="Calibri" pitchFamily="34" charset="-120"/>
+              </a:rPr>
+              <a:t>1. Estatística: </a:t>
+            </a:r>
+            <a:pPr algn="l" indent="0" marL="0">
+              <a:buNone/>
+            </a:pPr>
+            <a:r>
+              <a:rPr lang="en-US" sz="1300" dirty="0">
                 <a:solidFill>
                   <a:srgbClr val="2D2D2D"/>
                 </a:solidFill>
@@ -3610,19 +5428,99 @@
                 <a:ea typeface="Calibri" pitchFamily="34" charset="-122"/>
                 <a:cs typeface="Calibri" pitchFamily="34" charset="-120"/>
               </a:rPr>
-              <a:t>Cada montadora (Ford, Toyota, Honda, Volkswagen) tem sua engenharia, seu jeito de construir carros, suas especialidades.</a:t>
-            </a:r>
-            <a:endParaRPr lang="en-US" sz="1400" dirty="0"/>
-          </a:p>
+              <a:t>O modelo foi treinado com bilhões de textos. Ele aprendeu quais palavras costumam aparecer juntas, em que ordem, em cada contexto.</a:t>
+            </a:r>
+            <a:endParaRPr lang="en-US" sz="1300" dirty="0"/>
+          </a:p>
+        </p:txBody>
+      </p:sp>
+      <p:sp>
+        <p:nvSpPr>
+          <p:cNvPr id="9" name="Shape 7"/>
+          <p:cNvSpPr/>
+          <p:nvPr/>
+        </p:nvSpPr>
+        <p:spPr>
+          <a:xfrm>
+            <a:off x="548640" y="2880360"/>
+            <a:ext cx="5029200" cy="640080"/>
+          </a:xfrm>
+          <a:prstGeom prst="rect">
+            <a:avLst/>
+          </a:prstGeom>
+          <a:solidFill>
+            <a:srgbClr val="FFFFFF"/>
+          </a:solidFill>
+          <a:ln/>
+          <a:effectLst>
+            <a:outerShdw sx="100000" sy="100000" kx="0" ky="0" algn="bl" rotWithShape="0" blurRad="101600" dist="25400" dir="8100000">
+              <a:srgbClr val="000000">
+                <a:alpha val="12000"/>
+              </a:srgbClr>
+            </a:outerShdw>
+          </a:effectLst>
+        </p:spPr>
+      </p:sp>
+      <p:sp>
+        <p:nvSpPr>
+          <p:cNvPr id="10" name="Shape 8"/>
+          <p:cNvSpPr/>
+          <p:nvPr/>
+        </p:nvSpPr>
+        <p:spPr>
+          <a:xfrm>
+            <a:off x="548640" y="2880360"/>
+            <a:ext cx="54864" cy="640080"/>
+          </a:xfrm>
+          <a:prstGeom prst="rect">
+            <a:avLst/>
+          </a:prstGeom>
+          <a:solidFill>
+            <a:srgbClr val="C75B39"/>
+          </a:solidFill>
+          <a:ln/>
+        </p:spPr>
+      </p:sp>
+      <p:sp>
+        <p:nvSpPr>
+          <p:cNvPr id="11" name="Text 9"/>
+          <p:cNvSpPr/>
+          <p:nvPr/>
+        </p:nvSpPr>
+        <p:spPr>
+          <a:xfrm>
+            <a:off x="777240" y="2926080"/>
+            <a:ext cx="4663440" cy="548640"/>
+          </a:xfrm>
+          <a:prstGeom prst="rect">
+            <a:avLst/>
+          </a:prstGeom>
+          <a:noFill/>
+          <a:ln/>
+        </p:spPr>
+        <p:txBody>
+          <a:bodyPr wrap="square" lIns="0" tIns="0" rIns="0" bIns="0" rtlCol="0" anchor="ctr"/>
+          <a:lstStyle/>
           <a:p>
             <a:pPr algn="l" indent="0" marL="0">
-              <a:spcAft>
-                <a:spcPts val="400"/>
-              </a:spcAft>
-              <a:buNone/>
-            </a:pPr>
-            <a:r>
-              <a:rPr lang="en-US" sz="1400" dirty="0">
+              <a:buNone/>
+            </a:pPr>
+            <a:r>
+              <a:rPr lang="en-US" sz="1300" b="1" dirty="0">
+                <a:solidFill>
+                  <a:srgbClr val="1A3A3A"/>
+                </a:solidFill>
+                <a:latin typeface="Calibri" pitchFamily="34" charset="0"/>
+                <a:ea typeface="Calibri" pitchFamily="34" charset="-122"/>
+                <a:cs typeface="Calibri" pitchFamily="34" charset="-120"/>
+              </a:rPr>
+              <a:t>2. Previsão: </a:t>
+            </a:r>
+            <a:pPr algn="l" indent="0" marL="0">
+              <a:buNone/>
+            </a:pPr>
+            <a:r>
+              <a:rPr lang="en-US" sz="1300" dirty="0">
                 <a:solidFill>
                   <a:srgbClr val="2D2D2D"/>
                 </a:solidFill>
@@ -3630,9 +5528,343 @@
                 <a:ea typeface="Calibri" pitchFamily="34" charset="-122"/>
                 <a:cs typeface="Calibri" pitchFamily="34" charset="-120"/>
               </a:rPr>
-              <a:t>Assim, cada modelo de IA tem sua própria arquitetura e forma de processar informações:</a:t>
-            </a:r>
-            <a:endParaRPr lang="en-US" sz="1400" dirty="0"/>
+              <a:t>Quando você pergunta algo, ele calcula: "qual é a palavra mais provável de vir agora?" Palavra por palavra, ele constrói a resposta.</a:t>
+            </a:r>
+            <a:endParaRPr lang="en-US" sz="1300" dirty="0"/>
+          </a:p>
+        </p:txBody>
+      </p:sp>
+      <p:sp>
+        <p:nvSpPr>
+          <p:cNvPr id="12" name="Shape 10"/>
+          <p:cNvSpPr/>
+          <p:nvPr/>
+        </p:nvSpPr>
+        <p:spPr>
+          <a:xfrm>
+            <a:off x="5943600" y="1097280"/>
+            <a:ext cx="2834640" cy="3474720"/>
+          </a:xfrm>
+          <a:prstGeom prst="rect">
+            <a:avLst/>
+          </a:prstGeom>
+          <a:solidFill>
+            <a:srgbClr val="1A3A3A"/>
+          </a:solidFill>
+          <a:ln/>
+          <a:effectLst>
+            <a:outerShdw sx="100000" sy="100000" kx="0" ky="0" algn="bl" rotWithShape="0" blurRad="101600" dist="25400" dir="8100000">
+              <a:srgbClr val="000000">
+                <a:alpha val="12000"/>
+              </a:srgbClr>
+            </a:outerShdw>
+          </a:effectLst>
+        </p:spPr>
+      </p:sp>
+      <p:sp>
+        <p:nvSpPr>
+          <p:cNvPr id="13" name="Text 11"/>
+          <p:cNvSpPr/>
+          <p:nvPr/>
+        </p:nvSpPr>
+        <p:spPr>
+          <a:xfrm>
+            <a:off x="6126480" y="1280160"/>
+            <a:ext cx="2468880" cy="548640"/>
+          </a:xfrm>
+          <a:prstGeom prst="rect">
+            <a:avLst/>
+          </a:prstGeom>
+          <a:noFill/>
+          <a:ln/>
+        </p:spPr>
+        <p:txBody>
+          <a:bodyPr wrap="square" lIns="0" tIns="0" rIns="0" bIns="0" rtlCol="0" anchor="ctr"/>
+          <a:lstStyle/>
+          <a:p>
+            <a:pPr algn="ctr" indent="0" marL="0">
+              <a:buNone/>
+            </a:pPr>
+            <a:r>
+              <a:rPr lang="en-US" sz="1300" dirty="0">
+                <a:solidFill>
+                  <a:srgbClr val="F7F3EE"/>
+                </a:solidFill>
+                <a:latin typeface="Calibri" pitchFamily="34" charset="0"/>
+                <a:ea typeface="Calibri" pitchFamily="34" charset="-122"/>
+                <a:cs typeface="Calibri" pitchFamily="34" charset="-120"/>
+              </a:rPr>
+              <a:t>Na prática, a IA é uma máquina de</a:t>
+            </a:r>
+            <a:endParaRPr lang="en-US" sz="1300" dirty="0"/>
+          </a:p>
+        </p:txBody>
+      </p:sp>
+      <p:sp>
+        <p:nvSpPr>
+          <p:cNvPr id="14" name="Text 12"/>
+          <p:cNvSpPr/>
+          <p:nvPr/>
+        </p:nvSpPr>
+        <p:spPr>
+          <a:xfrm>
+            <a:off x="6126480" y="1828800"/>
+            <a:ext cx="2468880" cy="640080"/>
+          </a:xfrm>
+          <a:prstGeom prst="rect">
+            <a:avLst/>
+          </a:prstGeom>
+          <a:noFill/>
+          <a:ln/>
+        </p:spPr>
+        <p:txBody>
+          <a:bodyPr wrap="square" lIns="0" tIns="0" rIns="0" bIns="0" rtlCol="0" anchor="ctr"/>
+          <a:lstStyle/>
+          <a:p>
+            <a:pPr algn="ctr" indent="0" marL="0">
+              <a:buNone/>
+            </a:pPr>
+            <a:r>
+              <a:rPr lang="en-US" sz="3200" b="1" dirty="0">
+                <a:solidFill>
+                  <a:srgbClr val="D4A843"/>
+                </a:solidFill>
+                <a:latin typeface="Georgia" pitchFamily="34" charset="0"/>
+                <a:ea typeface="Georgia" pitchFamily="34" charset="-122"/>
+                <a:cs typeface="Georgia" pitchFamily="34" charset="-120"/>
+              </a:rPr>
+              <a:t>ADIVINHAR</a:t>
+            </a:r>
+            <a:endParaRPr lang="en-US" sz="3200" dirty="0"/>
+          </a:p>
+        </p:txBody>
+      </p:sp>
+      <p:sp>
+        <p:nvSpPr>
+          <p:cNvPr id="15" name="Text 13"/>
+          <p:cNvSpPr/>
+          <p:nvPr/>
+        </p:nvSpPr>
+        <p:spPr>
+          <a:xfrm>
+            <a:off x="6126480" y="2377440"/>
+            <a:ext cx="2468880" cy="731520"/>
+          </a:xfrm>
+          <a:prstGeom prst="rect">
+            <a:avLst/>
+          </a:prstGeom>
+          <a:noFill/>
+          <a:ln/>
+        </p:spPr>
+        <p:txBody>
+          <a:bodyPr wrap="square" lIns="0" tIns="0" rIns="0" bIns="0" rtlCol="0" anchor="ctr"/>
+          <a:lstStyle/>
+          <a:p>
+            <a:pPr algn="ctr" indent="0" marL="0">
+              <a:buNone/>
+            </a:pPr>
+            <a:r>
+              <a:rPr lang="en-US" sz="1600" dirty="0">
+                <a:solidFill>
+                  <a:srgbClr val="F7F3EE"/>
+                </a:solidFill>
+                <a:latin typeface="Calibri" pitchFamily="34" charset="0"/>
+                <a:ea typeface="Calibri" pitchFamily="34" charset="-122"/>
+                <a:cs typeface="Calibri" pitchFamily="34" charset="-120"/>
+              </a:rPr>
+              <a:t>a próxima</a:t>
+            </a:r>
+            <a:endParaRPr lang="en-US" sz="1600" dirty="0"/>
+          </a:p>
+          <a:p>
+            <a:pPr algn="ctr" indent="0" marL="0">
+              <a:buNone/>
+            </a:pPr>
+            <a:r>
+              <a:rPr lang="en-US" sz="1600" dirty="0">
+                <a:solidFill>
+                  <a:srgbClr val="F7F3EE"/>
+                </a:solidFill>
+                <a:latin typeface="Calibri" pitchFamily="34" charset="0"/>
+                <a:ea typeface="Calibri" pitchFamily="34" charset="-122"/>
+                <a:cs typeface="Calibri" pitchFamily="34" charset="-120"/>
+              </a:rPr>
+              <a:t>palavra</a:t>
+            </a:r>
+            <a:endParaRPr lang="en-US" sz="1600" dirty="0"/>
+          </a:p>
+        </p:txBody>
+      </p:sp>
+      <p:sp>
+        <p:nvSpPr>
+          <p:cNvPr id="16" name="Shape 14"/>
+          <p:cNvSpPr/>
+          <p:nvPr/>
+        </p:nvSpPr>
+        <p:spPr>
+          <a:xfrm>
+            <a:off x="6309360" y="3200400"/>
+            <a:ext cx="2103120" cy="36576"/>
+          </a:xfrm>
+          <a:prstGeom prst="rect">
+            <a:avLst/>
+          </a:prstGeom>
+          <a:solidFill>
+            <a:srgbClr val="D4A843"/>
+          </a:solidFill>
+          <a:ln/>
+        </p:spPr>
+      </p:sp>
+      <p:sp>
+        <p:nvSpPr>
+          <p:cNvPr id="17" name="Text 15"/>
+          <p:cNvSpPr/>
+          <p:nvPr/>
+        </p:nvSpPr>
+        <p:spPr>
+          <a:xfrm>
+            <a:off x="6126480" y="3291840"/>
+            <a:ext cx="2468880" cy="914400"/>
+          </a:xfrm>
+          <a:prstGeom prst="rect">
+            <a:avLst/>
+          </a:prstGeom>
+          <a:noFill/>
+          <a:ln/>
+        </p:spPr>
+        <p:txBody>
+          <a:bodyPr wrap="square" lIns="0" tIns="0" rIns="0" bIns="0" rtlCol="0" anchor="ctr"/>
+          <a:lstStyle/>
+          <a:p>
+            <a:pPr algn="ctr" indent="0" marL="0">
+              <a:buNone/>
+            </a:pPr>
+            <a:r>
+              <a:rPr lang="en-US" sz="1200" dirty="0">
+                <a:solidFill>
+                  <a:srgbClr val="F7F3EE"/>
+                </a:solidFill>
+                <a:latin typeface="Calibri" pitchFamily="34" charset="0"/>
+                <a:ea typeface="Calibri" pitchFamily="34" charset="-122"/>
+                <a:cs typeface="Calibri" pitchFamily="34" charset="-120"/>
+              </a:rPr>
+              <a:t>Ela é muito boa nisso,</a:t>
+            </a:r>
+            <a:endParaRPr lang="en-US" sz="1200" dirty="0"/>
+          </a:p>
+          <a:p>
+            <a:pPr algn="ctr" indent="0" marL="0">
+              <a:buNone/>
+            </a:pPr>
+            <a:r>
+              <a:rPr lang="en-US" sz="1200" dirty="0">
+                <a:solidFill>
+                  <a:srgbClr val="F7F3EE"/>
+                </a:solidFill>
+                <a:latin typeface="Calibri" pitchFamily="34" charset="0"/>
+                <a:ea typeface="Calibri" pitchFamily="34" charset="-122"/>
+                <a:cs typeface="Calibri" pitchFamily="34" charset="-120"/>
+              </a:rPr>
+              <a:t>mas continua sendo</a:t>
+            </a:r>
+            <a:endParaRPr lang="en-US" sz="1200" dirty="0"/>
+          </a:p>
+          <a:p>
+            <a:pPr algn="ctr" indent="0" marL="0">
+              <a:buNone/>
+            </a:pPr>
+            <a:r>
+              <a:rPr lang="en-US" sz="1200" dirty="0">
+                <a:solidFill>
+                  <a:srgbClr val="F7F3EE"/>
+                </a:solidFill>
+                <a:latin typeface="Calibri" pitchFamily="34" charset="0"/>
+                <a:ea typeface="Calibri" pitchFamily="34" charset="-122"/>
+                <a:cs typeface="Calibri" pitchFamily="34" charset="-120"/>
+              </a:rPr>
+              <a:t>um palpite estatístico.</a:t>
+            </a:r>
+            <a:endParaRPr lang="en-US" sz="1200" dirty="0"/>
+          </a:p>
+        </p:txBody>
+      </p:sp>
+      <p:sp>
+        <p:nvSpPr>
+          <p:cNvPr id="18" name="Shape 16"/>
+          <p:cNvSpPr/>
+          <p:nvPr/>
+        </p:nvSpPr>
+        <p:spPr>
+          <a:xfrm>
+            <a:off x="548640" y="3931920"/>
+            <a:ext cx="5029200" cy="822960"/>
+          </a:xfrm>
+          <a:prstGeom prst="rect">
+            <a:avLst/>
+          </a:prstGeom>
+          <a:solidFill>
+            <a:srgbClr val="FFFFFF"/>
+          </a:solidFill>
+          <a:ln/>
+          <a:effectLst>
+            <a:outerShdw sx="100000" sy="100000" kx="0" ky="0" algn="bl" rotWithShape="0" blurRad="101600" dist="25400" dir="8100000">
+              <a:srgbClr val="000000">
+                <a:alpha val="12000"/>
+              </a:srgbClr>
+            </a:outerShdw>
+          </a:effectLst>
+        </p:spPr>
+      </p:sp>
+      <p:sp>
+        <p:nvSpPr>
+          <p:cNvPr id="19" name="Text 17"/>
+          <p:cNvSpPr/>
+          <p:nvPr/>
+        </p:nvSpPr>
+        <p:spPr>
+          <a:xfrm>
+            <a:off x="731520" y="4023360"/>
+            <a:ext cx="4663440" cy="640080"/>
+          </a:xfrm>
+          <a:prstGeom prst="rect">
+            <a:avLst/>
+          </a:prstGeom>
+          <a:noFill/>
+          <a:ln/>
+        </p:spPr>
+        <p:txBody>
+          <a:bodyPr wrap="square" lIns="0" tIns="0" rIns="0" bIns="0" rtlCol="0" anchor="ctr"/>
+          <a:lstStyle/>
+          <a:p>
+            <a:pPr algn="l" indent="0" marL="0">
+              <a:buNone/>
+            </a:pPr>
+            <a:r>
+              <a:rPr lang="en-US" sz="1200" b="1" dirty="0">
+                <a:solidFill>
+                  <a:srgbClr val="C75B39"/>
+                </a:solidFill>
+                <a:latin typeface="Calibri" pitchFamily="34" charset="0"/>
+                <a:ea typeface="Calibri" pitchFamily="34" charset="-122"/>
+                <a:cs typeface="Calibri" pitchFamily="34" charset="-120"/>
+              </a:rPr>
+              <a:t>Pense num corretor de texto do celular: </a:t>
+            </a:r>
+            <a:pPr algn="l" indent="0" marL="0">
+              <a:buNone/>
+            </a:pPr>
+            <a:r>
+              <a:rPr lang="en-US" sz="1200" dirty="0">
+                <a:solidFill>
+                  <a:srgbClr val="2D2D2D"/>
+                </a:solidFill>
+                <a:latin typeface="Calibri" pitchFamily="34" charset="0"/>
+                <a:ea typeface="Calibri" pitchFamily="34" charset="-122"/>
+                <a:cs typeface="Calibri" pitchFamily="34" charset="-120"/>
+              </a:rPr>
+              <a:t>ele sugere a próxima palavra baseado no que você já digitou. A IA generativa faz a mesma coisa — só que em escala gigante e com muito mais contexto.</a:t>
+            </a:r>
+            <a:endParaRPr lang="en-US" sz="1200" dirty="0"/>
           </a:p>
         </p:txBody>
       </p:sp>
@@ -3709,7 +5941,7 @@
           <a:bodyPr wrap="square" rtlCol="0" anchor="ctr"/>
           <a:lstStyle/>
           <a:p>
-            <a:pPr indent="0" marL="0">
+            <a:pPr algn="l" indent="0" marL="0">
               <a:buNone/>
             </a:pPr>
             <a:r>
@@ -3721,7 +5953,7 @@
                 <a:ea typeface="Georgia" pitchFamily="34" charset="-122"/>
                 <a:cs typeface="Georgia" pitchFamily="34" charset="-120"/>
               </a:rPr>
-              <a:t>Modelos de IA = Montadoras</a:t>
+              <a:t>Modelos de IA = Montadoras de Veículos</a:t>
             </a:r>
             <a:endParaRPr lang="en-US" sz="2400" dirty="0"/>
           </a:p>
@@ -3749,61 +5981,14 @@
       </p:sp>
       <p:sp>
         <p:nvSpPr>
-          <p:cNvPr id="5" name="Shape 3"/>
-          <p:cNvSpPr/>
-          <p:nvPr/>
-        </p:nvSpPr>
-        <p:spPr>
-          <a:xfrm>
-            <a:off x="457200" y="1097280"/>
-            <a:ext cx="3931920" cy="1645920"/>
-          </a:xfrm>
-          <a:prstGeom prst="rect">
-            <a:avLst/>
-          </a:prstGeom>
-          <a:solidFill>
-            <a:srgbClr val="FFFFFF"/>
-          </a:solidFill>
-          <a:ln/>
-          <a:effectLst>
-            <a:outerShdw sx="100000" sy="100000" kx="0" ky="0" algn="bl" rotWithShape="0" blurRad="101600" dist="25400" dir="8100000">
-              <a:srgbClr val="000000">
-                <a:alpha val="12000"/>
-              </a:srgbClr>
-            </a:outerShdw>
-          </a:effectLst>
-        </p:spPr>
-      </p:sp>
-      <p:sp>
-        <p:nvSpPr>
-          <p:cNvPr id="6" name="Shape 4"/>
-          <p:cNvSpPr/>
-          <p:nvPr/>
-        </p:nvSpPr>
-        <p:spPr>
-          <a:xfrm>
-            <a:off x="457200" y="1097280"/>
-            <a:ext cx="54864" cy="1645920"/>
-          </a:xfrm>
-          <a:prstGeom prst="rect">
-            <a:avLst/>
-          </a:prstGeom>
-          <a:solidFill>
-            <a:srgbClr val="C75B39"/>
-          </a:solidFill>
-          <a:ln/>
-        </p:spPr>
-      </p:sp>
-      <p:sp>
-        <p:nvSpPr>
-          <p:cNvPr id="7" name="Text 5"/>
-          <p:cNvSpPr/>
-          <p:nvPr/>
-        </p:nvSpPr>
-        <p:spPr>
-          <a:xfrm>
-            <a:off x="640080" y="1188720"/>
-            <a:ext cx="3566160" cy="365760"/>
+          <p:cNvPr id="5" name="Text 3"/>
+          <p:cNvSpPr/>
+          <p:nvPr/>
+        </p:nvSpPr>
+        <p:spPr>
+          <a:xfrm>
+            <a:off x="548640" y="1097280"/>
+            <a:ext cx="8046720" cy="3657600"/>
           </a:xfrm>
           <a:prstGeom prst="rect">
             <a:avLst/>
@@ -3812,594 +5997,67 @@
           <a:ln/>
         </p:spPr>
         <p:txBody>
-          <a:bodyPr wrap="square" lIns="0" tIns="0" rIns="0" bIns="0" rtlCol="0" anchor="ctr"/>
+          <a:bodyPr wrap="square" lIns="0" tIns="0" rIns="0" bIns="0" rtlCol="0" anchor="t"/>
           <a:lstStyle/>
           <a:p>
             <a:pPr algn="l" indent="0" marL="0">
+              <a:spcAft>
+                <a:spcPts val="800"/>
+              </a:spcAft>
               <a:buNone/>
             </a:pPr>
             <a:r>
               <a:rPr lang="en-US" sz="1600" b="1" dirty="0">
                 <a:solidFill>
-                  <a:srgbClr val="1A3A3A"/>
-                </a:solidFill>
-                <a:latin typeface="Georgia" pitchFamily="34" charset="0"/>
-                <a:ea typeface="Georgia" pitchFamily="34" charset="-122"/>
-                <a:cs typeface="Georgia" pitchFamily="34" charset="-120"/>
-              </a:rPr>
-              <a:t>GPT (OpenAI)</a:t>
-            </a:r>
-            <a:endParaRPr lang="en-US" sz="1600" dirty="0"/>
-          </a:p>
-        </p:txBody>
-      </p:sp>
-      <p:sp>
-        <p:nvSpPr>
-          <p:cNvPr id="8" name="Text 6"/>
-          <p:cNvSpPr/>
-          <p:nvPr/>
-        </p:nvSpPr>
-        <p:spPr>
-          <a:xfrm>
-            <a:off x="640080" y="1554480"/>
-            <a:ext cx="3566160" cy="274320"/>
-          </a:xfrm>
-          <a:prstGeom prst="rect">
-            <a:avLst/>
-          </a:prstGeom>
-          <a:noFill/>
-          <a:ln/>
-        </p:spPr>
-        <p:txBody>
-          <a:bodyPr wrap="square" lIns="0" tIns="0" rIns="0" bIns="0" rtlCol="0" anchor="ctr"/>
-          <a:lstStyle/>
+                  <a:srgbClr val="C75B39"/>
+                </a:solidFill>
+                <a:latin typeface="Calibri" pitchFamily="34" charset="0"/>
+                <a:ea typeface="Calibri" pitchFamily="34" charset="-122"/>
+                <a:cs typeface="Calibri" pitchFamily="34" charset="-120"/>
+              </a:rPr>
+              <a:t>Se a IA é a indústria automotiva, os modelos de IA são as montadoras:</a:t>
+            </a:r>
+            <a:endParaRPr lang="en-US" sz="1400" dirty="0"/>
+          </a:p>
           <a:p>
             <a:pPr algn="l" indent="0" marL="0">
-              <a:buNone/>
-            </a:pPr>
-            <a:r>
-              <a:rPr lang="en-US" sz="1300" i="1" dirty="0">
-                <a:solidFill>
-                  <a:srgbClr val="C75B39"/>
-                </a:solidFill>
-                <a:latin typeface="Calibri" pitchFamily="34" charset="0"/>
-                <a:ea typeface="Calibri" pitchFamily="34" charset="-122"/>
-                <a:cs typeface="Calibri" pitchFamily="34" charset="-120"/>
-              </a:rPr>
-              <a:t>→ Toyota</a:t>
-            </a:r>
-            <a:endParaRPr lang="en-US" sz="1300" dirty="0"/>
-          </a:p>
-        </p:txBody>
-      </p:sp>
-      <p:sp>
-        <p:nvSpPr>
-          <p:cNvPr id="9" name="Text 7"/>
-          <p:cNvSpPr/>
-          <p:nvPr/>
-        </p:nvSpPr>
-        <p:spPr>
-          <a:xfrm>
-            <a:off x="640080" y="1920240"/>
-            <a:ext cx="3566160" cy="640080"/>
-          </a:xfrm>
-          <a:prstGeom prst="rect">
-            <a:avLst/>
-          </a:prstGeom>
-          <a:noFill/>
-          <a:ln/>
-        </p:spPr>
-        <p:txBody>
-          <a:bodyPr wrap="square" lIns="0" tIns="0" rIns="0" bIns="0" rtlCol="0" anchor="ctr"/>
-          <a:lstStyle/>
+              <a:spcAft>
+                <a:spcPts val="600"/>
+              </a:spcAft>
+              <a:buNone/>
+            </a:pPr>
+            <a:r>
+              <a:rPr lang="en-US" sz="1400" dirty="0">
+                <a:solidFill>
+                  <a:srgbClr val="2D2D2D"/>
+                </a:solidFill>
+                <a:latin typeface="Calibri" pitchFamily="34" charset="0"/>
+                <a:ea typeface="Calibri" pitchFamily="34" charset="-122"/>
+                <a:cs typeface="Calibri" pitchFamily="34" charset="-120"/>
+              </a:rPr>
+              <a:t>Cada montadora (Ford, Toyota, Honda, Volkswagen) tem sua engenharia, seu jeito de construir carros, suas especialidades.</a:t>
+            </a:r>
+            <a:endParaRPr lang="en-US" sz="1400" dirty="0"/>
+          </a:p>
           <a:p>
             <a:pPr algn="l" indent="0" marL="0">
-              <a:buNone/>
-            </a:pPr>
-            <a:r>
-              <a:rPr lang="en-US" sz="1200" dirty="0">
-                <a:solidFill>
-                  <a:srgbClr val="5A5A5A"/>
-                </a:solidFill>
-                <a:latin typeface="Calibri" pitchFamily="34" charset="0"/>
-                <a:ea typeface="Calibri" pitchFamily="34" charset="-122"/>
-                <a:cs typeface="Calibri" pitchFamily="34" charset="-120"/>
-              </a:rPr>
-              <a:t>Versátil, confiável, o mais popular. Serve para quase tudo.</a:t>
-            </a:r>
-            <a:endParaRPr lang="en-US" sz="1200" dirty="0"/>
-          </a:p>
-        </p:txBody>
-      </p:sp>
-      <p:sp>
-        <p:nvSpPr>
-          <p:cNvPr id="10" name="Shape 8"/>
-          <p:cNvSpPr/>
-          <p:nvPr/>
-        </p:nvSpPr>
-        <p:spPr>
-          <a:xfrm>
-            <a:off x="4754880" y="1097280"/>
-            <a:ext cx="3931920" cy="1645920"/>
-          </a:xfrm>
-          <a:prstGeom prst="rect">
-            <a:avLst/>
-          </a:prstGeom>
-          <a:solidFill>
-            <a:srgbClr val="FFFFFF"/>
-          </a:solidFill>
-          <a:ln/>
-          <a:effectLst>
-            <a:outerShdw sx="100000" sy="100000" kx="0" ky="0" algn="bl" rotWithShape="0" blurRad="101600" dist="25400" dir="8100000">
-              <a:srgbClr val="000000">
-                <a:alpha val="12000"/>
-              </a:srgbClr>
-            </a:outerShdw>
-          </a:effectLst>
-        </p:spPr>
-      </p:sp>
-      <p:sp>
-        <p:nvSpPr>
-          <p:cNvPr id="11" name="Shape 9"/>
-          <p:cNvSpPr/>
-          <p:nvPr/>
-        </p:nvSpPr>
-        <p:spPr>
-          <a:xfrm>
-            <a:off x="4754880" y="1097280"/>
-            <a:ext cx="54864" cy="1645920"/>
-          </a:xfrm>
-          <a:prstGeom prst="rect">
-            <a:avLst/>
-          </a:prstGeom>
-          <a:solidFill>
-            <a:srgbClr val="C75B39"/>
-          </a:solidFill>
-          <a:ln/>
-        </p:spPr>
-      </p:sp>
-      <p:sp>
-        <p:nvSpPr>
-          <p:cNvPr id="12" name="Text 10"/>
-          <p:cNvSpPr/>
-          <p:nvPr/>
-        </p:nvSpPr>
-        <p:spPr>
-          <a:xfrm>
-            <a:off x="4937760" y="1188720"/>
-            <a:ext cx="3566160" cy="365760"/>
-          </a:xfrm>
-          <a:prstGeom prst="rect">
-            <a:avLst/>
-          </a:prstGeom>
-          <a:noFill/>
-          <a:ln/>
-        </p:spPr>
-        <p:txBody>
-          <a:bodyPr wrap="square" lIns="0" tIns="0" rIns="0" bIns="0" rtlCol="0" anchor="ctr"/>
-          <a:lstStyle/>
-          <a:p>
-            <a:pPr algn="l" indent="0" marL="0">
-              <a:buNone/>
-            </a:pPr>
-            <a:r>
-              <a:rPr lang="en-US" sz="1600" b="1" dirty="0">
-                <a:solidFill>
-                  <a:srgbClr val="1A3A3A"/>
-                </a:solidFill>
-                <a:latin typeface="Georgia" pitchFamily="34" charset="0"/>
-                <a:ea typeface="Georgia" pitchFamily="34" charset="-122"/>
-                <a:cs typeface="Georgia" pitchFamily="34" charset="-120"/>
-              </a:rPr>
-              <a:t>Claude (Anthropic)</a:t>
-            </a:r>
-            <a:endParaRPr lang="en-US" sz="1600" dirty="0"/>
-          </a:p>
-        </p:txBody>
-      </p:sp>
-      <p:sp>
-        <p:nvSpPr>
-          <p:cNvPr id="13" name="Text 11"/>
-          <p:cNvSpPr/>
-          <p:nvPr/>
-        </p:nvSpPr>
-        <p:spPr>
-          <a:xfrm>
-            <a:off x="4937760" y="1554480"/>
-            <a:ext cx="3566160" cy="274320"/>
-          </a:xfrm>
-          <a:prstGeom prst="rect">
-            <a:avLst/>
-          </a:prstGeom>
-          <a:noFill/>
-          <a:ln/>
-        </p:spPr>
-        <p:txBody>
-          <a:bodyPr wrap="square" lIns="0" tIns="0" rIns="0" bIns="0" rtlCol="0" anchor="ctr"/>
-          <a:lstStyle/>
-          <a:p>
-            <a:pPr algn="l" indent="0" marL="0">
-              <a:buNone/>
-            </a:pPr>
-            <a:r>
-              <a:rPr lang="en-US" sz="1300" i="1" dirty="0">
-                <a:solidFill>
-                  <a:srgbClr val="C75B39"/>
-                </a:solidFill>
-                <a:latin typeface="Calibri" pitchFamily="34" charset="0"/>
-                <a:ea typeface="Calibri" pitchFamily="34" charset="-122"/>
-                <a:cs typeface="Calibri" pitchFamily="34" charset="-120"/>
-              </a:rPr>
-              <a:t>→ Volvo</a:t>
-            </a:r>
-            <a:endParaRPr lang="en-US" sz="1300" dirty="0"/>
-          </a:p>
-        </p:txBody>
-      </p:sp>
-      <p:sp>
-        <p:nvSpPr>
-          <p:cNvPr id="14" name="Text 12"/>
-          <p:cNvSpPr/>
-          <p:nvPr/>
-        </p:nvSpPr>
-        <p:spPr>
-          <a:xfrm>
-            <a:off x="4937760" y="1920240"/>
-            <a:ext cx="3566160" cy="640080"/>
-          </a:xfrm>
-          <a:prstGeom prst="rect">
-            <a:avLst/>
-          </a:prstGeom>
-          <a:noFill/>
-          <a:ln/>
-        </p:spPr>
-        <p:txBody>
-          <a:bodyPr wrap="square" lIns="0" tIns="0" rIns="0" bIns="0" rtlCol="0" anchor="ctr"/>
-          <a:lstStyle/>
-          <a:p>
-            <a:pPr algn="l" indent="0" marL="0">
-              <a:buNone/>
-            </a:pPr>
-            <a:r>
-              <a:rPr lang="en-US" sz="1200" dirty="0">
-                <a:solidFill>
-                  <a:srgbClr val="5A5A5A"/>
-                </a:solidFill>
-                <a:latin typeface="Calibri" pitchFamily="34" charset="0"/>
-                <a:ea typeface="Calibri" pitchFamily="34" charset="-122"/>
-                <a:cs typeface="Calibri" pitchFamily="34" charset="-120"/>
-              </a:rPr>
-              <a:t>Cuidadoso, seguro, bem instruído. Foco em segurança e ética.</a:t>
-            </a:r>
-            <a:endParaRPr lang="en-US" sz="1200" dirty="0"/>
-          </a:p>
-        </p:txBody>
-      </p:sp>
-      <p:sp>
-        <p:nvSpPr>
-          <p:cNvPr id="15" name="Shape 13"/>
-          <p:cNvSpPr/>
-          <p:nvPr/>
-        </p:nvSpPr>
-        <p:spPr>
-          <a:xfrm>
-            <a:off x="457200" y="3017520"/>
-            <a:ext cx="3931920" cy="1645920"/>
-          </a:xfrm>
-          <a:prstGeom prst="rect">
-            <a:avLst/>
-          </a:prstGeom>
-          <a:solidFill>
-            <a:srgbClr val="FFFFFF"/>
-          </a:solidFill>
-          <a:ln/>
-          <a:effectLst>
-            <a:outerShdw sx="100000" sy="100000" kx="0" ky="0" algn="bl" rotWithShape="0" blurRad="101600" dist="25400" dir="8100000">
-              <a:srgbClr val="000000">
-                <a:alpha val="12000"/>
-              </a:srgbClr>
-            </a:outerShdw>
-          </a:effectLst>
-        </p:spPr>
-      </p:sp>
-      <p:sp>
-        <p:nvSpPr>
-          <p:cNvPr id="16" name="Shape 14"/>
-          <p:cNvSpPr/>
-          <p:nvPr/>
-        </p:nvSpPr>
-        <p:spPr>
-          <a:xfrm>
-            <a:off x="457200" y="3017520"/>
-            <a:ext cx="54864" cy="1645920"/>
-          </a:xfrm>
-          <a:prstGeom prst="rect">
-            <a:avLst/>
-          </a:prstGeom>
-          <a:solidFill>
-            <a:srgbClr val="C75B39"/>
-          </a:solidFill>
-          <a:ln/>
-        </p:spPr>
-      </p:sp>
-      <p:sp>
-        <p:nvSpPr>
-          <p:cNvPr id="17" name="Text 15"/>
-          <p:cNvSpPr/>
-          <p:nvPr/>
-        </p:nvSpPr>
-        <p:spPr>
-          <a:xfrm>
-            <a:off x="640080" y="3108960"/>
-            <a:ext cx="3566160" cy="365760"/>
-          </a:xfrm>
-          <a:prstGeom prst="rect">
-            <a:avLst/>
-          </a:prstGeom>
-          <a:noFill/>
-          <a:ln/>
-        </p:spPr>
-        <p:txBody>
-          <a:bodyPr wrap="square" lIns="0" tIns="0" rIns="0" bIns="0" rtlCol="0" anchor="ctr"/>
-          <a:lstStyle/>
-          <a:p>
-            <a:pPr algn="l" indent="0" marL="0">
-              <a:buNone/>
-            </a:pPr>
-            <a:r>
-              <a:rPr lang="en-US" sz="1600" b="1" dirty="0">
-                <a:solidFill>
-                  <a:srgbClr val="1A3A3A"/>
-                </a:solidFill>
-                <a:latin typeface="Georgia" pitchFamily="34" charset="0"/>
-                <a:ea typeface="Georgia" pitchFamily="34" charset="-122"/>
-                <a:cs typeface="Georgia" pitchFamily="34" charset="-120"/>
-              </a:rPr>
-              <a:t>Gemini (Google)</a:t>
-            </a:r>
-            <a:endParaRPr lang="en-US" sz="1600" dirty="0"/>
-          </a:p>
-        </p:txBody>
-      </p:sp>
-      <p:sp>
-        <p:nvSpPr>
-          <p:cNvPr id="18" name="Text 16"/>
-          <p:cNvSpPr/>
-          <p:nvPr/>
-        </p:nvSpPr>
-        <p:spPr>
-          <a:xfrm>
-            <a:off x="640080" y="3474720"/>
-            <a:ext cx="3566160" cy="274320"/>
-          </a:xfrm>
-          <a:prstGeom prst="rect">
-            <a:avLst/>
-          </a:prstGeom>
-          <a:noFill/>
-          <a:ln/>
-        </p:spPr>
-        <p:txBody>
-          <a:bodyPr wrap="square" lIns="0" tIns="0" rIns="0" bIns="0" rtlCol="0" anchor="ctr"/>
-          <a:lstStyle/>
-          <a:p>
-            <a:pPr algn="l" indent="0" marL="0">
-              <a:buNone/>
-            </a:pPr>
-            <a:r>
-              <a:rPr lang="en-US" sz="1300" i="1" dirty="0">
-                <a:solidFill>
-                  <a:srgbClr val="C75B39"/>
-                </a:solidFill>
-                <a:latin typeface="Calibri" pitchFamily="34" charset="0"/>
-                <a:ea typeface="Calibri" pitchFamily="34" charset="-122"/>
-                <a:cs typeface="Calibri" pitchFamily="34" charset="-120"/>
-              </a:rPr>
-              <a:t>→ Honda</a:t>
-            </a:r>
-            <a:endParaRPr lang="en-US" sz="1300" dirty="0"/>
-          </a:p>
-        </p:txBody>
-      </p:sp>
-      <p:sp>
-        <p:nvSpPr>
-          <p:cNvPr id="19" name="Text 17"/>
-          <p:cNvSpPr/>
-          <p:nvPr/>
-        </p:nvSpPr>
-        <p:spPr>
-          <a:xfrm>
-            <a:off x="640080" y="3840480"/>
-            <a:ext cx="3566160" cy="640080"/>
-          </a:xfrm>
-          <a:prstGeom prst="rect">
-            <a:avLst/>
-          </a:prstGeom>
-          <a:noFill/>
-          <a:ln/>
-        </p:spPr>
-        <p:txBody>
-          <a:bodyPr wrap="square" lIns="0" tIns="0" rIns="0" bIns="0" rtlCol="0" anchor="ctr"/>
-          <a:lstStyle/>
-          <a:p>
-            <a:pPr algn="l" indent="0" marL="0">
-              <a:buNone/>
-            </a:pPr>
-            <a:r>
-              <a:rPr lang="en-US" sz="1200" dirty="0">
-                <a:solidFill>
-                  <a:srgbClr val="5A5A5A"/>
-                </a:solidFill>
-                <a:latin typeface="Calibri" pitchFamily="34" charset="0"/>
-                <a:ea typeface="Calibri" pitchFamily="34" charset="-122"/>
-                <a:cs typeface="Calibri" pitchFamily="34" charset="-120"/>
-              </a:rPr>
-              <a:t>Integrado ao ecossistema Google. Bom em raciocínio e buscas.</a:t>
-            </a:r>
-            <a:endParaRPr lang="en-US" sz="1200" dirty="0"/>
-          </a:p>
-        </p:txBody>
-      </p:sp>
-      <p:sp>
-        <p:nvSpPr>
-          <p:cNvPr id="20" name="Shape 18"/>
-          <p:cNvSpPr/>
-          <p:nvPr/>
-        </p:nvSpPr>
-        <p:spPr>
-          <a:xfrm>
-            <a:off x="4754880" y="3017520"/>
-            <a:ext cx="3931920" cy="1645920"/>
-          </a:xfrm>
-          <a:prstGeom prst="rect">
-            <a:avLst/>
-          </a:prstGeom>
-          <a:solidFill>
-            <a:srgbClr val="FFFFFF"/>
-          </a:solidFill>
-          <a:ln/>
-          <a:effectLst>
-            <a:outerShdw sx="100000" sy="100000" kx="0" ky="0" algn="bl" rotWithShape="0" blurRad="101600" dist="25400" dir="8100000">
-              <a:srgbClr val="000000">
-                <a:alpha val="12000"/>
-              </a:srgbClr>
-            </a:outerShdw>
-          </a:effectLst>
-        </p:spPr>
-      </p:sp>
-      <p:sp>
-        <p:nvSpPr>
-          <p:cNvPr id="21" name="Shape 19"/>
-          <p:cNvSpPr/>
-          <p:nvPr/>
-        </p:nvSpPr>
-        <p:spPr>
-          <a:xfrm>
-            <a:off x="4754880" y="3017520"/>
-            <a:ext cx="54864" cy="1645920"/>
-          </a:xfrm>
-          <a:prstGeom prst="rect">
-            <a:avLst/>
-          </a:prstGeom>
-          <a:solidFill>
-            <a:srgbClr val="C75B39"/>
-          </a:solidFill>
-          <a:ln/>
-        </p:spPr>
-      </p:sp>
-      <p:sp>
-        <p:nvSpPr>
-          <p:cNvPr id="22" name="Text 20"/>
-          <p:cNvSpPr/>
-          <p:nvPr/>
-        </p:nvSpPr>
-        <p:spPr>
-          <a:xfrm>
-            <a:off x="4937760" y="3108960"/>
-            <a:ext cx="3566160" cy="365760"/>
-          </a:xfrm>
-          <a:prstGeom prst="rect">
-            <a:avLst/>
-          </a:prstGeom>
-          <a:noFill/>
-          <a:ln/>
-        </p:spPr>
-        <p:txBody>
-          <a:bodyPr wrap="square" lIns="0" tIns="0" rIns="0" bIns="0" rtlCol="0" anchor="ctr"/>
-          <a:lstStyle/>
-          <a:p>
-            <a:pPr algn="l" indent="0" marL="0">
-              <a:buNone/>
-            </a:pPr>
-            <a:r>
-              <a:rPr lang="en-US" sz="1600" b="1" dirty="0">
-                <a:solidFill>
-                  <a:srgbClr val="1A3A3A"/>
-                </a:solidFill>
-                <a:latin typeface="Georgia" pitchFamily="34" charset="0"/>
-                <a:ea typeface="Georgia" pitchFamily="34" charset="-122"/>
-                <a:cs typeface="Georgia" pitchFamily="34" charset="-120"/>
-              </a:rPr>
-              <a:t>DeepSeek / Llama</a:t>
-            </a:r>
-            <a:endParaRPr lang="en-US" sz="1600" dirty="0"/>
-          </a:p>
-        </p:txBody>
-      </p:sp>
-      <p:sp>
-        <p:nvSpPr>
-          <p:cNvPr id="23" name="Text 21"/>
-          <p:cNvSpPr/>
-          <p:nvPr/>
-        </p:nvSpPr>
-        <p:spPr>
-          <a:xfrm>
-            <a:off x="4937760" y="3474720"/>
-            <a:ext cx="3566160" cy="274320"/>
-          </a:xfrm>
-          <a:prstGeom prst="rect">
-            <a:avLst/>
-          </a:prstGeom>
-          <a:noFill/>
-          <a:ln/>
-        </p:spPr>
-        <p:txBody>
-          <a:bodyPr wrap="square" lIns="0" tIns="0" rIns="0" bIns="0" rtlCol="0" anchor="ctr"/>
-          <a:lstStyle/>
-          <a:p>
-            <a:pPr algn="l" indent="0" marL="0">
-              <a:buNone/>
-            </a:pPr>
-            <a:r>
-              <a:rPr lang="en-US" sz="1300" i="1" dirty="0">
-                <a:solidFill>
-                  <a:srgbClr val="C75B39"/>
-                </a:solidFill>
-                <a:latin typeface="Calibri" pitchFamily="34" charset="0"/>
-                <a:ea typeface="Calibri" pitchFamily="34" charset="-122"/>
-                <a:cs typeface="Calibri" pitchFamily="34" charset="-120"/>
-              </a:rPr>
-              <a:t>→ BYD / JAC</a:t>
-            </a:r>
-            <a:endParaRPr lang="en-US" sz="1300" dirty="0"/>
-          </a:p>
-        </p:txBody>
-      </p:sp>
-      <p:sp>
-        <p:nvSpPr>
-          <p:cNvPr id="24" name="Text 22"/>
-          <p:cNvSpPr/>
-          <p:nvPr/>
-        </p:nvSpPr>
-        <p:spPr>
-          <a:xfrm>
-            <a:off x="4937760" y="3840480"/>
-            <a:ext cx="3566160" cy="640080"/>
-          </a:xfrm>
-          <a:prstGeom prst="rect">
-            <a:avLst/>
-          </a:prstGeom>
-          <a:noFill/>
-          <a:ln/>
-        </p:spPr>
-        <p:txBody>
-          <a:bodyPr wrap="square" lIns="0" tIns="0" rIns="0" bIns="0" rtlCol="0" anchor="ctr"/>
-          <a:lstStyle/>
-          <a:p>
-            <a:pPr algn="l" indent="0" marL="0">
-              <a:buNone/>
-            </a:pPr>
-            <a:r>
-              <a:rPr lang="en-US" sz="1200" dirty="0">
-                <a:solidFill>
-                  <a:srgbClr val="5A5A5A"/>
-                </a:solidFill>
-                <a:latin typeface="Calibri" pitchFamily="34" charset="0"/>
-                <a:ea typeface="Calibri" pitchFamily="34" charset="-122"/>
-                <a:cs typeface="Calibri" pitchFamily="34" charset="-120"/>
-              </a:rPr>
-              <a:t>Modelos abertos e acessíveis. Qualidade crescendo rápido.</a:t>
-            </a:r>
-            <a:endParaRPr lang="en-US" sz="1200" dirty="0"/>
+              <a:spcAft>
+                <a:spcPts val="400"/>
+              </a:spcAft>
+              <a:buNone/>
+            </a:pPr>
+            <a:r>
+              <a:rPr lang="en-US" sz="1400" dirty="0">
+                <a:solidFill>
+                  <a:srgbClr val="2D2D2D"/>
+                </a:solidFill>
+                <a:latin typeface="Calibri" pitchFamily="34" charset="0"/>
+                <a:ea typeface="Calibri" pitchFamily="34" charset="-122"/>
+                <a:cs typeface="Calibri" pitchFamily="34" charset="-120"/>
+              </a:rPr>
+              <a:t>Assim, cada modelo de IA tem sua própria arquitetura e forma de processar informações:</a:t>
+            </a:r>
+            <a:endParaRPr lang="en-US" sz="1400" dirty="0"/>
           </a:p>
         </p:txBody>
       </p:sp>
@@ -4476,7 +6134,7 @@
           <a:bodyPr wrap="square" rtlCol="0" anchor="ctr"/>
           <a:lstStyle/>
           <a:p>
-            <a:pPr algn="l" indent="0" marL="0">
+            <a:pPr indent="0" marL="0">
               <a:buNone/>
             </a:pPr>
             <a:r>
@@ -4488,7 +6146,7 @@
                 <a:ea typeface="Georgia" pitchFamily="34" charset="-122"/>
                 <a:cs typeface="Georgia" pitchFamily="34" charset="-120"/>
               </a:rPr>
-              <a:t>Ferramentas de IA Generativa = Carros que você dirige</a:t>
+              <a:t>Modelos de IA = Montadoras</a:t>
             </a:r>
             <a:endParaRPr lang="en-US" sz="2400" dirty="0"/>
           </a:p>
@@ -4516,14 +6174,61 @@
       </p:sp>
       <p:sp>
         <p:nvSpPr>
-          <p:cNvPr id="5" name="Text 3"/>
-          <p:cNvSpPr/>
-          <p:nvPr/>
-        </p:nvSpPr>
-        <p:spPr>
-          <a:xfrm>
-            <a:off x="548640" y="1005840"/>
-            <a:ext cx="8046720" cy="3657600"/>
+          <p:cNvPr id="5" name="Shape 3"/>
+          <p:cNvSpPr/>
+          <p:nvPr/>
+        </p:nvSpPr>
+        <p:spPr>
+          <a:xfrm>
+            <a:off x="457200" y="1097280"/>
+            <a:ext cx="3931920" cy="1645920"/>
+          </a:xfrm>
+          <a:prstGeom prst="rect">
+            <a:avLst/>
+          </a:prstGeom>
+          <a:solidFill>
+            <a:srgbClr val="FFFFFF"/>
+          </a:solidFill>
+          <a:ln/>
+          <a:effectLst>
+            <a:outerShdw sx="100000" sy="100000" kx="0" ky="0" algn="bl" rotWithShape="0" blurRad="101600" dist="25400" dir="8100000">
+              <a:srgbClr val="000000">
+                <a:alpha val="12000"/>
+              </a:srgbClr>
+            </a:outerShdw>
+          </a:effectLst>
+        </p:spPr>
+      </p:sp>
+      <p:sp>
+        <p:nvSpPr>
+          <p:cNvPr id="6" name="Shape 4"/>
+          <p:cNvSpPr/>
+          <p:nvPr/>
+        </p:nvSpPr>
+        <p:spPr>
+          <a:xfrm>
+            <a:off x="457200" y="1097280"/>
+            <a:ext cx="54864" cy="1645920"/>
+          </a:xfrm>
+          <a:prstGeom prst="rect">
+            <a:avLst/>
+          </a:prstGeom>
+          <a:solidFill>
+            <a:srgbClr val="C75B39"/>
+          </a:solidFill>
+          <a:ln/>
+        </p:spPr>
+      </p:sp>
+      <p:sp>
+        <p:nvSpPr>
+          <p:cNvPr id="7" name="Text 5"/>
+          <p:cNvSpPr/>
+          <p:nvPr/>
+        </p:nvSpPr>
+        <p:spPr>
+          <a:xfrm>
+            <a:off x="640080" y="1188720"/>
+            <a:ext cx="3566160" cy="365760"/>
           </a:xfrm>
           <a:prstGeom prst="rect">
             <a:avLst/>
@@ -4532,127 +6237,594 @@
           <a:ln/>
         </p:spPr>
         <p:txBody>
-          <a:bodyPr wrap="square" lIns="0" tIns="0" rIns="0" bIns="0" rtlCol="0" anchor="t"/>
+          <a:bodyPr wrap="square" lIns="0" tIns="0" rIns="0" bIns="0" rtlCol="0" anchor="ctr"/>
           <a:lstStyle/>
           <a:p>
             <a:pPr algn="l" indent="0" marL="0">
-              <a:spcAft>
-                <a:spcPts val="800"/>
-              </a:spcAft>
               <a:buNone/>
             </a:pPr>
             <a:r>
               <a:rPr lang="en-US" sz="1600" b="1" dirty="0">
                 <a:solidFill>
+                  <a:srgbClr val="1A3A3A"/>
+                </a:solidFill>
+                <a:latin typeface="Georgia" pitchFamily="34" charset="0"/>
+                <a:ea typeface="Georgia" pitchFamily="34" charset="-122"/>
+                <a:cs typeface="Georgia" pitchFamily="34" charset="-120"/>
+              </a:rPr>
+              <a:t>GPT (OpenAI)</a:t>
+            </a:r>
+            <a:endParaRPr lang="en-US" sz="1600" dirty="0"/>
+          </a:p>
+        </p:txBody>
+      </p:sp>
+      <p:sp>
+        <p:nvSpPr>
+          <p:cNvPr id="8" name="Text 6"/>
+          <p:cNvSpPr/>
+          <p:nvPr/>
+        </p:nvSpPr>
+        <p:spPr>
+          <a:xfrm>
+            <a:off x="640080" y="1554480"/>
+            <a:ext cx="3566160" cy="274320"/>
+          </a:xfrm>
+          <a:prstGeom prst="rect">
+            <a:avLst/>
+          </a:prstGeom>
+          <a:noFill/>
+          <a:ln/>
+        </p:spPr>
+        <p:txBody>
+          <a:bodyPr wrap="square" lIns="0" tIns="0" rIns="0" bIns="0" rtlCol="0" anchor="ctr"/>
+          <a:lstStyle/>
+          <a:p>
+            <a:pPr algn="l" indent="0" marL="0">
+              <a:buNone/>
+            </a:pPr>
+            <a:r>
+              <a:rPr lang="en-US" sz="1300" i="1" dirty="0">
+                <a:solidFill>
                   <a:srgbClr val="C75B39"/>
                 </a:solidFill>
                 <a:latin typeface="Calibri" pitchFamily="34" charset="0"/>
                 <a:ea typeface="Calibri" pitchFamily="34" charset="-122"/>
                 <a:cs typeface="Calibri" pitchFamily="34" charset="-120"/>
               </a:rPr>
-              <a:t>Se os modelos são montadoras, as ferramentas são os carros que chegam às concessionárias:</a:t>
-            </a:r>
-            <a:endParaRPr lang="en-US" sz="1400" dirty="0"/>
-          </a:p>
+              <a:t>→ Toyota</a:t>
+            </a:r>
+            <a:endParaRPr lang="en-US" sz="1300" dirty="0"/>
+          </a:p>
+        </p:txBody>
+      </p:sp>
+      <p:sp>
+        <p:nvSpPr>
+          <p:cNvPr id="9" name="Text 7"/>
+          <p:cNvSpPr/>
+          <p:nvPr/>
+        </p:nvSpPr>
+        <p:spPr>
+          <a:xfrm>
+            <a:off x="640080" y="1920240"/>
+            <a:ext cx="3566160" cy="640080"/>
+          </a:xfrm>
+          <a:prstGeom prst="rect">
+            <a:avLst/>
+          </a:prstGeom>
+          <a:noFill/>
+          <a:ln/>
+        </p:spPr>
+        <p:txBody>
+          <a:bodyPr wrap="square" lIns="0" tIns="0" rIns="0" bIns="0" rtlCol="0" anchor="ctr"/>
+          <a:lstStyle/>
           <a:p>
             <a:pPr algn="l" indent="0" marL="0">
-              <a:spcAft>
-                <a:spcPts val="400"/>
-              </a:spcAft>
-              <a:buNone/>
-            </a:pPr>
-            <a:r>
-              <a:rPr lang="en-US" sz="1400" dirty="0">
-                <a:solidFill>
-                  <a:srgbClr val="2D2D2D"/>
-                </a:solidFill>
-                <a:latin typeface="Calibri" pitchFamily="34" charset="0"/>
-                <a:ea typeface="Calibri" pitchFamily="34" charset="-122"/>
-                <a:cs typeface="Calibri" pitchFamily="34" charset="-120"/>
-              </a:rPr>
-              <a:t>ChatGPT → é como um sedan popular. Fácil de dirigir, vai buscar informação, escreve textos, gera ideias. Milhares de pessoas usam no dia a dia.</a:t>
-            </a:r>
-            <a:endParaRPr lang="en-US" sz="1400" dirty="0"/>
-          </a:p>
+              <a:buNone/>
+            </a:pPr>
+            <a:r>
+              <a:rPr lang="en-US" sz="1200" dirty="0">
+                <a:solidFill>
+                  <a:srgbClr val="5A5A5A"/>
+                </a:solidFill>
+                <a:latin typeface="Calibri" pitchFamily="34" charset="0"/>
+                <a:ea typeface="Calibri" pitchFamily="34" charset="-122"/>
+                <a:cs typeface="Calibri" pitchFamily="34" charset="-120"/>
+              </a:rPr>
+              <a:t>Versátil, confiável, o mais popular. Serve para quase tudo.</a:t>
+            </a:r>
+            <a:endParaRPr lang="en-US" sz="1200" dirty="0"/>
+          </a:p>
+        </p:txBody>
+      </p:sp>
+      <p:sp>
+        <p:nvSpPr>
+          <p:cNvPr id="10" name="Shape 8"/>
+          <p:cNvSpPr/>
+          <p:nvPr/>
+        </p:nvSpPr>
+        <p:spPr>
+          <a:xfrm>
+            <a:off x="4754880" y="1097280"/>
+            <a:ext cx="3931920" cy="1645920"/>
+          </a:xfrm>
+          <a:prstGeom prst="rect">
+            <a:avLst/>
+          </a:prstGeom>
+          <a:solidFill>
+            <a:srgbClr val="FFFFFF"/>
+          </a:solidFill>
+          <a:ln/>
+          <a:effectLst>
+            <a:outerShdw sx="100000" sy="100000" kx="0" ky="0" algn="bl" rotWithShape="0" blurRad="101600" dist="25400" dir="8100000">
+              <a:srgbClr val="000000">
+                <a:alpha val="12000"/>
+              </a:srgbClr>
+            </a:outerShdw>
+          </a:effectLst>
+        </p:spPr>
+      </p:sp>
+      <p:sp>
+        <p:nvSpPr>
+          <p:cNvPr id="11" name="Shape 9"/>
+          <p:cNvSpPr/>
+          <p:nvPr/>
+        </p:nvSpPr>
+        <p:spPr>
+          <a:xfrm>
+            <a:off x="4754880" y="1097280"/>
+            <a:ext cx="54864" cy="1645920"/>
+          </a:xfrm>
+          <a:prstGeom prst="rect">
+            <a:avLst/>
+          </a:prstGeom>
+          <a:solidFill>
+            <a:srgbClr val="C75B39"/>
+          </a:solidFill>
+          <a:ln/>
+        </p:spPr>
+      </p:sp>
+      <p:sp>
+        <p:nvSpPr>
+          <p:cNvPr id="12" name="Text 10"/>
+          <p:cNvSpPr/>
+          <p:nvPr/>
+        </p:nvSpPr>
+        <p:spPr>
+          <a:xfrm>
+            <a:off x="4937760" y="1188720"/>
+            <a:ext cx="3566160" cy="365760"/>
+          </a:xfrm>
+          <a:prstGeom prst="rect">
+            <a:avLst/>
+          </a:prstGeom>
+          <a:noFill/>
+          <a:ln/>
+        </p:spPr>
+        <p:txBody>
+          <a:bodyPr wrap="square" lIns="0" tIns="0" rIns="0" bIns="0" rtlCol="0" anchor="ctr"/>
+          <a:lstStyle/>
           <a:p>
             <a:pPr algn="l" indent="0" marL="0">
-              <a:spcAft>
-                <a:spcPts val="400"/>
-              </a:spcAft>
-              <a:buNone/>
-            </a:pPr>
-            <a:r>
-              <a:rPr lang="en-US" sz="1400" dirty="0">
-                <a:solidFill>
-                  <a:srgbClr val="2D2D2D"/>
-                </a:solidFill>
-                <a:latin typeface="Calibri" pitchFamily="34" charset="0"/>
-                <a:ea typeface="Calibri" pitchFamily="34" charset="-122"/>
-                <a:cs typeface="Calibri" pitchFamily="34" charset="-120"/>
-              </a:rPr>
-              <a:t>Gemini (chat) → como um hatch conectado. Integrado com YouTube, Gmail, Google Drive. Útil para quem já vive no ecossistema Google.</a:t>
-            </a:r>
-            <a:endParaRPr lang="en-US" sz="1400" dirty="0"/>
-          </a:p>
+              <a:buNone/>
+            </a:pPr>
+            <a:r>
+              <a:rPr lang="en-US" sz="1600" b="1" dirty="0">
+                <a:solidFill>
+                  <a:srgbClr val="1A3A3A"/>
+                </a:solidFill>
+                <a:latin typeface="Georgia" pitchFamily="34" charset="0"/>
+                <a:ea typeface="Georgia" pitchFamily="34" charset="-122"/>
+                <a:cs typeface="Georgia" pitchFamily="34" charset="-120"/>
+              </a:rPr>
+              <a:t>Claude (Anthropic)</a:t>
+            </a:r>
+            <a:endParaRPr lang="en-US" sz="1600" dirty="0"/>
+          </a:p>
+        </p:txBody>
+      </p:sp>
+      <p:sp>
+        <p:nvSpPr>
+          <p:cNvPr id="13" name="Text 11"/>
+          <p:cNvSpPr/>
+          <p:nvPr/>
+        </p:nvSpPr>
+        <p:spPr>
+          <a:xfrm>
+            <a:off x="4937760" y="1554480"/>
+            <a:ext cx="3566160" cy="274320"/>
+          </a:xfrm>
+          <a:prstGeom prst="rect">
+            <a:avLst/>
+          </a:prstGeom>
+          <a:noFill/>
+          <a:ln/>
+        </p:spPr>
+        <p:txBody>
+          <a:bodyPr wrap="square" lIns="0" tIns="0" rIns="0" bIns="0" rtlCol="0" anchor="ctr"/>
+          <a:lstStyle/>
           <a:p>
             <a:pPr algn="l" indent="0" marL="0">
-              <a:spcAft>
-                <a:spcPts val="400"/>
-              </a:spcAft>
-              <a:buNone/>
-            </a:pPr>
-            <a:r>
-              <a:rPr lang="en-US" sz="1400" dirty="0">
-                <a:solidFill>
-                  <a:srgbClr val="2D2D2D"/>
-                </a:solidFill>
-                <a:latin typeface="Calibri" pitchFamily="34" charset="0"/>
-                <a:ea typeface="Calibri" pitchFamily="34" charset="-122"/>
-                <a:cs typeface="Calibri" pitchFamily="34" charset="-120"/>
-              </a:rPr>
-              <a:t>Claude (chat) → como um sedã premium. Mais contido, respostas bem estruturadas, ótimo para análise de documentos e textos longos.</a:t>
-            </a:r>
-            <a:endParaRPr lang="en-US" sz="1400" dirty="0"/>
-          </a:p>
+              <a:buNone/>
+            </a:pPr>
+            <a:r>
+              <a:rPr lang="en-US" sz="1300" i="1" dirty="0">
+                <a:solidFill>
+                  <a:srgbClr val="C75B39"/>
+                </a:solidFill>
+                <a:latin typeface="Calibri" pitchFamily="34" charset="0"/>
+                <a:ea typeface="Calibri" pitchFamily="34" charset="-122"/>
+                <a:cs typeface="Calibri" pitchFamily="34" charset="-120"/>
+              </a:rPr>
+              <a:t>→ Volvo</a:t>
+            </a:r>
+            <a:endParaRPr lang="en-US" sz="1300" dirty="0"/>
+          </a:p>
+        </p:txBody>
+      </p:sp>
+      <p:sp>
+        <p:nvSpPr>
+          <p:cNvPr id="14" name="Text 12"/>
+          <p:cNvSpPr/>
+          <p:nvPr/>
+        </p:nvSpPr>
+        <p:spPr>
+          <a:xfrm>
+            <a:off x="4937760" y="1920240"/>
+            <a:ext cx="3566160" cy="640080"/>
+          </a:xfrm>
+          <a:prstGeom prst="rect">
+            <a:avLst/>
+          </a:prstGeom>
+          <a:noFill/>
+          <a:ln/>
+        </p:spPr>
+        <p:txBody>
+          <a:bodyPr wrap="square" lIns="0" tIns="0" rIns="0" bIns="0" rtlCol="0" anchor="ctr"/>
+          <a:lstStyle/>
           <a:p>
             <a:pPr algn="l" indent="0" marL="0">
-              <a:spcAft>
-                <a:spcPts val="400"/>
-              </a:spcAft>
-              <a:buNone/>
-            </a:pPr>
-            <a:r>
-              <a:rPr lang="en-US" sz="1400" dirty="0">
-                <a:solidFill>
-                  <a:srgbClr val="2D2D2D"/>
-                </a:solidFill>
-                <a:latin typeface="Calibri" pitchFamily="34" charset="0"/>
-                <a:ea typeface="Calibri" pitchFamily="34" charset="-122"/>
-                <a:cs typeface="Calibri" pitchFamily="34" charset="-120"/>
-              </a:rPr>
-              <a:t>Copilot (Microsoft) → como um carro da empresa integrado ao Office. Ajuda no Word, Excel, PowerPoint.</a:t>
-            </a:r>
-            <a:endParaRPr lang="en-US" sz="1400" dirty="0"/>
-          </a:p>
+              <a:buNone/>
+            </a:pPr>
+            <a:r>
+              <a:rPr lang="en-US" sz="1200" dirty="0">
+                <a:solidFill>
+                  <a:srgbClr val="5A5A5A"/>
+                </a:solidFill>
+                <a:latin typeface="Calibri" pitchFamily="34" charset="0"/>
+                <a:ea typeface="Calibri" pitchFamily="34" charset="-122"/>
+                <a:cs typeface="Calibri" pitchFamily="34" charset="-120"/>
+              </a:rPr>
+              <a:t>Cuidadoso, seguro, bem instruído. Foco em segurança e ética.</a:t>
+            </a:r>
+            <a:endParaRPr lang="en-US" sz="1200" dirty="0"/>
+          </a:p>
+        </p:txBody>
+      </p:sp>
+      <p:sp>
+        <p:nvSpPr>
+          <p:cNvPr id="15" name="Shape 13"/>
+          <p:cNvSpPr/>
+          <p:nvPr/>
+        </p:nvSpPr>
+        <p:spPr>
+          <a:xfrm>
+            <a:off x="457200" y="3017520"/>
+            <a:ext cx="3931920" cy="1645920"/>
+          </a:xfrm>
+          <a:prstGeom prst="rect">
+            <a:avLst/>
+          </a:prstGeom>
+          <a:solidFill>
+            <a:srgbClr val="FFFFFF"/>
+          </a:solidFill>
+          <a:ln/>
+          <a:effectLst>
+            <a:outerShdw sx="100000" sy="100000" kx="0" ky="0" algn="bl" rotWithShape="0" blurRad="101600" dist="25400" dir="8100000">
+              <a:srgbClr val="000000">
+                <a:alpha val="12000"/>
+              </a:srgbClr>
+            </a:outerShdw>
+          </a:effectLst>
+        </p:spPr>
+      </p:sp>
+      <p:sp>
+        <p:nvSpPr>
+          <p:cNvPr id="16" name="Shape 14"/>
+          <p:cNvSpPr/>
+          <p:nvPr/>
+        </p:nvSpPr>
+        <p:spPr>
+          <a:xfrm>
+            <a:off x="457200" y="3017520"/>
+            <a:ext cx="54864" cy="1645920"/>
+          </a:xfrm>
+          <a:prstGeom prst="rect">
+            <a:avLst/>
+          </a:prstGeom>
+          <a:solidFill>
+            <a:srgbClr val="C75B39"/>
+          </a:solidFill>
+          <a:ln/>
+        </p:spPr>
+      </p:sp>
+      <p:sp>
+        <p:nvSpPr>
+          <p:cNvPr id="17" name="Text 15"/>
+          <p:cNvSpPr/>
+          <p:nvPr/>
+        </p:nvSpPr>
+        <p:spPr>
+          <a:xfrm>
+            <a:off x="640080" y="3108960"/>
+            <a:ext cx="3566160" cy="365760"/>
+          </a:xfrm>
+          <a:prstGeom prst="rect">
+            <a:avLst/>
+          </a:prstGeom>
+          <a:noFill/>
+          <a:ln/>
+        </p:spPr>
+        <p:txBody>
+          <a:bodyPr wrap="square" lIns="0" tIns="0" rIns="0" bIns="0" rtlCol="0" anchor="ctr"/>
+          <a:lstStyle/>
           <a:p>
             <a:pPr algn="l" indent="0" marL="0">
-              <a:spcAft>
-                <a:spcPts val="400"/>
-              </a:spcAft>
-              <a:buNone/>
-            </a:pPr>
-            <a:r>
-              <a:rPr lang="en-US" sz="1400" dirty="0">
-                <a:solidFill>
-                  <a:srgbClr val="2D2D2D"/>
-                </a:solidFill>
-                <a:latin typeface="Calibri" pitchFamily="34" charset="0"/>
-                <a:ea typeface="Calibri" pitchFamily="34" charset="-122"/>
-                <a:cs typeface="Calibri" pitchFamily="34" charset="-120"/>
-              </a:rPr>
-              <a:t>Geradores de imagem (DALL-E, Midjourney) → como carros customizados para um fim específico (reboque, corrida). Fazem uma coisa muito bem.</a:t>
-            </a:r>
-            <a:endParaRPr lang="en-US" sz="1400" dirty="0"/>
+              <a:buNone/>
+            </a:pPr>
+            <a:r>
+              <a:rPr lang="en-US" sz="1600" b="1" dirty="0">
+                <a:solidFill>
+                  <a:srgbClr val="1A3A3A"/>
+                </a:solidFill>
+                <a:latin typeface="Georgia" pitchFamily="34" charset="0"/>
+                <a:ea typeface="Georgia" pitchFamily="34" charset="-122"/>
+                <a:cs typeface="Georgia" pitchFamily="34" charset="-120"/>
+              </a:rPr>
+              <a:t>Gemini (Google)</a:t>
+            </a:r>
+            <a:endParaRPr lang="en-US" sz="1600" dirty="0"/>
+          </a:p>
+        </p:txBody>
+      </p:sp>
+      <p:sp>
+        <p:nvSpPr>
+          <p:cNvPr id="18" name="Text 16"/>
+          <p:cNvSpPr/>
+          <p:nvPr/>
+        </p:nvSpPr>
+        <p:spPr>
+          <a:xfrm>
+            <a:off x="640080" y="3474720"/>
+            <a:ext cx="3566160" cy="274320"/>
+          </a:xfrm>
+          <a:prstGeom prst="rect">
+            <a:avLst/>
+          </a:prstGeom>
+          <a:noFill/>
+          <a:ln/>
+        </p:spPr>
+        <p:txBody>
+          <a:bodyPr wrap="square" lIns="0" tIns="0" rIns="0" bIns="0" rtlCol="0" anchor="ctr"/>
+          <a:lstStyle/>
+          <a:p>
+            <a:pPr algn="l" indent="0" marL="0">
+              <a:buNone/>
+            </a:pPr>
+            <a:r>
+              <a:rPr lang="en-US" sz="1300" i="1" dirty="0">
+                <a:solidFill>
+                  <a:srgbClr val="C75B39"/>
+                </a:solidFill>
+                <a:latin typeface="Calibri" pitchFamily="34" charset="0"/>
+                <a:ea typeface="Calibri" pitchFamily="34" charset="-122"/>
+                <a:cs typeface="Calibri" pitchFamily="34" charset="-120"/>
+              </a:rPr>
+              <a:t>→ Honda</a:t>
+            </a:r>
+            <a:endParaRPr lang="en-US" sz="1300" dirty="0"/>
+          </a:p>
+        </p:txBody>
+      </p:sp>
+      <p:sp>
+        <p:nvSpPr>
+          <p:cNvPr id="19" name="Text 17"/>
+          <p:cNvSpPr/>
+          <p:nvPr/>
+        </p:nvSpPr>
+        <p:spPr>
+          <a:xfrm>
+            <a:off x="640080" y="3840480"/>
+            <a:ext cx="3566160" cy="640080"/>
+          </a:xfrm>
+          <a:prstGeom prst="rect">
+            <a:avLst/>
+          </a:prstGeom>
+          <a:noFill/>
+          <a:ln/>
+        </p:spPr>
+        <p:txBody>
+          <a:bodyPr wrap="square" lIns="0" tIns="0" rIns="0" bIns="0" rtlCol="0" anchor="ctr"/>
+          <a:lstStyle/>
+          <a:p>
+            <a:pPr algn="l" indent="0" marL="0">
+              <a:buNone/>
+            </a:pPr>
+            <a:r>
+              <a:rPr lang="en-US" sz="1200" dirty="0">
+                <a:solidFill>
+                  <a:srgbClr val="5A5A5A"/>
+                </a:solidFill>
+                <a:latin typeface="Calibri" pitchFamily="34" charset="0"/>
+                <a:ea typeface="Calibri" pitchFamily="34" charset="-122"/>
+                <a:cs typeface="Calibri" pitchFamily="34" charset="-120"/>
+              </a:rPr>
+              <a:t>Integrado ao ecossistema Google. Bom em raciocínio e buscas.</a:t>
+            </a:r>
+            <a:endParaRPr lang="en-US" sz="1200" dirty="0"/>
+          </a:p>
+        </p:txBody>
+      </p:sp>
+      <p:sp>
+        <p:nvSpPr>
+          <p:cNvPr id="20" name="Shape 18"/>
+          <p:cNvSpPr/>
+          <p:nvPr/>
+        </p:nvSpPr>
+        <p:spPr>
+          <a:xfrm>
+            <a:off x="4754880" y="3017520"/>
+            <a:ext cx="3931920" cy="1645920"/>
+          </a:xfrm>
+          <a:prstGeom prst="rect">
+            <a:avLst/>
+          </a:prstGeom>
+          <a:solidFill>
+            <a:srgbClr val="FFFFFF"/>
+          </a:solidFill>
+          <a:ln/>
+          <a:effectLst>
+            <a:outerShdw sx="100000" sy="100000" kx="0" ky="0" algn="bl" rotWithShape="0" blurRad="101600" dist="25400" dir="8100000">
+              <a:srgbClr val="000000">
+                <a:alpha val="12000"/>
+              </a:srgbClr>
+            </a:outerShdw>
+          </a:effectLst>
+        </p:spPr>
+      </p:sp>
+      <p:sp>
+        <p:nvSpPr>
+          <p:cNvPr id="21" name="Shape 19"/>
+          <p:cNvSpPr/>
+          <p:nvPr/>
+        </p:nvSpPr>
+        <p:spPr>
+          <a:xfrm>
+            <a:off x="4754880" y="3017520"/>
+            <a:ext cx="54864" cy="1645920"/>
+          </a:xfrm>
+          <a:prstGeom prst="rect">
+            <a:avLst/>
+          </a:prstGeom>
+          <a:solidFill>
+            <a:srgbClr val="C75B39"/>
+          </a:solidFill>
+          <a:ln/>
+        </p:spPr>
+      </p:sp>
+      <p:sp>
+        <p:nvSpPr>
+          <p:cNvPr id="22" name="Text 20"/>
+          <p:cNvSpPr/>
+          <p:nvPr/>
+        </p:nvSpPr>
+        <p:spPr>
+          <a:xfrm>
+            <a:off x="4937760" y="3108960"/>
+            <a:ext cx="3566160" cy="365760"/>
+          </a:xfrm>
+          <a:prstGeom prst="rect">
+            <a:avLst/>
+          </a:prstGeom>
+          <a:noFill/>
+          <a:ln/>
+        </p:spPr>
+        <p:txBody>
+          <a:bodyPr wrap="square" lIns="0" tIns="0" rIns="0" bIns="0" rtlCol="0" anchor="ctr"/>
+          <a:lstStyle/>
+          <a:p>
+            <a:pPr algn="l" indent="0" marL="0">
+              <a:buNone/>
+            </a:pPr>
+            <a:r>
+              <a:rPr lang="en-US" sz="1600" b="1" dirty="0">
+                <a:solidFill>
+                  <a:srgbClr val="1A3A3A"/>
+                </a:solidFill>
+                <a:latin typeface="Georgia" pitchFamily="34" charset="0"/>
+                <a:ea typeface="Georgia" pitchFamily="34" charset="-122"/>
+                <a:cs typeface="Georgia" pitchFamily="34" charset="-120"/>
+              </a:rPr>
+              <a:t>DeepSeek / Llama</a:t>
+            </a:r>
+            <a:endParaRPr lang="en-US" sz="1600" dirty="0"/>
+          </a:p>
+        </p:txBody>
+      </p:sp>
+      <p:sp>
+        <p:nvSpPr>
+          <p:cNvPr id="23" name="Text 21"/>
+          <p:cNvSpPr/>
+          <p:nvPr/>
+        </p:nvSpPr>
+        <p:spPr>
+          <a:xfrm>
+            <a:off x="4937760" y="3474720"/>
+            <a:ext cx="3566160" cy="274320"/>
+          </a:xfrm>
+          <a:prstGeom prst="rect">
+            <a:avLst/>
+          </a:prstGeom>
+          <a:noFill/>
+          <a:ln/>
+        </p:spPr>
+        <p:txBody>
+          <a:bodyPr wrap="square" lIns="0" tIns="0" rIns="0" bIns="0" rtlCol="0" anchor="ctr"/>
+          <a:lstStyle/>
+          <a:p>
+            <a:pPr algn="l" indent="0" marL="0">
+              <a:buNone/>
+            </a:pPr>
+            <a:r>
+              <a:rPr lang="en-US" sz="1300" i="1" dirty="0">
+                <a:solidFill>
+                  <a:srgbClr val="C75B39"/>
+                </a:solidFill>
+                <a:latin typeface="Calibri" pitchFamily="34" charset="0"/>
+                <a:ea typeface="Calibri" pitchFamily="34" charset="-122"/>
+                <a:cs typeface="Calibri" pitchFamily="34" charset="-120"/>
+              </a:rPr>
+              <a:t>→ BYD / JAC</a:t>
+            </a:r>
+            <a:endParaRPr lang="en-US" sz="1300" dirty="0"/>
+          </a:p>
+        </p:txBody>
+      </p:sp>
+      <p:sp>
+        <p:nvSpPr>
+          <p:cNvPr id="24" name="Text 22"/>
+          <p:cNvSpPr/>
+          <p:nvPr/>
+        </p:nvSpPr>
+        <p:spPr>
+          <a:xfrm>
+            <a:off x="4937760" y="3840480"/>
+            <a:ext cx="3566160" cy="640080"/>
+          </a:xfrm>
+          <a:prstGeom prst="rect">
+            <a:avLst/>
+          </a:prstGeom>
+          <a:noFill/>
+          <a:ln/>
+        </p:spPr>
+        <p:txBody>
+          <a:bodyPr wrap="square" lIns="0" tIns="0" rIns="0" bIns="0" rtlCol="0" anchor="ctr"/>
+          <a:lstStyle/>
+          <a:p>
+            <a:pPr algn="l" indent="0" marL="0">
+              <a:buNone/>
+            </a:pPr>
+            <a:r>
+              <a:rPr lang="en-US" sz="1200" dirty="0">
+                <a:solidFill>
+                  <a:srgbClr val="5A5A5A"/>
+                </a:solidFill>
+                <a:latin typeface="Calibri" pitchFamily="34" charset="0"/>
+                <a:ea typeface="Calibri" pitchFamily="34" charset="-122"/>
+                <a:cs typeface="Calibri" pitchFamily="34" charset="-120"/>
+              </a:rPr>
+              <a:t>Modelos abertos e acessíveis. Qualidade crescendo rápido.</a:t>
+            </a:r>
+            <a:endParaRPr lang="en-US" sz="1200" dirty="0"/>
           </a:p>
         </p:txBody>
       </p:sp>
@@ -4741,7 +6913,7 @@
                 <a:ea typeface="Georgia" pitchFamily="34" charset="-122"/>
                 <a:cs typeface="Georgia" pitchFamily="34" charset="-120"/>
               </a:rPr>
-              <a:t>Agentes de IA = Carros com Piloto Automático</a:t>
+              <a:t>Ferramentas de IA Generativa = Carros que você dirige</a:t>
             </a:r>
             <a:endParaRPr lang="en-US" sz="2400" dirty="0"/>
           </a:p>
@@ -4803,47 +6975,7 @@
                 <a:ea typeface="Calibri" pitchFamily="34" charset="-122"/>
                 <a:cs typeface="Calibri" pitchFamily="34" charset="-120"/>
               </a:rPr>
-              <a:t>Até aqui, as ferramentas dependem de você dar os comandos (o prompt):</a:t>
-            </a:r>
-            <a:endParaRPr lang="en-US" sz="1400" dirty="0"/>
-          </a:p>
-          <a:p>
-            <a:pPr algn="l" indent="0" marL="0">
-              <a:spcAft>
-                <a:spcPts val="800"/>
-              </a:spcAft>
-              <a:buNone/>
-            </a:pPr>
-            <a:r>
-              <a:rPr lang="en-US" sz="1400" dirty="0">
-                <a:solidFill>
-                  <a:srgbClr val="2D2D2D"/>
-                </a:solidFill>
-                <a:latin typeface="Calibri" pitchFamily="34" charset="0"/>
-                <a:ea typeface="Calibri" pitchFamily="34" charset="-122"/>
-                <a:cs typeface="Calibri" pitchFamily="34" charset="-120"/>
-              </a:rPr>
-              <a:t>É como dirigir um carro manual: você acelera, vira, freia, escolhe a rota.</a:t>
-            </a:r>
-            <a:endParaRPr lang="en-US" sz="1400" dirty="0"/>
-          </a:p>
-          <a:p>
-            <a:pPr algn="l" indent="0" marL="0">
-              <a:spcAft>
-                <a:spcPts val="800"/>
-              </a:spcAft>
-              <a:buNone/>
-            </a:pPr>
-            <a:r>
-              <a:rPr lang="en-US" sz="1600" b="1" dirty="0">
-                <a:solidFill>
-                  <a:srgbClr val="C75B39"/>
-                </a:solidFill>
-                <a:latin typeface="Calibri" pitchFamily="34" charset="0"/>
-                <a:ea typeface="Calibri" pitchFamily="34" charset="-122"/>
-                <a:cs typeface="Calibri" pitchFamily="34" charset="-120"/>
-              </a:rPr>
-              <a:t>Um agente de IA é como um carro com piloto automático avançado:</a:t>
+              <a:t>Se os modelos são montadoras, as ferramentas são os carros que chegam às concessionárias:</a:t>
             </a:r>
             <a:endParaRPr lang="en-US" sz="1400" dirty="0"/>
           </a:p>
@@ -4863,7 +6995,7 @@
                 <a:ea typeface="Calibri" pitchFamily="34" charset="-122"/>
                 <a:cs typeface="Calibri" pitchFamily="34" charset="-120"/>
               </a:rPr>
-              <a:t>Você diz o destino e o carro planeja a rota, Decide quando acelerar ou frear, Busca informações no GPS, Recalcula se houver trânsito.</a:t>
+              <a:t>ChatGPT → é como um sedan popular. Fácil de dirigir, vai buscar informação, escreve textos, gera ideias. Milhares de pessoas usam no dia a dia.</a:t>
             </a:r>
             <a:endParaRPr lang="en-US" sz="1400" dirty="0"/>
           </a:p>
@@ -4883,7 +7015,7 @@
                 <a:ea typeface="Calibri" pitchFamily="34" charset="-122"/>
                 <a:cs typeface="Calibri" pitchFamily="34" charset="-120"/>
               </a:rPr>
-              <a:t>Na prática: você dá um objetivo para o agente, e ele decide quais ferramentas usar, que passos seguir e quando parar.</a:t>
+              <a:t>Gemini (chat) → como um hatch conectado. Integrado com YouTube, Gmail, Google Drive. Útil para quem já vive no ecossistema Google.</a:t>
             </a:r>
             <a:endParaRPr lang="en-US" sz="1400" dirty="0"/>
           </a:p>
@@ -4903,7 +7035,47 @@
                 <a:ea typeface="Calibri" pitchFamily="34" charset="-122"/>
                 <a:cs typeface="Calibri" pitchFamily="34" charset="-120"/>
               </a:rPr>
-              <a:t>Exemplo: um agente pode "passo a passo" pesquisar um tema na web, resumir o conteúdo, criar uma apresentação e salvar o arquivo — tudo sozinho.</a:t>
+              <a:t>Claude (chat) → como um sedã premium. Mais contido, respostas bem estruturadas, ótimo para análise de documentos e textos longos.</a:t>
+            </a:r>
+            <a:endParaRPr lang="en-US" sz="1400" dirty="0"/>
+          </a:p>
+          <a:p>
+            <a:pPr algn="l" indent="0" marL="0">
+              <a:spcAft>
+                <a:spcPts val="400"/>
+              </a:spcAft>
+              <a:buNone/>
+            </a:pPr>
+            <a:r>
+              <a:rPr lang="en-US" sz="1400" dirty="0">
+                <a:solidFill>
+                  <a:srgbClr val="2D2D2D"/>
+                </a:solidFill>
+                <a:latin typeface="Calibri" pitchFamily="34" charset="0"/>
+                <a:ea typeface="Calibri" pitchFamily="34" charset="-122"/>
+                <a:cs typeface="Calibri" pitchFamily="34" charset="-120"/>
+              </a:rPr>
+              <a:t>Copilot (Microsoft) → como um carro da empresa integrado ao Office. Ajuda no Word, Excel, PowerPoint.</a:t>
+            </a:r>
+            <a:endParaRPr lang="en-US" sz="1400" dirty="0"/>
+          </a:p>
+          <a:p>
+            <a:pPr algn="l" indent="0" marL="0">
+              <a:spcAft>
+                <a:spcPts val="400"/>
+              </a:spcAft>
+              <a:buNone/>
+            </a:pPr>
+            <a:r>
+              <a:rPr lang="en-US" sz="1400" dirty="0">
+                <a:solidFill>
+                  <a:srgbClr val="2D2D2D"/>
+                </a:solidFill>
+                <a:latin typeface="Calibri" pitchFamily="34" charset="0"/>
+                <a:ea typeface="Calibri" pitchFamily="34" charset="-122"/>
+                <a:cs typeface="Calibri" pitchFamily="34" charset="-120"/>
+              </a:rPr>
+              <a:t>Geradores de imagem (DALL-E, Midjourney) → como carros customizados para um fim específico (reboque, corrida). Fazem uma coisa muito bem.</a:t>
             </a:r>
             <a:endParaRPr lang="en-US" sz="1400" dirty="0"/>
           </a:p>
@@ -4982,7 +7154,7 @@
           <a:bodyPr wrap="square" rtlCol="0" anchor="ctr"/>
           <a:lstStyle/>
           <a:p>
-            <a:pPr indent="0" marL="0">
+            <a:pPr algn="l" indent="0" marL="0">
               <a:buNone/>
             </a:pPr>
             <a:r>
@@ -4994,7 +7166,7 @@
                 <a:ea typeface="Georgia" pitchFamily="34" charset="-122"/>
                 <a:cs typeface="Georgia" pitchFamily="34" charset="-120"/>
               </a:rPr>
-              <a:t>Skills = Manual do Proprietário</a:t>
+              <a:t>Agentes de IA = Carros com Piloto Automático</a:t>
             </a:r>
             <a:endParaRPr lang="en-US" sz="2400" dirty="0"/>
           </a:p>
@@ -5022,61 +7194,14 @@
       </p:sp>
       <p:sp>
         <p:nvSpPr>
-          <p:cNvPr id="5" name="Shape 3"/>
-          <p:cNvSpPr/>
-          <p:nvPr/>
-        </p:nvSpPr>
-        <p:spPr>
-          <a:xfrm>
-            <a:off x="4754880" y="1097280"/>
-            <a:ext cx="3931920" cy="3474720"/>
-          </a:xfrm>
-          <a:prstGeom prst="rect">
-            <a:avLst/>
-          </a:prstGeom>
-          <a:solidFill>
-            <a:srgbClr val="FFFFFF"/>
-          </a:solidFill>
-          <a:ln/>
-          <a:effectLst>
-            <a:outerShdw sx="100000" sy="100000" kx="0" ky="0" algn="bl" rotWithShape="0" blurRad="101600" dist="25400" dir="8100000">
-              <a:srgbClr val="000000">
-                <a:alpha val="12000"/>
-              </a:srgbClr>
-            </a:outerShdw>
-          </a:effectLst>
-        </p:spPr>
-      </p:sp>
-      <p:sp>
-        <p:nvSpPr>
-          <p:cNvPr id="6" name="Shape 4"/>
-          <p:cNvSpPr/>
-          <p:nvPr/>
-        </p:nvSpPr>
-        <p:spPr>
-          <a:xfrm>
-            <a:off x="4754880" y="1097280"/>
-            <a:ext cx="3931920" cy="54864"/>
-          </a:xfrm>
-          <a:prstGeom prst="rect">
-            <a:avLst/>
-          </a:prstGeom>
-          <a:solidFill>
-            <a:srgbClr val="5B8C5A"/>
-          </a:solidFill>
-          <a:ln/>
-        </p:spPr>
-      </p:sp>
-      <p:sp>
-        <p:nvSpPr>
-          <p:cNvPr id="7" name="Text 5"/>
-          <p:cNvSpPr/>
-          <p:nvPr/>
-        </p:nvSpPr>
-        <p:spPr>
-          <a:xfrm>
-            <a:off x="548640" y="1097280"/>
-            <a:ext cx="3931920" cy="3474720"/>
+          <p:cNvPr id="5" name="Text 3"/>
+          <p:cNvSpPr/>
+          <p:nvPr/>
+        </p:nvSpPr>
+        <p:spPr>
+          <a:xfrm>
+            <a:off x="548640" y="1005840"/>
+            <a:ext cx="8046720" cy="3657600"/>
           </a:xfrm>
           <a:prstGeom prst="rect">
             <a:avLst/>
@@ -5090,7 +7215,7 @@
           <a:p>
             <a:pPr algn="l" indent="0" marL="0">
               <a:spcAft>
-                <a:spcPts val="600"/>
+                <a:spcPts val="800"/>
               </a:spcAft>
               <a:buNone/>
             </a:pPr>
@@ -5103,7 +7228,47 @@
                 <a:ea typeface="Calibri" pitchFamily="34" charset="-122"/>
                 <a:cs typeface="Calibri" pitchFamily="34" charset="-120"/>
               </a:rPr>
-              <a:t>Imagine que você comprou um carro novo:</a:t>
+              <a:t>Até aqui, as ferramentas dependem de você dar os comandos (o prompt):</a:t>
+            </a:r>
+            <a:endParaRPr lang="en-US" sz="1400" dirty="0"/>
+          </a:p>
+          <a:p>
+            <a:pPr algn="l" indent="0" marL="0">
+              <a:spcAft>
+                <a:spcPts val="800"/>
+              </a:spcAft>
+              <a:buNone/>
+            </a:pPr>
+            <a:r>
+              <a:rPr lang="en-US" sz="1400" dirty="0">
+                <a:solidFill>
+                  <a:srgbClr val="2D2D2D"/>
+                </a:solidFill>
+                <a:latin typeface="Calibri" pitchFamily="34" charset="0"/>
+                <a:ea typeface="Calibri" pitchFamily="34" charset="-122"/>
+                <a:cs typeface="Calibri" pitchFamily="34" charset="-120"/>
+              </a:rPr>
+              <a:t>É como dirigir um carro manual: você acelera, vira, freia, escolhe a rota.</a:t>
+            </a:r>
+            <a:endParaRPr lang="en-US" sz="1400" dirty="0"/>
+          </a:p>
+          <a:p>
+            <a:pPr algn="l" indent="0" marL="0">
+              <a:spcAft>
+                <a:spcPts val="800"/>
+              </a:spcAft>
+              <a:buNone/>
+            </a:pPr>
+            <a:r>
+              <a:rPr lang="en-US" sz="1600" b="1" dirty="0">
+                <a:solidFill>
+                  <a:srgbClr val="C75B39"/>
+                </a:solidFill>
+                <a:latin typeface="Calibri" pitchFamily="34" charset="0"/>
+                <a:ea typeface="Calibri" pitchFamily="34" charset="-122"/>
+                <a:cs typeface="Calibri" pitchFamily="34" charset="-120"/>
+              </a:rPr>
+              <a:t>Um agente de IA é como um carro com piloto automático avançado:</a:t>
             </a:r>
             <a:endParaRPr lang="en-US" sz="1400" dirty="0"/>
           </a:p>
@@ -5115,7 +7280,7 @@
               <a:buNone/>
             </a:pPr>
             <a:r>
-              <a:rPr lang="en-US" sz="1300" dirty="0">
+              <a:rPr lang="en-US" sz="1400" dirty="0">
                 <a:solidFill>
                   <a:srgbClr val="2D2D2D"/>
                 </a:solidFill>
@@ -5123,258 +7288,7 @@
                 <a:ea typeface="Calibri" pitchFamily="34" charset="-122"/>
                 <a:cs typeface="Calibri" pitchFamily="34" charset="-120"/>
               </a:rPr>
-              <a:t>Você pode apenas sentar e dirigir (funciona!), mas o manual do proprietário ensina:</a:t>
-            </a:r>
-            <a:endParaRPr lang="en-US" sz="1400" dirty="0"/>
-          </a:p>
-          <a:p>
-            <a:pPr algn="l" marL="342900" indent="-342900">
-              <a:spcAft>
-                <a:spcPts val="400"/>
-              </a:spcAft>
-              <a:buSzPct val="100000"/>
-              <a:buChar char="•"/>
-            </a:pPr>
-            <a:r>
-              <a:rPr lang="en-US" sz="1300" dirty="0">
-                <a:solidFill>
-                  <a:srgbClr val="2D2D2D"/>
-                </a:solidFill>
-                <a:latin typeface="Calibri" pitchFamily="34" charset="0"/>
-                <a:ea typeface="Calibri" pitchFamily="34" charset="-122"/>
-                <a:cs typeface="Calibri" pitchFamily="34" charset="-120"/>
-              </a:rPr>
-              <a:t>• Como usar cada botão e função</a:t>
-            </a:r>
-            <a:endParaRPr lang="en-US" sz="1400" dirty="0"/>
-          </a:p>
-          <a:p>
-            <a:pPr algn="l" marL="342900" indent="-342900">
-              <a:spcAft>
-                <a:spcPts val="400"/>
-              </a:spcAft>
-              <a:buSzPct val="100000"/>
-              <a:buChar char="•"/>
-            </a:pPr>
-            <a:r>
-              <a:rPr lang="en-US" sz="1300" dirty="0">
-                <a:solidFill>
-                  <a:srgbClr val="2D2D2D"/>
-                </a:solidFill>
-                <a:latin typeface="Calibri" pitchFamily="34" charset="0"/>
-                <a:ea typeface="Calibri" pitchFamily="34" charset="-122"/>
-                <a:cs typeface="Calibri" pitchFamily="34" charset="-120"/>
-              </a:rPr>
-              <a:t>• A maneira correta de fazer a manutenção</a:t>
-            </a:r>
-            <a:endParaRPr lang="en-US" sz="1400" dirty="0"/>
-          </a:p>
-          <a:p>
-            <a:pPr algn="l" marL="342900" indent="-342900">
-              <a:spcAft>
-                <a:spcPts val="400"/>
-              </a:spcAft>
-              <a:buSzPct val="100000"/>
-              <a:buChar char="•"/>
-            </a:pPr>
-            <a:r>
-              <a:rPr lang="en-US" sz="1300" dirty="0">
-                <a:solidFill>
-                  <a:srgbClr val="2D2D2D"/>
-                </a:solidFill>
-                <a:latin typeface="Calibri" pitchFamily="34" charset="0"/>
-                <a:ea typeface="Calibri" pitchFamily="34" charset="-122"/>
-                <a:cs typeface="Calibri" pitchFamily="34" charset="-120"/>
-              </a:rPr>
-              <a:t>• Procedimentos de segurança</a:t>
-            </a:r>
-            <a:endParaRPr lang="en-US" sz="1400" dirty="0"/>
-          </a:p>
-          <a:p>
-            <a:pPr algn="l" marL="342900" indent="-342900">
-              <a:spcAft>
-                <a:spcPts val="600"/>
-              </a:spcAft>
-              <a:buSzPct val="100000"/>
-              <a:buChar char="•"/>
-            </a:pPr>
-            <a:r>
-              <a:rPr lang="en-US" sz="1300" dirty="0">
-                <a:solidFill>
-                  <a:srgbClr val="2D2D2D"/>
-                </a:solidFill>
-                <a:latin typeface="Calibri" pitchFamily="34" charset="0"/>
-                <a:ea typeface="Calibri" pitchFamily="34" charset="-122"/>
-                <a:cs typeface="Calibri" pitchFamily="34" charset="-120"/>
-              </a:rPr>
-              <a:t>• Modos de condução específicos (estrada, cidade, off-road)</a:t>
-            </a:r>
-            <a:endParaRPr lang="en-US" sz="1400" dirty="0"/>
-          </a:p>
-        </p:txBody>
-      </p:sp>
-      <p:sp>
-        <p:nvSpPr>
-          <p:cNvPr id="8" name="Text 6"/>
-          <p:cNvSpPr/>
-          <p:nvPr/>
-        </p:nvSpPr>
-        <p:spPr>
-          <a:xfrm>
-            <a:off x="4937760" y="1280160"/>
-            <a:ext cx="3566160" cy="3108960"/>
-          </a:xfrm>
-          <a:prstGeom prst="rect">
-            <a:avLst/>
-          </a:prstGeom>
-          <a:noFill/>
-          <a:ln/>
-        </p:spPr>
-        <p:txBody>
-          <a:bodyPr wrap="square" lIns="0" tIns="0" rIns="0" bIns="0" rtlCol="0" anchor="t"/>
-          <a:lstStyle/>
-          <a:p>
-            <a:pPr algn="l" indent="0" marL="0">
-              <a:spcAft>
-                <a:spcPts val="600"/>
-              </a:spcAft>
-              <a:buNone/>
-            </a:pPr>
-            <a:r>
-              <a:rPr lang="en-US" sz="1600" b="1" dirty="0">
-                <a:solidFill>
-                  <a:srgbClr val="5B8C5A"/>
-                </a:solidFill>
-                <a:latin typeface="Calibri" pitchFamily="34" charset="0"/>
-                <a:ea typeface="Calibri" pitchFamily="34" charset="-122"/>
-                <a:cs typeface="Calibri" pitchFamily="34" charset="-120"/>
-              </a:rPr>
-              <a:t>As Skills fazem o mesmo com a IA:</a:t>
-            </a:r>
-            <a:endParaRPr lang="en-US" sz="1400" dirty="0"/>
-          </a:p>
-          <a:p>
-            <a:pPr algn="l" indent="0" marL="0">
-              <a:spcAft>
-                <a:spcPts val="600"/>
-              </a:spcAft>
-              <a:buNone/>
-            </a:pPr>
-            <a:r>
-              <a:rPr lang="en-US" sz="1300" dirty="0">
-                <a:solidFill>
-                  <a:srgbClr val="2D2D2D"/>
-                </a:solidFill>
-                <a:latin typeface="Calibri" pitchFamily="34" charset="0"/>
-                <a:ea typeface="Calibri" pitchFamily="34" charset="-122"/>
-                <a:cs typeface="Calibri" pitchFamily="34" charset="-120"/>
-              </a:rPr>
-              <a:t>São arquivos de instrução que ensinam o modelo de IA a:</a:t>
-            </a:r>
-            <a:endParaRPr lang="en-US" sz="1400" dirty="0"/>
-          </a:p>
-          <a:p>
-            <a:pPr algn="l" marL="342900" indent="-342900">
-              <a:spcAft>
-                <a:spcPts val="400"/>
-              </a:spcAft>
-              <a:buSzPct val="100000"/>
-              <a:buChar char="•"/>
-            </a:pPr>
-            <a:r>
-              <a:rPr lang="en-US" sz="1300" dirty="0">
-                <a:solidFill>
-                  <a:srgbClr val="2D2D2D"/>
-                </a:solidFill>
-                <a:latin typeface="Calibri" pitchFamily="34" charset="0"/>
-                <a:ea typeface="Calibri" pitchFamily="34" charset="-122"/>
-                <a:cs typeface="Calibri" pitchFamily="34" charset="-120"/>
-              </a:rPr>
-              <a:t>Saber quem é você e seu contexto</a:t>
-            </a:r>
-            <a:endParaRPr lang="en-US" sz="1400" dirty="0"/>
-          </a:p>
-          <a:p>
-            <a:pPr algn="l" marL="342900" indent="-342900">
-              <a:spcAft>
-                <a:spcPts val="400"/>
-              </a:spcAft>
-              <a:buSzPct val="100000"/>
-              <a:buChar char="•"/>
-            </a:pPr>
-            <a:r>
-              <a:rPr lang="en-US" sz="1300" dirty="0">
-                <a:solidFill>
-                  <a:srgbClr val="2D2D2D"/>
-                </a:solidFill>
-                <a:latin typeface="Calibri" pitchFamily="34" charset="0"/>
-                <a:ea typeface="Calibri" pitchFamily="34" charset="-122"/>
-                <a:cs typeface="Calibri" pitchFamily="34" charset="-120"/>
-              </a:rPr>
-              <a:t>Seguir regras da sua escola</a:t>
-            </a:r>
-            <a:endParaRPr lang="en-US" sz="1400" dirty="0"/>
-          </a:p>
-          <a:p>
-            <a:pPr algn="l" marL="342900" indent="-342900">
-              <a:spcAft>
-                <a:spcPts val="400"/>
-              </a:spcAft>
-              <a:buSzPct val="100000"/>
-              <a:buChar char="•"/>
-            </a:pPr>
-            <a:r>
-              <a:rPr lang="en-US" sz="1300" dirty="0">
-                <a:solidFill>
-                  <a:srgbClr val="2D2D2D"/>
-                </a:solidFill>
-                <a:latin typeface="Calibri" pitchFamily="34" charset="0"/>
-                <a:ea typeface="Calibri" pitchFamily="34" charset="-122"/>
-                <a:cs typeface="Calibri" pitchFamily="34" charset="-120"/>
-              </a:rPr>
-              <a:t>Usar os documentos certos</a:t>
-            </a:r>
-            <a:endParaRPr lang="en-US" sz="1400" dirty="0"/>
-          </a:p>
-          <a:p>
-            <a:pPr algn="l" marL="342900" indent="-342900">
-              <a:spcAft>
-                <a:spcPts val="400"/>
-              </a:spcAft>
-              <a:buSzPct val="100000"/>
-              <a:buChar char="•"/>
-            </a:pPr>
-            <a:r>
-              <a:rPr lang="en-US" sz="1300" dirty="0">
-                <a:solidFill>
-                  <a:srgbClr val="2D2D2D"/>
-                </a:solidFill>
-                <a:latin typeface="Calibri" pitchFamily="34" charset="0"/>
-                <a:ea typeface="Calibri" pitchFamily="34" charset="-122"/>
-                <a:cs typeface="Calibri" pitchFamily="34" charset="-120"/>
-              </a:rPr>
-              <a:t>Falar como um especialista pedagógico</a:t>
-            </a:r>
-            <a:endParaRPr lang="en-US" sz="1400" dirty="0"/>
-          </a:p>
-          <a:p>
-            <a:pPr algn="l" marL="342900" indent="-342900">
-              <a:spcAft>
-                <a:spcPts val="600"/>
-              </a:spcAft>
-              <a:buSzPct val="100000"/>
-              <a:buChar char="•"/>
-            </a:pPr>
-            <a:r>
-              <a:rPr lang="en-US" sz="1300" dirty="0">
-                <a:solidFill>
-                  <a:srgbClr val="2D2D2D"/>
-                </a:solidFill>
-                <a:latin typeface="Calibri" pitchFamily="34" charset="0"/>
-                <a:ea typeface="Calibri" pitchFamily="34" charset="-122"/>
-                <a:cs typeface="Calibri" pitchFamily="34" charset="-120"/>
-              </a:rPr>
-              <a:t>Seguir processos passo a passo</a:t>
+              <a:t>Você diz o destino e o carro planeja a rota, Decide quando acelerar ou frear, Busca informações no GPS, Recalcula se houver trânsito.</a:t>
             </a:r>
             <a:endParaRPr lang="en-US" sz="1400" dirty="0"/>
           </a:p>
@@ -5386,7 +7300,7 @@
               <a:buNone/>
             </a:pPr>
             <a:r>
-              <a:rPr lang="en-US" sz="1300" b="1" i="1" dirty="0">
+              <a:rPr lang="en-US" sz="1400" dirty="0">
                 <a:solidFill>
                   <a:srgbClr val="2D2D2D"/>
                 </a:solidFill>
@@ -5394,7 +7308,27 @@
                 <a:ea typeface="Calibri" pitchFamily="34" charset="-122"/>
                 <a:cs typeface="Calibri" pitchFamily="34" charset="-120"/>
               </a:rPr>
-              <a:t>Sem a skill o modelo "até funciona". Com ela, ele age como um profissional da sua área.</a:t>
+              <a:t>Na prática: você dá um objetivo para o agente, e ele decide quais ferramentas usar, que passos seguir e quando parar.</a:t>
+            </a:r>
+            <a:endParaRPr lang="en-US" sz="1400" dirty="0"/>
+          </a:p>
+          <a:p>
+            <a:pPr algn="l" indent="0" marL="0">
+              <a:spcAft>
+                <a:spcPts val="400"/>
+              </a:spcAft>
+              <a:buNone/>
+            </a:pPr>
+            <a:r>
+              <a:rPr lang="en-US" sz="1400" dirty="0">
+                <a:solidFill>
+                  <a:srgbClr val="2D2D2D"/>
+                </a:solidFill>
+                <a:latin typeface="Calibri" pitchFamily="34" charset="0"/>
+                <a:ea typeface="Calibri" pitchFamily="34" charset="-122"/>
+                <a:cs typeface="Calibri" pitchFamily="34" charset="-120"/>
+              </a:rPr>
+              <a:t>Exemplo: um agente pode "passo a passo" pesquisar um tema na web, resumir o conteúdo, criar uma apresentação e salvar o arquivo — tudo sozinho.</a:t>
             </a:r>
             <a:endParaRPr lang="en-US" sz="1400" dirty="0"/>
           </a:p>
@@ -5414,7 +7348,7 @@
     <p:bg>
       <p:bgPr>
         <a:solidFill>
-          <a:srgbClr val="1A3A3A"/>
+          <a:srgbClr val="F7F3EE"/>
         </a:solidFill>
       </p:bgPr>
     </p:bg>
@@ -5441,13 +7375,13 @@
         <p:spPr>
           <a:xfrm>
             <a:off x="0" y="0"/>
-            <a:ext cx="9144000" cy="54864"/>
+            <a:ext cx="9144000" cy="822960"/>
           </a:xfrm>
           <a:prstGeom prst="rect">
             <a:avLst/>
           </a:prstGeom>
           <a:solidFill>
-            <a:srgbClr val="D4A843"/>
+            <a:srgbClr val="1A3A3A"/>
           </a:solidFill>
           <a:ln/>
         </p:spPr>
@@ -5460,8 +7394,8 @@
         </p:nvSpPr>
         <p:spPr>
           <a:xfrm>
-            <a:off x="731520" y="274320"/>
-            <a:ext cx="7680960" cy="640080"/>
+            <a:off x="548640" y="137160"/>
+            <a:ext cx="8046720" cy="548640"/>
           </a:xfrm>
           <a:prstGeom prst="rect">
             <a:avLst/>
@@ -5477,7 +7411,7 @@
               <a:buNone/>
             </a:pPr>
             <a:r>
-              <a:rPr lang="en-US" sz="2800" b="1" dirty="0">
+              <a:rPr lang="en-US" sz="2200" b="1" dirty="0">
                 <a:solidFill>
                   <a:srgbClr val="FFFFFF"/>
                 </a:solidFill>
@@ -5485,9 +7419,9 @@
                 <a:ea typeface="Georgia" pitchFamily="34" charset="-122"/>
                 <a:cs typeface="Georgia" pitchFamily="34" charset="-120"/>
               </a:rPr>
-              <a:t>Mão na Massa</a:t>
-            </a:r>
-            <a:endParaRPr lang="en-US" sz="2800" dirty="0"/>
+              <a:t>Contexto e Regras = Instruções para a IA "adivinhar" melhor</a:t>
+            </a:r>
+            <a:endParaRPr lang="en-US" sz="2200" dirty="0"/>
           </a:p>
         </p:txBody>
       </p:sp>
@@ -5499,8 +7433,28 @@
         </p:nvSpPr>
         <p:spPr>
           <a:xfrm>
-            <a:off x="457200" y="1188720"/>
-            <a:ext cx="2606040" cy="1554480"/>
+            <a:off x="0" y="822960"/>
+            <a:ext cx="9144000" cy="36576"/>
+          </a:xfrm>
+          <a:prstGeom prst="rect">
+            <a:avLst/>
+          </a:prstGeom>
+          <a:solidFill>
+            <a:srgbClr val="C75B39"/>
+          </a:solidFill>
+          <a:ln/>
+        </p:spPr>
+      </p:sp>
+      <p:sp>
+        <p:nvSpPr>
+          <p:cNvPr id="5" name="Shape 3"/>
+          <p:cNvSpPr/>
+          <p:nvPr/>
+        </p:nvSpPr>
+        <p:spPr>
+          <a:xfrm>
+            <a:off x="457200" y="1097280"/>
+            <a:ext cx="3931920" cy="2743200"/>
           </a:xfrm>
           <a:prstGeom prst="rect">
             <a:avLst/>
@@ -5520,16 +7474,16 @@
       </p:sp>
       <p:sp>
         <p:nvSpPr>
-          <p:cNvPr id="5" name="Shape 3"/>
-          <p:cNvSpPr/>
-          <p:nvPr/>
-        </p:nvSpPr>
-        <p:spPr>
-          <a:xfrm>
-            <a:off x="594360" y="1325880"/>
-            <a:ext cx="411480" cy="411480"/>
-          </a:xfrm>
-          <a:prstGeom prst="ellipse">
+          <p:cNvPr id="6" name="Shape 4"/>
+          <p:cNvSpPr/>
+          <p:nvPr/>
+        </p:nvSpPr>
+        <p:spPr>
+          <a:xfrm>
+            <a:off x="457200" y="1097280"/>
+            <a:ext cx="3931920" cy="411480"/>
+          </a:xfrm>
+          <a:prstGeom prst="rect">
             <a:avLst/>
           </a:prstGeom>
           <a:solidFill>
@@ -5540,14 +7494,14 @@
       </p:sp>
       <p:sp>
         <p:nvSpPr>
-          <p:cNvPr id="6" name="Text 4"/>
-          <p:cNvSpPr/>
-          <p:nvPr/>
-        </p:nvSpPr>
-        <p:spPr>
-          <a:xfrm>
-            <a:off x="594360" y="1325880"/>
-            <a:ext cx="411480" cy="411480"/>
+          <p:cNvPr id="7" name="Text 5"/>
+          <p:cNvSpPr/>
+          <p:nvPr/>
+        </p:nvSpPr>
+        <p:spPr>
+          <a:xfrm>
+            <a:off x="640080" y="1143000"/>
+            <a:ext cx="3566160" cy="320040"/>
           </a:xfrm>
           <a:prstGeom prst="rect">
             <a:avLst/>
@@ -5556,61 +7510,22 @@
           <a:ln/>
         </p:spPr>
         <p:txBody>
-          <a:bodyPr wrap="square" rtlCol="0" anchor="ctr"/>
-          <a:lstStyle/>
-          <a:p>
-            <a:pPr algn="ctr" indent="0" marL="0">
+          <a:bodyPr wrap="square" lIns="0" tIns="0" rIns="0" bIns="0" rtlCol="0" anchor="ctr"/>
+          <a:lstStyle/>
+          <a:p>
+            <a:pPr algn="l" indent="0" marL="0">
               <a:buNone/>
             </a:pPr>
             <a:r>
               <a:rPr lang="en-US" sz="1400" b="1" dirty="0">
                 <a:solidFill>
                   <a:srgbClr val="FFFFFF"/>
-                </a:solidFill>
-                <a:latin typeface="Calibri" pitchFamily="34" charset="0"/>
-                <a:ea typeface="Calibri" pitchFamily="34" charset="-122"/>
-                <a:cs typeface="Calibri" pitchFamily="34" charset="-120"/>
-              </a:rPr>
-              <a:t>1</a:t>
-            </a:r>
-            <a:endParaRPr lang="en-US" sz="1400" dirty="0"/>
-          </a:p>
-        </p:txBody>
-      </p:sp>
-      <p:sp>
-        <p:nvSpPr>
-          <p:cNvPr id="7" name="Text 5"/>
-          <p:cNvSpPr/>
-          <p:nvPr/>
-        </p:nvSpPr>
-        <p:spPr>
-          <a:xfrm>
-            <a:off x="1097280" y="1325880"/>
-            <a:ext cx="1828800" cy="365760"/>
-          </a:xfrm>
-          <a:prstGeom prst="rect">
-            <a:avLst/>
-          </a:prstGeom>
-          <a:noFill/>
-          <a:ln/>
-        </p:spPr>
-        <p:txBody>
-          <a:bodyPr wrap="square" lIns="0" tIns="0" rIns="0" bIns="0" rtlCol="0" anchor="ctr"/>
-          <a:lstStyle/>
-          <a:p>
-            <a:pPr algn="l" indent="0" marL="0">
-              <a:buNone/>
-            </a:pPr>
-            <a:r>
-              <a:rPr lang="en-US" sz="1400" b="1" dirty="0">
-                <a:solidFill>
-                  <a:srgbClr val="1A3A3A"/>
                 </a:solidFill>
                 <a:latin typeface="Georgia" pitchFamily="34" charset="0"/>
                 <a:ea typeface="Georgia" pitchFamily="34" charset="-122"/>
                 <a:cs typeface="Georgia" pitchFamily="34" charset="-120"/>
               </a:rPr>
-              <a:t>Baixe o arquivo Skill</a:t>
+              <a:t>Sem instruções, a IA "chuta"</a:t>
             </a:r>
             <a:endParaRPr lang="en-US" sz="1400" dirty="0"/>
           </a:p>
@@ -5624,8 +7539,8 @@
         </p:nvSpPr>
         <p:spPr>
           <a:xfrm>
-            <a:off x="594360" y="1783080"/>
-            <a:ext cx="2331720" cy="822960"/>
+            <a:off x="640080" y="1645920"/>
+            <a:ext cx="3566160" cy="2011680"/>
           </a:xfrm>
           <a:prstGeom prst="rect">
             <a:avLst/>
@@ -5638,10 +7553,105 @@
           <a:lstStyle/>
           <a:p>
             <a:pPr algn="l" indent="0" marL="0">
-              <a:buNone/>
-            </a:pPr>
-            <a:r>
-              <a:rPr lang="en-US" sz="1100" dirty="0">
+              <a:spcAft>
+                <a:spcPts val="400"/>
+              </a:spcAft>
+              <a:buNone/>
+            </a:pPr>
+            <a:r>
+              <a:rPr lang="en-US" sz="1300" b="1" dirty="0">
+                <a:solidFill>
+                  <a:srgbClr val="2D2D2D"/>
+                </a:solidFill>
+                <a:latin typeface="Calibri" pitchFamily="34" charset="0"/>
+                <a:ea typeface="Calibri" pitchFamily="34" charset="-122"/>
+                <a:cs typeface="Calibri" pitchFamily="34" charset="-120"/>
+              </a:rPr>
+              <a:t>Se você perguntar "Crie uma atividade" sem contexto:</a:t>
+            </a:r>
+            <a:endParaRPr lang="en-US" sz="1300" dirty="0"/>
+          </a:p>
+          <a:p>
+            <a:pPr algn="l" marL="342900" indent="-342900">
+              <a:buSzPct val="100000"/>
+              <a:buChar char="•"/>
+            </a:pPr>
+            <a:r>
+              <a:rPr lang="en-US" sz="1200" dirty="0">
+                <a:solidFill>
+                  <a:srgbClr val="2D2D2D"/>
+                </a:solidFill>
+                <a:latin typeface="Calibri" pitchFamily="34" charset="0"/>
+                <a:ea typeface="Calibri" pitchFamily="34" charset="-122"/>
+                <a:cs typeface="Calibri" pitchFamily="34" charset="-120"/>
+              </a:rPr>
+              <a:t>• Pode vir para qualquer série</a:t>
+            </a:r>
+            <a:endParaRPr lang="en-US" sz="1300" dirty="0"/>
+          </a:p>
+          <a:p>
+            <a:pPr algn="l" marL="342900" indent="-342900">
+              <a:buSzPct val="100000"/>
+              <a:buChar char="•"/>
+            </a:pPr>
+            <a:r>
+              <a:rPr lang="en-US" sz="1200" dirty="0">
+                <a:solidFill>
+                  <a:srgbClr val="2D2D2D"/>
+                </a:solidFill>
+                <a:latin typeface="Calibri" pitchFamily="34" charset="0"/>
+                <a:ea typeface="Calibri" pitchFamily="34" charset="-122"/>
+                <a:cs typeface="Calibri" pitchFamily="34" charset="-120"/>
+              </a:rPr>
+              <a:t>• Pode ignorar o regimento da escola</a:t>
+            </a:r>
+            <a:endParaRPr lang="en-US" sz="1300" dirty="0"/>
+          </a:p>
+          <a:p>
+            <a:pPr algn="l" marL="342900" indent="-342900">
+              <a:buSzPct val="100000"/>
+              <a:buChar char="•"/>
+            </a:pPr>
+            <a:r>
+              <a:rPr lang="en-US" sz="1200" dirty="0">
+                <a:solidFill>
+                  <a:srgbClr val="2D2D2D"/>
+                </a:solidFill>
+                <a:latin typeface="Calibri" pitchFamily="34" charset="0"/>
+                <a:ea typeface="Calibri" pitchFamily="34" charset="-122"/>
+                <a:cs typeface="Calibri" pitchFamily="34" charset="-120"/>
+              </a:rPr>
+              <a:t>• Pode usar linguagem inadequada</a:t>
+            </a:r>
+            <a:endParaRPr lang="en-US" sz="1300" dirty="0"/>
+          </a:p>
+          <a:p>
+            <a:pPr algn="l" marL="342900" indent="-342900">
+              <a:spcAft>
+                <a:spcPts val="600"/>
+              </a:spcAft>
+              <a:buSzPct val="100000"/>
+              <a:buChar char="•"/>
+            </a:pPr>
+            <a:r>
+              <a:rPr lang="en-US" sz="1200" dirty="0">
+                <a:solidFill>
+                  <a:srgbClr val="2D2D2D"/>
+                </a:solidFill>
+                <a:latin typeface="Calibri" pitchFamily="34" charset="0"/>
+                <a:ea typeface="Calibri" pitchFamily="34" charset="-122"/>
+                <a:cs typeface="Calibri" pitchFamily="34" charset="-120"/>
+              </a:rPr>
+              <a:t>• Pode sugerir algo contra os valores da ACSC</a:t>
+            </a:r>
+            <a:endParaRPr lang="en-US" sz="1300" dirty="0"/>
+          </a:p>
+          <a:p>
+            <a:pPr algn="l" indent="0" marL="0">
+              <a:buNone/>
+            </a:pPr>
+            <a:r>
+              <a:rPr lang="en-US" sz="1200" i="1" dirty="0">
                 <a:solidFill>
                   <a:srgbClr val="5A5A5A"/>
                 </a:solidFill>
@@ -5649,9 +7659,9 @@
                 <a:ea typeface="Calibri" pitchFamily="34" charset="-122"/>
                 <a:cs typeface="Calibri" pitchFamily="34" charset="-120"/>
               </a:rPr>
-              <a:t>Acesse o repositório e baixe skill-assistente-pedagogico.md (link no README)</a:t>
-            </a:r>
-            <a:endParaRPr lang="en-US" sz="1100" dirty="0"/>
+              <a:t>O palpite dela pode ser genérico ou errado.</a:t>
+            </a:r>
+            <a:endParaRPr lang="en-US" sz="1300" dirty="0"/>
           </a:p>
         </p:txBody>
       </p:sp>
@@ -5663,14 +7673,14 @@
         </p:nvSpPr>
         <p:spPr>
           <a:xfrm>
-            <a:off x="3337560" y="1188720"/>
-            <a:ext cx="2606040" cy="1554480"/>
+            <a:off x="4754880" y="1097280"/>
+            <a:ext cx="3931920" cy="3383280"/>
           </a:xfrm>
           <a:prstGeom prst="rect">
             <a:avLst/>
           </a:prstGeom>
           <a:solidFill>
-            <a:srgbClr val="FFFFFF"/>
+            <a:srgbClr val="1A3A3A"/>
           </a:solidFill>
           <a:ln/>
           <a:effectLst>
@@ -5684,34 +7694,14 @@
       </p:sp>
       <p:sp>
         <p:nvSpPr>
-          <p:cNvPr id="10" name="Shape 8"/>
-          <p:cNvSpPr/>
-          <p:nvPr/>
-        </p:nvSpPr>
-        <p:spPr>
-          <a:xfrm>
-            <a:off x="3474720" y="1325880"/>
-            <a:ext cx="411480" cy="411480"/>
-          </a:xfrm>
-          <a:prstGeom prst="ellipse">
-            <a:avLst/>
-          </a:prstGeom>
-          <a:solidFill>
-            <a:srgbClr val="C75B39"/>
-          </a:solidFill>
-          <a:ln/>
-        </p:spPr>
-      </p:sp>
-      <p:sp>
-        <p:nvSpPr>
-          <p:cNvPr id="11" name="Text 9"/>
-          <p:cNvSpPr/>
-          <p:nvPr/>
-        </p:nvSpPr>
-        <p:spPr>
-          <a:xfrm>
-            <a:off x="3474720" y="1325880"/>
-            <a:ext cx="411480" cy="411480"/>
+          <p:cNvPr id="10" name="Text 8"/>
+          <p:cNvSpPr/>
+          <p:nvPr/>
+        </p:nvSpPr>
+        <p:spPr>
+          <a:xfrm>
+            <a:off x="4937760" y="1188720"/>
+            <a:ext cx="3566160" cy="365760"/>
           </a:xfrm>
           <a:prstGeom prst="rect">
             <a:avLst/>
@@ -5720,45 +7710,6 @@
           <a:ln/>
         </p:spPr>
         <p:txBody>
-          <a:bodyPr wrap="square" rtlCol="0" anchor="ctr"/>
-          <a:lstStyle/>
-          <a:p>
-            <a:pPr algn="ctr" indent="0" marL="0">
-              <a:buNone/>
-            </a:pPr>
-            <a:r>
-              <a:rPr lang="en-US" sz="1400" b="1" dirty="0">
-                <a:solidFill>
-                  <a:srgbClr val="FFFFFF"/>
-                </a:solidFill>
-                <a:latin typeface="Calibri" pitchFamily="34" charset="0"/>
-                <a:ea typeface="Calibri" pitchFamily="34" charset="-122"/>
-                <a:cs typeface="Calibri" pitchFamily="34" charset="-120"/>
-              </a:rPr>
-              <a:t>2</a:t>
-            </a:r>
-            <a:endParaRPr lang="en-US" sz="1400" dirty="0"/>
-          </a:p>
-        </p:txBody>
-      </p:sp>
-      <p:sp>
-        <p:nvSpPr>
-          <p:cNvPr id="12" name="Text 10"/>
-          <p:cNvSpPr/>
-          <p:nvPr/>
-        </p:nvSpPr>
-        <p:spPr>
-          <a:xfrm>
-            <a:off x="3977640" y="1325880"/>
-            <a:ext cx="1828800" cy="365760"/>
-          </a:xfrm>
-          <a:prstGeom prst="rect">
-            <a:avLst/>
-          </a:prstGeom>
-          <a:noFill/>
-          <a:ln/>
-        </p:spPr>
-        <p:txBody>
           <a:bodyPr wrap="square" lIns="0" tIns="0" rIns="0" bIns="0" rtlCol="0" anchor="ctr"/>
           <a:lstStyle/>
           <a:p>
@@ -5766,19 +7717,238 @@
               <a:buNone/>
             </a:pPr>
             <a:r>
-              <a:rPr lang="en-US" sz="1400" b="1" dirty="0">
-                <a:solidFill>
-                  <a:srgbClr val="1A3A3A"/>
+              <a:rPr lang="en-US" sz="1500" b="1" dirty="0">
+                <a:solidFill>
+                  <a:srgbClr val="D4A843"/>
                 </a:solidFill>
                 <a:latin typeface="Georgia" pitchFamily="34" charset="0"/>
                 <a:ea typeface="Georgia" pitchFamily="34" charset="-122"/>
                 <a:cs typeface="Georgia" pitchFamily="34" charset="-120"/>
               </a:rPr>
-              <a:t>Abra o ChatGPT ou Gemini</a:t>
-            </a:r>
-            <a:endParaRPr lang="en-US" sz="1400" dirty="0"/>
-          </a:p>
-        </p:txBody>
+              <a:t>Como melhorar o palpite?</a:t>
+            </a:r>
+            <a:endParaRPr lang="en-US" sz="1500" dirty="0"/>
+          </a:p>
+        </p:txBody>
+      </p:sp>
+      <p:sp>
+        <p:nvSpPr>
+          <p:cNvPr id="11" name="Text 9"/>
+          <p:cNvSpPr/>
+          <p:nvPr/>
+        </p:nvSpPr>
+        <p:spPr>
+          <a:xfrm>
+            <a:off x="4937760" y="1645920"/>
+            <a:ext cx="3566160" cy="2651760"/>
+          </a:xfrm>
+          <a:prstGeom prst="rect">
+            <a:avLst/>
+          </a:prstGeom>
+          <a:noFill/>
+          <a:ln/>
+        </p:spPr>
+        <p:txBody>
+          <a:bodyPr wrap="square" lIns="0" tIns="0" rIns="0" bIns="0" rtlCol="0" anchor="t"/>
+          <a:lstStyle/>
+          <a:p>
+            <a:pPr algn="l" indent="0" marL="0">
+              <a:spcAft>
+                <a:spcPts val="200"/>
+              </a:spcAft>
+              <a:buNone/>
+            </a:pPr>
+            <a:r>
+              <a:rPr lang="en-US" sz="1300" b="1" dirty="0">
+                <a:solidFill>
+                  <a:srgbClr val="D4A843"/>
+                </a:solidFill>
+                <a:latin typeface="Calibri" pitchFamily="34" charset="0"/>
+                <a:ea typeface="Calibri" pitchFamily="34" charset="-122"/>
+                <a:cs typeface="Calibri" pitchFamily="34" charset="-120"/>
+              </a:rPr>
+              <a:t>Dê CONTEXTO</a:t>
+            </a:r>
+            <a:endParaRPr lang="en-US" sz="1300" dirty="0"/>
+          </a:p>
+          <a:p>
+            <a:pPr algn="l" indent="0" marL="0">
+              <a:spcAft>
+                <a:spcPts val="600"/>
+              </a:spcAft>
+              <a:buNone/>
+            </a:pPr>
+            <a:r>
+              <a:rPr lang="en-US" sz="1100" dirty="0">
+                <a:solidFill>
+                  <a:srgbClr val="F7F3EE"/>
+                </a:solidFill>
+                <a:latin typeface="Calibri" pitchFamily="34" charset="0"/>
+                <a:ea typeface="Calibri" pitchFamily="34" charset="-122"/>
+                <a:cs typeface="Calibri" pitchFamily="34" charset="-120"/>
+              </a:rPr>
+              <a:t>"Sou professor do 4º ano do Colégio Divino Coração..."</a:t>
+            </a:r>
+            <a:endParaRPr lang="en-US" sz="1300" dirty="0"/>
+          </a:p>
+          <a:p>
+            <a:pPr algn="l" indent="0" marL="0">
+              <a:spcAft>
+                <a:spcPts val="200"/>
+              </a:spcAft>
+              <a:buNone/>
+            </a:pPr>
+            <a:r>
+              <a:rPr lang="en-US" sz="1300" b="1" dirty="0">
+                <a:solidFill>
+                  <a:srgbClr val="D4A843"/>
+                </a:solidFill>
+                <a:latin typeface="Calibri" pitchFamily="34" charset="0"/>
+                <a:ea typeface="Calibri" pitchFamily="34" charset="-122"/>
+                <a:cs typeface="Calibri" pitchFamily="34" charset="-120"/>
+              </a:rPr>
+              <a:t>Estabeleça REGRAS</a:t>
+            </a:r>
+            <a:endParaRPr lang="en-US" sz="1300" dirty="0"/>
+          </a:p>
+          <a:p>
+            <a:pPr algn="l" indent="0" marL="0">
+              <a:spcAft>
+                <a:spcPts val="600"/>
+              </a:spcAft>
+              <a:buNone/>
+            </a:pPr>
+            <a:r>
+              <a:rPr lang="en-US" sz="1100" dirty="0">
+                <a:solidFill>
+                  <a:srgbClr val="F7F3EE"/>
+                </a:solidFill>
+                <a:latin typeface="Calibri" pitchFamily="34" charset="0"/>
+                <a:ea typeface="Calibri" pitchFamily="34" charset="-122"/>
+                <a:cs typeface="Calibri" pitchFamily="34" charset="-120"/>
+              </a:rPr>
+              <a:t>"...respeitando o PPPP da ACSC e a BNCC"</a:t>
+            </a:r>
+            <a:endParaRPr lang="en-US" sz="1300" dirty="0"/>
+          </a:p>
+          <a:p>
+            <a:pPr algn="l" indent="0" marL="0">
+              <a:spcAft>
+                <a:spcPts val="200"/>
+              </a:spcAft>
+              <a:buNone/>
+            </a:pPr>
+            <a:r>
+              <a:rPr lang="en-US" sz="1300" b="1" dirty="0">
+                <a:solidFill>
+                  <a:srgbClr val="D4A843"/>
+                </a:solidFill>
+                <a:latin typeface="Calibri" pitchFamily="34" charset="0"/>
+                <a:ea typeface="Calibri" pitchFamily="34" charset="-122"/>
+                <a:cs typeface="Calibri" pitchFamily="34" charset="-120"/>
+              </a:rPr>
+              <a:t>Defina o FORMATO DE SAÍDA</a:t>
+            </a:r>
+            <a:endParaRPr lang="en-US" sz="1300" dirty="0"/>
+          </a:p>
+          <a:p>
+            <a:pPr algn="l" indent="0" marL="0">
+              <a:spcAft>
+                <a:spcPts val="600"/>
+              </a:spcAft>
+              <a:buNone/>
+            </a:pPr>
+            <a:r>
+              <a:rPr lang="en-US" sz="1100" dirty="0">
+                <a:solidFill>
+                  <a:srgbClr val="F7F3EE"/>
+                </a:solidFill>
+                <a:latin typeface="Calibri" pitchFamily="34" charset="0"/>
+                <a:ea typeface="Calibri" pitchFamily="34" charset="-122"/>
+                <a:cs typeface="Calibri" pitchFamily="34" charset="-120"/>
+              </a:rPr>
+              <a:t>"Estruture em uma tabela com colunas: objetivos, atividades, recursos, avaliação"</a:t>
+            </a:r>
+            <a:endParaRPr lang="en-US" sz="1300" dirty="0"/>
+          </a:p>
+          <a:p>
+            <a:pPr algn="l" indent="0" marL="0">
+              <a:spcAft>
+                <a:spcPts val="200"/>
+              </a:spcAft>
+              <a:buNone/>
+            </a:pPr>
+            <a:r>
+              <a:rPr lang="en-US" sz="1300" b="1" dirty="0">
+                <a:solidFill>
+                  <a:srgbClr val="D4A843"/>
+                </a:solidFill>
+                <a:latin typeface="Calibri" pitchFamily="34" charset="0"/>
+                <a:ea typeface="Calibri" pitchFamily="34" charset="-122"/>
+                <a:cs typeface="Calibri" pitchFamily="34" charset="-120"/>
+              </a:rPr>
+              <a:t>Exija EXEMPLOS</a:t>
+            </a:r>
+            <a:endParaRPr lang="en-US" sz="1300" dirty="0"/>
+          </a:p>
+          <a:p>
+            <a:pPr algn="l" indent="0" marL="0">
+              <a:spcAft>
+                <a:spcPts val="600"/>
+              </a:spcAft>
+              <a:buNone/>
+            </a:pPr>
+            <a:r>
+              <a:rPr lang="en-US" sz="1100" dirty="0">
+                <a:solidFill>
+                  <a:srgbClr val="F7F3EE"/>
+                </a:solidFill>
+                <a:latin typeface="Calibri" pitchFamily="34" charset="0"/>
+                <a:ea typeface="Calibri" pitchFamily="34" charset="-122"/>
+                <a:cs typeface="Calibri" pitchFamily="34" charset="-120"/>
+              </a:rPr>
+              <a:t>"Inclua um exemplo de parecer descritivo"</a:t>
+            </a:r>
+            <a:endParaRPr lang="en-US" sz="1300" dirty="0"/>
+          </a:p>
+          <a:p>
+            <a:pPr algn="l" indent="0" marL="0">
+              <a:buNone/>
+            </a:pPr>
+            <a:r>
+              <a:rPr lang="en-US" sz="1200" b="1" i="1" dirty="0">
+                <a:solidFill>
+                  <a:srgbClr val="D4A843"/>
+                </a:solidFill>
+                <a:latin typeface="Calibri" pitchFamily="34" charset="0"/>
+                <a:ea typeface="Calibri" pitchFamily="34" charset="-122"/>
+                <a:cs typeface="Calibri" pitchFamily="34" charset="-120"/>
+              </a:rPr>
+              <a:t>Quanto mais informação você der, mais preciso será o "palpite" da IA.</a:t>
+            </a:r>
+            <a:endParaRPr lang="en-US" sz="1300" dirty="0"/>
+          </a:p>
+        </p:txBody>
+      </p:sp>
+      <p:sp>
+        <p:nvSpPr>
+          <p:cNvPr id="12" name="Shape 10"/>
+          <p:cNvSpPr/>
+          <p:nvPr/>
+        </p:nvSpPr>
+        <p:spPr>
+          <a:xfrm>
+            <a:off x="457200" y="4114800"/>
+            <a:ext cx="3931920" cy="640080"/>
+          </a:xfrm>
+          <a:prstGeom prst="rect">
+            <a:avLst/>
+          </a:prstGeom>
+          <a:solidFill>
+            <a:srgbClr val="1A3A3A"/>
+          </a:solidFill>
+          <a:ln/>
+        </p:spPr>
       </p:sp>
       <p:sp>
         <p:nvSpPr>
@@ -5788,8 +7958,8 @@
         </p:nvSpPr>
         <p:spPr>
           <a:xfrm>
-            <a:off x="3474720" y="1783080"/>
-            <a:ext cx="2331720" cy="822960"/>
+            <a:off x="457200" y="4114800"/>
+            <a:ext cx="3931920" cy="640080"/>
           </a:xfrm>
           <a:prstGeom prst="rect">
             <a:avLst/>
@@ -5798,680 +7968,24 @@
           <a:ln/>
         </p:spPr>
         <p:txBody>
-          <a:bodyPr wrap="square" lIns="0" tIns="0" rIns="0" bIns="0" rtlCol="0" anchor="t"/>
-          <a:lstStyle/>
-          <a:p>
-            <a:pPr algn="l" indent="0" marL="0">
-              <a:buNone/>
-            </a:pPr>
-            <a:r>
-              <a:rPr lang="en-US" sz="1100" dirty="0">
-                <a:solidFill>
-                  <a:srgbClr val="5A5A5A"/>
-                </a:solidFill>
-                <a:latin typeface="Calibri" pitchFamily="34" charset="0"/>
-                <a:ea typeface="Calibri" pitchFamily="34" charset="-122"/>
-                <a:cs typeface="Calibri" pitchFamily="34" charset="-120"/>
-              </a:rPr>
-              <a:t>Entre no chat da plataforma que você mais usa</a:t>
-            </a:r>
-            <a:endParaRPr lang="en-US" sz="1100" dirty="0"/>
-          </a:p>
-        </p:txBody>
-      </p:sp>
-      <p:sp>
-        <p:nvSpPr>
-          <p:cNvPr id="14" name="Shape 12"/>
-          <p:cNvSpPr/>
-          <p:nvPr/>
-        </p:nvSpPr>
-        <p:spPr>
-          <a:xfrm>
-            <a:off x="6217920" y="1188720"/>
-            <a:ext cx="2606040" cy="1554480"/>
-          </a:xfrm>
-          <a:prstGeom prst="rect">
-            <a:avLst/>
-          </a:prstGeom>
-          <a:solidFill>
-            <a:srgbClr val="FFFFFF"/>
-          </a:solidFill>
-          <a:ln/>
-          <a:effectLst>
-            <a:outerShdw sx="100000" sy="100000" kx="0" ky="0" algn="bl" rotWithShape="0" blurRad="101600" dist="25400" dir="8100000">
-              <a:srgbClr val="000000">
-                <a:alpha val="12000"/>
-              </a:srgbClr>
-            </a:outerShdw>
-          </a:effectLst>
-        </p:spPr>
-      </p:sp>
-      <p:sp>
-        <p:nvSpPr>
-          <p:cNvPr id="15" name="Shape 13"/>
-          <p:cNvSpPr/>
-          <p:nvPr/>
-        </p:nvSpPr>
-        <p:spPr>
-          <a:xfrm>
-            <a:off x="6355080" y="1325880"/>
-            <a:ext cx="411480" cy="411480"/>
-          </a:xfrm>
-          <a:prstGeom prst="ellipse">
-            <a:avLst/>
-          </a:prstGeom>
-          <a:solidFill>
-            <a:srgbClr val="C75B39"/>
-          </a:solidFill>
-          <a:ln/>
-        </p:spPr>
-      </p:sp>
-      <p:sp>
-        <p:nvSpPr>
-          <p:cNvPr id="16" name="Text 14"/>
-          <p:cNvSpPr/>
-          <p:nvPr/>
-        </p:nvSpPr>
-        <p:spPr>
-          <a:xfrm>
-            <a:off x="6355080" y="1325880"/>
-            <a:ext cx="411480" cy="411480"/>
-          </a:xfrm>
-          <a:prstGeom prst="rect">
-            <a:avLst/>
-          </a:prstGeom>
-          <a:noFill/>
-          <a:ln/>
-        </p:spPr>
-        <p:txBody>
-          <a:bodyPr wrap="square" rtlCol="0" anchor="ctr"/>
+          <a:bodyPr wrap="square" lIns="0" tIns="0" rIns="0" bIns="0" rtlCol="0" anchor="ctr"/>
           <a:lstStyle/>
           <a:p>
             <a:pPr algn="ctr" indent="0" marL="0">
               <a:buNone/>
             </a:pPr>
             <a:r>
-              <a:rPr lang="en-US" sz="1400" b="1" dirty="0">
-                <a:solidFill>
-                  <a:srgbClr val="FFFFFF"/>
-                </a:solidFill>
-                <a:latin typeface="Calibri" pitchFamily="34" charset="0"/>
-                <a:ea typeface="Calibri" pitchFamily="34" charset="-122"/>
-                <a:cs typeface="Calibri" pitchFamily="34" charset="-120"/>
-              </a:rPr>
-              <a:t>3</a:t>
-            </a:r>
-            <a:endParaRPr lang="en-US" sz="1400" dirty="0"/>
-          </a:p>
-        </p:txBody>
-      </p:sp>
-      <p:sp>
-        <p:nvSpPr>
-          <p:cNvPr id="17" name="Text 15"/>
-          <p:cNvSpPr/>
-          <p:nvPr/>
-        </p:nvSpPr>
-        <p:spPr>
-          <a:xfrm>
-            <a:off x="6858000" y="1325880"/>
-            <a:ext cx="1828800" cy="365760"/>
-          </a:xfrm>
-          <a:prstGeom prst="rect">
-            <a:avLst/>
-          </a:prstGeom>
-          <a:noFill/>
-          <a:ln/>
-        </p:spPr>
-        <p:txBody>
-          <a:bodyPr wrap="square" lIns="0" tIns="0" rIns="0" bIns="0" rtlCol="0" anchor="ctr"/>
-          <a:lstStyle/>
-          <a:p>
-            <a:pPr algn="l" indent="0" marL="0">
-              <a:buNone/>
-            </a:pPr>
-            <a:r>
-              <a:rPr lang="en-US" sz="1400" b="1" dirty="0">
-                <a:solidFill>
-                  <a:srgbClr val="1A3A3A"/>
+              <a:rPr lang="en-US" sz="1600" b="1" dirty="0">
+                <a:solidFill>
+                  <a:srgbClr val="D4A843"/>
                 </a:solidFill>
                 <a:latin typeface="Georgia" pitchFamily="34" charset="0"/>
                 <a:ea typeface="Georgia" pitchFamily="34" charset="-122"/>
                 <a:cs typeface="Georgia" pitchFamily="34" charset="-120"/>
               </a:rPr>
-              <a:t>Carregue o arquivo</a:t>
-            </a:r>
-            <a:endParaRPr lang="en-US" sz="1400" dirty="0"/>
-          </a:p>
-        </p:txBody>
-      </p:sp>
-      <p:sp>
-        <p:nvSpPr>
-          <p:cNvPr id="18" name="Text 16"/>
-          <p:cNvSpPr/>
-          <p:nvPr/>
-        </p:nvSpPr>
-        <p:spPr>
-          <a:xfrm>
-            <a:off x="6355080" y="1783080"/>
-            <a:ext cx="2331720" cy="822960"/>
-          </a:xfrm>
-          <a:prstGeom prst="rect">
-            <a:avLst/>
-          </a:prstGeom>
-          <a:noFill/>
-          <a:ln/>
-        </p:spPr>
-        <p:txBody>
-          <a:bodyPr wrap="square" lIns="0" tIns="0" rIns="0" bIns="0" rtlCol="0" anchor="t"/>
-          <a:lstStyle/>
-          <a:p>
-            <a:pPr algn="l" indent="0" marL="0">
-              <a:buNone/>
-            </a:pPr>
-            <a:r>
-              <a:rPr lang="en-US" sz="1100" dirty="0">
-                <a:solidFill>
-                  <a:srgbClr val="5A5A5A"/>
-                </a:solidFill>
-                <a:latin typeface="Calibri" pitchFamily="34" charset="0"/>
-                <a:ea typeface="Calibri" pitchFamily="34" charset="-122"/>
-                <a:cs typeface="Calibri" pitchFamily="34" charset="-120"/>
-              </a:rPr>
-              <a:t>Clique no botão de anexar e selecione o arquivo baixado</a:t>
-            </a:r>
-            <a:endParaRPr lang="en-US" sz="1100" dirty="0"/>
-          </a:p>
-        </p:txBody>
-      </p:sp>
-      <p:sp>
-        <p:nvSpPr>
-          <p:cNvPr id="19" name="Shape 17"/>
-          <p:cNvSpPr/>
-          <p:nvPr/>
-        </p:nvSpPr>
-        <p:spPr>
-          <a:xfrm>
-            <a:off x="457200" y="3017520"/>
-            <a:ext cx="2606040" cy="1554480"/>
-          </a:xfrm>
-          <a:prstGeom prst="rect">
-            <a:avLst/>
-          </a:prstGeom>
-          <a:solidFill>
-            <a:srgbClr val="FFFFFF"/>
-          </a:solidFill>
-          <a:ln/>
-          <a:effectLst>
-            <a:outerShdw sx="100000" sy="100000" kx="0" ky="0" algn="bl" rotWithShape="0" blurRad="101600" dist="25400" dir="8100000">
-              <a:srgbClr val="000000">
-                <a:alpha val="12000"/>
-              </a:srgbClr>
-            </a:outerShdw>
-          </a:effectLst>
-        </p:spPr>
-      </p:sp>
-      <p:sp>
-        <p:nvSpPr>
-          <p:cNvPr id="20" name="Shape 18"/>
-          <p:cNvSpPr/>
-          <p:nvPr/>
-        </p:nvSpPr>
-        <p:spPr>
-          <a:xfrm>
-            <a:off x="594360" y="3154680"/>
-            <a:ext cx="411480" cy="411480"/>
-          </a:xfrm>
-          <a:prstGeom prst="ellipse">
-            <a:avLst/>
-          </a:prstGeom>
-          <a:solidFill>
-            <a:srgbClr val="C75B39"/>
-          </a:solidFill>
-          <a:ln/>
-        </p:spPr>
-      </p:sp>
-      <p:sp>
-        <p:nvSpPr>
-          <p:cNvPr id="21" name="Text 19"/>
-          <p:cNvSpPr/>
-          <p:nvPr/>
-        </p:nvSpPr>
-        <p:spPr>
-          <a:xfrm>
-            <a:off x="594360" y="3154680"/>
-            <a:ext cx="411480" cy="411480"/>
-          </a:xfrm>
-          <a:prstGeom prst="rect">
-            <a:avLst/>
-          </a:prstGeom>
-          <a:noFill/>
-          <a:ln/>
-        </p:spPr>
-        <p:txBody>
-          <a:bodyPr wrap="square" rtlCol="0" anchor="ctr"/>
-          <a:lstStyle/>
-          <a:p>
-            <a:pPr algn="ctr" indent="0" marL="0">
-              <a:buNone/>
-            </a:pPr>
-            <a:r>
-              <a:rPr lang="en-US" sz="1400" b="1" dirty="0">
-                <a:solidFill>
-                  <a:srgbClr val="FFFFFF"/>
-                </a:solidFill>
-                <a:latin typeface="Calibri" pitchFamily="34" charset="0"/>
-                <a:ea typeface="Calibri" pitchFamily="34" charset="-122"/>
-                <a:cs typeface="Calibri" pitchFamily="34" charset="-120"/>
-              </a:rPr>
-              <a:t>4</a:t>
-            </a:r>
-            <a:endParaRPr lang="en-US" sz="1400" dirty="0"/>
-          </a:p>
-        </p:txBody>
-      </p:sp>
-      <p:sp>
-        <p:nvSpPr>
-          <p:cNvPr id="22" name="Text 20"/>
-          <p:cNvSpPr/>
-          <p:nvPr/>
-        </p:nvSpPr>
-        <p:spPr>
-          <a:xfrm>
-            <a:off x="1097280" y="3154680"/>
-            <a:ext cx="1828800" cy="365760"/>
-          </a:xfrm>
-          <a:prstGeom prst="rect">
-            <a:avLst/>
-          </a:prstGeom>
-          <a:noFill/>
-          <a:ln/>
-        </p:spPr>
-        <p:txBody>
-          <a:bodyPr wrap="square" lIns="0" tIns="0" rIns="0" bIns="0" rtlCol="0" anchor="ctr"/>
-          <a:lstStyle/>
-          <a:p>
-            <a:pPr algn="l" indent="0" marL="0">
-              <a:buNone/>
-            </a:pPr>
-            <a:r>
-              <a:rPr lang="en-US" sz="1400" b="1" dirty="0">
-                <a:solidFill>
-                  <a:srgbClr val="1A3A3A"/>
-                </a:solidFill>
-                <a:latin typeface="Georgia" pitchFamily="34" charset="0"/>
-                <a:ea typeface="Georgia" pitchFamily="34" charset="-122"/>
-                <a:cs typeface="Georgia" pitchFamily="34" charset="-120"/>
-              </a:rPr>
-              <a:t>Faça um pedido</a:t>
-            </a:r>
-            <a:endParaRPr lang="en-US" sz="1400" dirty="0"/>
-          </a:p>
-        </p:txBody>
-      </p:sp>
-      <p:sp>
-        <p:nvSpPr>
-          <p:cNvPr id="23" name="Text 21"/>
-          <p:cNvSpPr/>
-          <p:nvPr/>
-        </p:nvSpPr>
-        <p:spPr>
-          <a:xfrm>
-            <a:off x="594360" y="3611880"/>
-            <a:ext cx="2331720" cy="822960"/>
-          </a:xfrm>
-          <a:prstGeom prst="rect">
-            <a:avLst/>
-          </a:prstGeom>
-          <a:noFill/>
-          <a:ln/>
-        </p:spPr>
-        <p:txBody>
-          <a:bodyPr wrap="square" lIns="0" tIns="0" rIns="0" bIns="0" rtlCol="0" anchor="t"/>
-          <a:lstStyle/>
-          <a:p>
-            <a:pPr algn="l" indent="0" marL="0">
-              <a:buNone/>
-            </a:pPr>
-            <a:r>
-              <a:rPr lang="en-US" sz="1100" dirty="0">
-                <a:solidFill>
-                  <a:srgbClr val="5A5A5A"/>
-                </a:solidFill>
-                <a:latin typeface="Calibri" pitchFamily="34" charset="0"/>
-                <a:ea typeface="Calibri" pitchFamily="34" charset="-122"/>
-                <a:cs typeface="Calibri" pitchFamily="34" charset="-120"/>
-              </a:rPr>
-              <a:t>Escreva algo como: "Crie um plano de aula de Ciências para o 6º ano sobre cadeia alimentar"</a:t>
-            </a:r>
-            <a:endParaRPr lang="en-US" sz="1100" dirty="0"/>
-          </a:p>
-        </p:txBody>
-      </p:sp>
-      <p:sp>
-        <p:nvSpPr>
-          <p:cNvPr id="24" name="Shape 22"/>
-          <p:cNvSpPr/>
-          <p:nvPr/>
-        </p:nvSpPr>
-        <p:spPr>
-          <a:xfrm>
-            <a:off x="3337560" y="3017520"/>
-            <a:ext cx="2606040" cy="1554480"/>
-          </a:xfrm>
-          <a:prstGeom prst="rect">
-            <a:avLst/>
-          </a:prstGeom>
-          <a:solidFill>
-            <a:srgbClr val="FFFFFF"/>
-          </a:solidFill>
-          <a:ln/>
-          <a:effectLst>
-            <a:outerShdw sx="100000" sy="100000" kx="0" ky="0" algn="bl" rotWithShape="0" blurRad="101600" dist="25400" dir="8100000">
-              <a:srgbClr val="000000">
-                <a:alpha val="12000"/>
-              </a:srgbClr>
-            </a:outerShdw>
-          </a:effectLst>
-        </p:spPr>
-      </p:sp>
-      <p:sp>
-        <p:nvSpPr>
-          <p:cNvPr id="25" name="Shape 23"/>
-          <p:cNvSpPr/>
-          <p:nvPr/>
-        </p:nvSpPr>
-        <p:spPr>
-          <a:xfrm>
-            <a:off x="3474720" y="3154680"/>
-            <a:ext cx="411480" cy="411480"/>
-          </a:xfrm>
-          <a:prstGeom prst="ellipse">
-            <a:avLst/>
-          </a:prstGeom>
-          <a:solidFill>
-            <a:srgbClr val="C75B39"/>
-          </a:solidFill>
-          <a:ln/>
-        </p:spPr>
-      </p:sp>
-      <p:sp>
-        <p:nvSpPr>
-          <p:cNvPr id="26" name="Text 24"/>
-          <p:cNvSpPr/>
-          <p:nvPr/>
-        </p:nvSpPr>
-        <p:spPr>
-          <a:xfrm>
-            <a:off x="3474720" y="3154680"/>
-            <a:ext cx="411480" cy="411480"/>
-          </a:xfrm>
-          <a:prstGeom prst="rect">
-            <a:avLst/>
-          </a:prstGeom>
-          <a:noFill/>
-          <a:ln/>
-        </p:spPr>
-        <p:txBody>
-          <a:bodyPr wrap="square" rtlCol="0" anchor="ctr"/>
-          <a:lstStyle/>
-          <a:p>
-            <a:pPr algn="ctr" indent="0" marL="0">
-              <a:buNone/>
-            </a:pPr>
-            <a:r>
-              <a:rPr lang="en-US" sz="1400" b="1" dirty="0">
-                <a:solidFill>
-                  <a:srgbClr val="FFFFFF"/>
-                </a:solidFill>
-                <a:latin typeface="Calibri" pitchFamily="34" charset="0"/>
-                <a:ea typeface="Calibri" pitchFamily="34" charset="-122"/>
-                <a:cs typeface="Calibri" pitchFamily="34" charset="-120"/>
-              </a:rPr>
-              <a:t>5</a:t>
-            </a:r>
-            <a:endParaRPr lang="en-US" sz="1400" dirty="0"/>
-          </a:p>
-        </p:txBody>
-      </p:sp>
-      <p:sp>
-        <p:nvSpPr>
-          <p:cNvPr id="27" name="Text 25"/>
-          <p:cNvSpPr/>
-          <p:nvPr/>
-        </p:nvSpPr>
-        <p:spPr>
-          <a:xfrm>
-            <a:off x="3977640" y="3154680"/>
-            <a:ext cx="1828800" cy="365760"/>
-          </a:xfrm>
-          <a:prstGeom prst="rect">
-            <a:avLst/>
-          </a:prstGeom>
-          <a:noFill/>
-          <a:ln/>
-        </p:spPr>
-        <p:txBody>
-          <a:bodyPr wrap="square" lIns="0" tIns="0" rIns="0" bIns="0" rtlCol="0" anchor="ctr"/>
-          <a:lstStyle/>
-          <a:p>
-            <a:pPr algn="l" indent="0" marL="0">
-              <a:buNone/>
-            </a:pPr>
-            <a:r>
-              <a:rPr lang="en-US" sz="1400" b="1" dirty="0">
-                <a:solidFill>
-                  <a:srgbClr val="1A3A3A"/>
-                </a:solidFill>
-                <a:latin typeface="Georgia" pitchFamily="34" charset="0"/>
-                <a:ea typeface="Georgia" pitchFamily="34" charset="-122"/>
-                <a:cs typeface="Georgia" pitchFamily="34" charset="-120"/>
-              </a:rPr>
-              <a:t>Refine</a:t>
-            </a:r>
-            <a:endParaRPr lang="en-US" sz="1400" dirty="0"/>
-          </a:p>
-        </p:txBody>
-      </p:sp>
-      <p:sp>
-        <p:nvSpPr>
-          <p:cNvPr id="28" name="Text 26"/>
-          <p:cNvSpPr/>
-          <p:nvPr/>
-        </p:nvSpPr>
-        <p:spPr>
-          <a:xfrm>
-            <a:off x="3474720" y="3611880"/>
-            <a:ext cx="2331720" cy="822960"/>
-          </a:xfrm>
-          <a:prstGeom prst="rect">
-            <a:avLst/>
-          </a:prstGeom>
-          <a:noFill/>
-          <a:ln/>
-        </p:spPr>
-        <p:txBody>
-          <a:bodyPr wrap="square" lIns="0" tIns="0" rIns="0" bIns="0" rtlCol="0" anchor="t"/>
-          <a:lstStyle/>
-          <a:p>
-            <a:pPr algn="l" indent="0" marL="0">
-              <a:buNone/>
-            </a:pPr>
-            <a:r>
-              <a:rPr lang="en-US" sz="1100" dirty="0">
-                <a:solidFill>
-                  <a:srgbClr val="5A5A5A"/>
-                </a:solidFill>
-                <a:latin typeface="Calibri" pitchFamily="34" charset="0"/>
-                <a:ea typeface="Calibri" pitchFamily="34" charset="-122"/>
-                <a:cs typeface="Calibri" pitchFamily="34" charset="-120"/>
-              </a:rPr>
-              <a:t>Peça ajustes: "Coloque uma atividade lúdica" ou "Adicione um momento de oração inicial"</a:t>
-            </a:r>
-            <a:endParaRPr lang="en-US" sz="1100" dirty="0"/>
-          </a:p>
-        </p:txBody>
-      </p:sp>
-      <p:sp>
-        <p:nvSpPr>
-          <p:cNvPr id="29" name="Shape 27"/>
-          <p:cNvSpPr/>
-          <p:nvPr/>
-        </p:nvSpPr>
-        <p:spPr>
-          <a:xfrm>
-            <a:off x="6217920" y="3017520"/>
-            <a:ext cx="2606040" cy="1554480"/>
-          </a:xfrm>
-          <a:prstGeom prst="rect">
-            <a:avLst/>
-          </a:prstGeom>
-          <a:solidFill>
-            <a:srgbClr val="FFFFFF"/>
-          </a:solidFill>
-          <a:ln/>
-          <a:effectLst>
-            <a:outerShdw sx="100000" sy="100000" kx="0" ky="0" algn="bl" rotWithShape="0" blurRad="101600" dist="25400" dir="8100000">
-              <a:srgbClr val="000000">
-                <a:alpha val="12000"/>
-              </a:srgbClr>
-            </a:outerShdw>
-          </a:effectLst>
-        </p:spPr>
-      </p:sp>
-      <p:sp>
-        <p:nvSpPr>
-          <p:cNvPr id="30" name="Shape 28"/>
-          <p:cNvSpPr/>
-          <p:nvPr/>
-        </p:nvSpPr>
-        <p:spPr>
-          <a:xfrm>
-            <a:off x="6355080" y="3154680"/>
-            <a:ext cx="411480" cy="411480"/>
-          </a:xfrm>
-          <a:prstGeom prst="ellipse">
-            <a:avLst/>
-          </a:prstGeom>
-          <a:solidFill>
-            <a:srgbClr val="C75B39"/>
-          </a:solidFill>
-          <a:ln/>
-        </p:spPr>
-      </p:sp>
-      <p:sp>
-        <p:nvSpPr>
-          <p:cNvPr id="31" name="Text 29"/>
-          <p:cNvSpPr/>
-          <p:nvPr/>
-        </p:nvSpPr>
-        <p:spPr>
-          <a:xfrm>
-            <a:off x="6355080" y="3154680"/>
-            <a:ext cx="411480" cy="411480"/>
-          </a:xfrm>
-          <a:prstGeom prst="rect">
-            <a:avLst/>
-          </a:prstGeom>
-          <a:noFill/>
-          <a:ln/>
-        </p:spPr>
-        <p:txBody>
-          <a:bodyPr wrap="square" rtlCol="0" anchor="ctr"/>
-          <a:lstStyle/>
-          <a:p>
-            <a:pPr algn="ctr" indent="0" marL="0">
-              <a:buNone/>
-            </a:pPr>
-            <a:r>
-              <a:rPr lang="en-US" sz="1400" b="1" dirty="0">
-                <a:solidFill>
-                  <a:srgbClr val="FFFFFF"/>
-                </a:solidFill>
-                <a:latin typeface="Calibri" pitchFamily="34" charset="0"/>
-                <a:ea typeface="Calibri" pitchFamily="34" charset="-122"/>
-                <a:cs typeface="Calibri" pitchFamily="34" charset="-120"/>
-              </a:rPr>
-              <a:t>6</a:t>
-            </a:r>
-            <a:endParaRPr lang="en-US" sz="1400" dirty="0"/>
-          </a:p>
-        </p:txBody>
-      </p:sp>
-      <p:sp>
-        <p:nvSpPr>
-          <p:cNvPr id="32" name="Text 30"/>
-          <p:cNvSpPr/>
-          <p:nvPr/>
-        </p:nvSpPr>
-        <p:spPr>
-          <a:xfrm>
-            <a:off x="6858000" y="3154680"/>
-            <a:ext cx="1828800" cy="365760"/>
-          </a:xfrm>
-          <a:prstGeom prst="rect">
-            <a:avLst/>
-          </a:prstGeom>
-          <a:noFill/>
-          <a:ln/>
-        </p:spPr>
-        <p:txBody>
-          <a:bodyPr wrap="square" lIns="0" tIns="0" rIns="0" bIns="0" rtlCol="0" anchor="ctr"/>
-          <a:lstStyle/>
-          <a:p>
-            <a:pPr algn="l" indent="0" marL="0">
-              <a:buNone/>
-            </a:pPr>
-            <a:r>
-              <a:rPr lang="en-US" sz="1400" b="1" dirty="0">
-                <a:solidFill>
-                  <a:srgbClr val="1A3A3A"/>
-                </a:solidFill>
-                <a:latin typeface="Georgia" pitchFamily="34" charset="0"/>
-                <a:ea typeface="Georgia" pitchFamily="34" charset="-122"/>
-                <a:cs typeface="Georgia" pitchFamily="34" charset="-120"/>
-              </a:rPr>
-              <a:t>Aproveite</a:t>
-            </a:r>
-            <a:endParaRPr lang="en-US" sz="1400" dirty="0"/>
-          </a:p>
-        </p:txBody>
-      </p:sp>
-      <p:sp>
-        <p:nvSpPr>
-          <p:cNvPr id="33" name="Text 31"/>
-          <p:cNvSpPr/>
-          <p:nvPr/>
-        </p:nvSpPr>
-        <p:spPr>
-          <a:xfrm>
-            <a:off x="6355080" y="3611880"/>
-            <a:ext cx="2331720" cy="822960"/>
-          </a:xfrm>
-          <a:prstGeom prst="rect">
-            <a:avLst/>
-          </a:prstGeom>
-          <a:noFill/>
-          <a:ln/>
-        </p:spPr>
-        <p:txBody>
-          <a:bodyPr wrap="square" lIns="0" tIns="0" rIns="0" bIns="0" rtlCol="0" anchor="t"/>
-          <a:lstStyle/>
-          <a:p>
-            <a:pPr algn="l" indent="0" marL="0">
-              <a:buNone/>
-            </a:pPr>
-            <a:r>
-              <a:rPr lang="en-US" sz="1100" dirty="0">
-                <a:solidFill>
-                  <a:srgbClr val="5A5A5A"/>
-                </a:solidFill>
-                <a:latin typeface="Calibri" pitchFamily="34" charset="0"/>
-                <a:ea typeface="Calibri" pitchFamily="34" charset="-122"/>
-                <a:cs typeface="Calibri" pitchFamily="34" charset="-120"/>
-              </a:rPr>
-              <a:t>Copie o resultado para seu plano de aula, salve ou peça um arquivo .docx</a:t>
-            </a:r>
-            <a:endParaRPr lang="en-US" sz="1100" dirty="0"/>
+              <a:t>É aí que entram as SKILLS!</a:t>
+            </a:r>
+            <a:endParaRPr lang="en-US" sz="1600" dirty="0"/>
           </a:p>
         </p:txBody>
       </p:sp>
@@ -6560,7 +8074,7 @@
                 <a:ea typeface="Georgia" pitchFamily="34" charset="-122"/>
                 <a:cs typeface="Georgia" pitchFamily="34" charset="-120"/>
               </a:rPr>
-              <a:t>Exemplo Prático com a Skill CDC</a:t>
+              <a:t>Skills = Manual do Proprietário</a:t>
             </a:r>
             <a:endParaRPr lang="en-US" sz="2400" dirty="0"/>
           </a:p>
@@ -6594,8 +8108,8 @@
         </p:nvSpPr>
         <p:spPr>
           <a:xfrm>
-            <a:off x="457200" y="1097280"/>
-            <a:ext cx="8229600" cy="1463040"/>
+            <a:off x="4754880" y="1097280"/>
+            <a:ext cx="3931920" cy="3474720"/>
           </a:xfrm>
           <a:prstGeom prst="rect">
             <a:avLst/>
@@ -6621,14 +8135,14 @@
         </p:nvSpPr>
         <p:spPr>
           <a:xfrm>
-            <a:off x="457200" y="1097280"/>
-            <a:ext cx="54864" cy="1463040"/>
+            <a:off x="4754880" y="1097280"/>
+            <a:ext cx="3931920" cy="54864"/>
           </a:xfrm>
           <a:prstGeom prst="rect">
             <a:avLst/>
           </a:prstGeom>
           <a:solidFill>
-            <a:srgbClr val="C75B39"/>
+            <a:srgbClr val="5B8C5A"/>
           </a:solidFill>
           <a:ln/>
         </p:spPr>
@@ -6641,8 +8155,8 @@
         </p:nvSpPr>
         <p:spPr>
           <a:xfrm>
-            <a:off x="731520" y="1188720"/>
-            <a:ext cx="7772400" cy="274320"/>
+            <a:off x="548640" y="1097280"/>
+            <a:ext cx="3931920" cy="3474720"/>
           </a:xfrm>
           <a:prstGeom prst="rect">
             <a:avLst/>
@@ -6651,49 +8165,33 @@
           <a:ln/>
         </p:spPr>
         <p:txBody>
-          <a:bodyPr wrap="square" lIns="0" tIns="0" rIns="0" bIns="0" rtlCol="0" anchor="ctr"/>
-          <a:lstStyle/>
-          <a:p>
-            <a:pPr indent="0" marL="0">
-              <a:buNone/>
-            </a:pPr>
-            <a:r>
-              <a:rPr lang="en-US" sz="1200" i="1" dirty="0">
-                <a:solidFill>
-                  <a:srgbClr val="5A5A5A"/>
-                </a:solidFill>
-                <a:latin typeface="Calibri" pitchFamily="34" charset="0"/>
-                <a:ea typeface="Calibri" pitchFamily="34" charset="-122"/>
-                <a:cs typeface="Calibri" pitchFamily="34" charset="-120"/>
-              </a:rPr>
-              <a:t>Prompt para testar (copie e cole no chat após carregar a skill):</a:t>
-            </a:r>
-            <a:endParaRPr lang="en-US" sz="1200" dirty="0"/>
-          </a:p>
-        </p:txBody>
-      </p:sp>
-      <p:sp>
-        <p:nvSpPr>
-          <p:cNvPr id="8" name="Text 6"/>
-          <p:cNvSpPr/>
-          <p:nvPr/>
-        </p:nvSpPr>
-        <p:spPr>
-          <a:xfrm>
-            <a:off x="731520" y="1463040"/>
-            <a:ext cx="7772400" cy="914400"/>
-          </a:xfrm>
-          <a:prstGeom prst="rect">
-            <a:avLst/>
-          </a:prstGeom>
-          <a:noFill/>
-          <a:ln/>
-        </p:spPr>
-        <p:txBody>
           <a:bodyPr wrap="square" lIns="0" tIns="0" rIns="0" bIns="0" rtlCol="0" anchor="t"/>
           <a:lstStyle/>
           <a:p>
             <a:pPr algn="l" indent="0" marL="0">
+              <a:spcAft>
+                <a:spcPts val="600"/>
+              </a:spcAft>
+              <a:buNone/>
+            </a:pPr>
+            <a:r>
+              <a:rPr lang="en-US" sz="1600" b="1" dirty="0">
+                <a:solidFill>
+                  <a:srgbClr val="C75B39"/>
+                </a:solidFill>
+                <a:latin typeface="Calibri" pitchFamily="34" charset="0"/>
+                <a:ea typeface="Calibri" pitchFamily="34" charset="-122"/>
+                <a:cs typeface="Calibri" pitchFamily="34" charset="-120"/>
+              </a:rPr>
+              <a:t>Imagine que você comprou um carro novo:</a:t>
+            </a:r>
+            <a:endParaRPr lang="en-US" sz="1400" dirty="0"/>
+          </a:p>
+          <a:p>
+            <a:pPr algn="l" indent="0" marL="0">
+              <a:spcAft>
+                <a:spcPts val="400"/>
+              </a:spcAft>
               <a:buNone/>
             </a:pPr>
             <a:r>
@@ -6701,242 +8199,284 @@
                 <a:solidFill>
                   <a:srgbClr val="2D2D2D"/>
                 </a:solidFill>
-                <a:latin typeface="Consolas" pitchFamily="34" charset="0"/>
-                <a:ea typeface="Consolas" pitchFamily="34" charset="-122"/>
-                <a:cs typeface="Consolas" pitchFamily="34" charset="-120"/>
-              </a:rPr>
-              <a:t>"Sou professor do 4º ano do Colégio Divino Coração.</a:t>
-            </a:r>
-            <a:endParaRPr lang="en-US" sz="1300" dirty="0"/>
-          </a:p>
-          <a:p>
-            <a:pPr algn="l" indent="0" marL="0">
-              <a:buNone/>
-            </a:pPr>
-            <a:r>
-              <a:rPr lang="en-US" sz="1300" dirty="0">
-                <a:solidFill>
-                  <a:srgbClr val="2D2D2D"/>
-                </a:solidFill>
-                <a:latin typeface="Consolas" pitchFamily="34" charset="0"/>
-                <a:ea typeface="Consolas" pitchFamily="34" charset="-122"/>
-                <a:cs typeface="Consolas" pitchFamily="34" charset="-120"/>
-              </a:rPr>
-              <a:t>Preciso de um parecer descritivo trimestral para um aluno</a:t>
-            </a:r>
-            <a:endParaRPr lang="en-US" sz="1300" dirty="0"/>
-          </a:p>
-          <a:p>
-            <a:pPr algn="l" indent="0" marL="0">
-              <a:buNone/>
-            </a:pPr>
-            <a:r>
-              <a:rPr lang="en-US" sz="1300" dirty="0">
-                <a:solidFill>
-                  <a:srgbClr val="2D2D2D"/>
-                </a:solidFill>
-                <a:latin typeface="Consolas" pitchFamily="34" charset="0"/>
-                <a:ea typeface="Consolas" pitchFamily="34" charset="-122"/>
-                <a:cs typeface="Consolas" pitchFamily="34" charset="-120"/>
-              </a:rPr>
-              <a:t>que está com dificuldades em leitura e interpretação de texto.</a:t>
-            </a:r>
-            <a:endParaRPr lang="en-US" sz="1300" dirty="0"/>
-          </a:p>
-          <a:p>
-            <a:pPr algn="l" indent="0" marL="0">
-              <a:buNone/>
-            </a:pPr>
-            <a:r>
-              <a:rPr lang="en-US" sz="1300" dirty="0">
-                <a:solidFill>
-                  <a:srgbClr val="2D2D2D"/>
-                </a:solidFill>
-                <a:latin typeface="Consolas" pitchFamily="34" charset="0"/>
-                <a:ea typeface="Consolas" pitchFamily="34" charset="-122"/>
-                <a:cs typeface="Consolas" pitchFamily="34" charset="-120"/>
-              </a:rPr>
-              <a:t>Inclua sugestões para a família e alinhamento ao PPPP da ACSC."</a:t>
-            </a:r>
-            <a:endParaRPr lang="en-US" sz="1300" dirty="0"/>
-          </a:p>
-        </p:txBody>
-      </p:sp>
-      <p:sp>
-        <p:nvSpPr>
-          <p:cNvPr id="9" name="Shape 7"/>
-          <p:cNvSpPr/>
-          <p:nvPr/>
-        </p:nvSpPr>
-        <p:spPr>
-          <a:xfrm>
-            <a:off x="457200" y="2834640"/>
-            <a:ext cx="8229600" cy="1828800"/>
-          </a:xfrm>
-          <a:prstGeom prst="rect">
-            <a:avLst/>
-          </a:prstGeom>
-          <a:solidFill>
-            <a:srgbClr val="1A3A3A"/>
-          </a:solidFill>
-          <a:ln/>
-          <a:effectLst>
-            <a:outerShdw sx="100000" sy="100000" kx="0" ky="0" algn="bl" rotWithShape="0" blurRad="101600" dist="25400" dir="8100000">
-              <a:srgbClr val="000000">
-                <a:alpha val="12000"/>
-              </a:srgbClr>
-            </a:outerShdw>
-          </a:effectLst>
-        </p:spPr>
-      </p:sp>
-      <p:sp>
-        <p:nvSpPr>
-          <p:cNvPr id="10" name="Text 8"/>
-          <p:cNvSpPr/>
-          <p:nvPr/>
-        </p:nvSpPr>
-        <p:spPr>
-          <a:xfrm>
-            <a:off x="731520" y="2926080"/>
-            <a:ext cx="7772400" cy="274320"/>
-          </a:xfrm>
-          <a:prstGeom prst="rect">
-            <a:avLst/>
-          </a:prstGeom>
-          <a:noFill/>
-          <a:ln/>
-        </p:spPr>
-        <p:txBody>
-          <a:bodyPr wrap="square" lIns="0" tIns="0" rIns="0" bIns="0" rtlCol="0" anchor="ctr"/>
-          <a:lstStyle/>
-          <a:p>
-            <a:pPr indent="0" marL="0">
-              <a:buNone/>
-            </a:pPr>
-            <a:r>
-              <a:rPr lang="en-US" sz="1200" b="1" dirty="0">
-                <a:solidFill>
-                  <a:srgbClr val="D4A843"/>
-                </a:solidFill>
-                <a:latin typeface="Calibri" pitchFamily="34" charset="0"/>
-                <a:ea typeface="Calibri" pitchFamily="34" charset="-122"/>
-                <a:cs typeface="Calibri" pitchFamily="34" charset="-120"/>
-              </a:rPr>
-              <a:t>O que a IA vai responder:</a:t>
-            </a:r>
-            <a:endParaRPr lang="en-US" sz="1200" dirty="0"/>
-          </a:p>
-        </p:txBody>
-      </p:sp>
-      <p:sp>
-        <p:nvSpPr>
-          <p:cNvPr id="11" name="Text 9"/>
-          <p:cNvSpPr/>
-          <p:nvPr/>
-        </p:nvSpPr>
-        <p:spPr>
-          <a:xfrm>
-            <a:off x="731520" y="3200400"/>
-            <a:ext cx="7772400" cy="1280160"/>
-          </a:xfrm>
-          <a:prstGeom prst="rect">
-            <a:avLst/>
-          </a:prstGeom>
-          <a:noFill/>
-          <a:ln/>
-        </p:spPr>
-        <p:txBody>
-          <a:bodyPr wrap="square" lIns="0" tIns="0" rIns="0" bIns="0" rtlCol="0" anchor="t"/>
-          <a:lstStyle/>
+                <a:latin typeface="Calibri" pitchFamily="34" charset="0"/>
+                <a:ea typeface="Calibri" pitchFamily="34" charset="-122"/>
+                <a:cs typeface="Calibri" pitchFamily="34" charset="-120"/>
+              </a:rPr>
+              <a:t>Você pode apenas sentar e dirigir (funciona!), mas o manual do proprietário ensina:</a:t>
+            </a:r>
+            <a:endParaRPr lang="en-US" sz="1400" dirty="0"/>
+          </a:p>
           <a:p>
             <a:pPr algn="l" marL="342900" indent="-342900">
+              <a:spcAft>
+                <a:spcPts val="400"/>
+              </a:spcAft>
               <a:buSzPct val="100000"/>
               <a:buChar char="•"/>
             </a:pPr>
             <a:r>
               <a:rPr lang="en-US" sz="1300" dirty="0">
                 <a:solidFill>
-                  <a:srgbClr val="F7F3EE"/>
-                </a:solidFill>
-                <a:latin typeface="Calibri" pitchFamily="34" charset="0"/>
-                <a:ea typeface="Calibri" pitchFamily="34" charset="-122"/>
-                <a:cs typeface="Calibri" pitchFamily="34" charset="-120"/>
-              </a:rPr>
-              <a:t>Um parecer descritivo completo nos padrões do Colégio</a:t>
-            </a:r>
-            <a:endParaRPr lang="en-US" sz="1300" dirty="0"/>
+                  <a:srgbClr val="2D2D2D"/>
+                </a:solidFill>
+                <a:latin typeface="Calibri" pitchFamily="34" charset="0"/>
+                <a:ea typeface="Calibri" pitchFamily="34" charset="-122"/>
+                <a:cs typeface="Calibri" pitchFamily="34" charset="-120"/>
+              </a:rPr>
+              <a:t>• Como usar cada botão e função</a:t>
+            </a:r>
+            <a:endParaRPr lang="en-US" sz="1400" dirty="0"/>
           </a:p>
           <a:p>
             <a:pPr algn="l" marL="342900" indent="-342900">
+              <a:spcAft>
+                <a:spcPts val="400"/>
+              </a:spcAft>
               <a:buSzPct val="100000"/>
               <a:buChar char="•"/>
             </a:pPr>
             <a:r>
               <a:rPr lang="en-US" sz="1300" dirty="0">
                 <a:solidFill>
-                  <a:srgbClr val="F7F3EE"/>
-                </a:solidFill>
-                <a:latin typeface="Calibri" pitchFamily="34" charset="0"/>
-                <a:ea typeface="Calibri" pitchFamily="34" charset="-122"/>
-                <a:cs typeface="Calibri" pitchFamily="34" charset="-120"/>
-              </a:rPr>
-              <a:t>Alinhado ao sistema trimestral e ao PPPP</a:t>
-            </a:r>
-            <a:endParaRPr lang="en-US" sz="1300" dirty="0"/>
+                  <a:srgbClr val="2D2D2D"/>
+                </a:solidFill>
+                <a:latin typeface="Calibri" pitchFamily="34" charset="0"/>
+                <a:ea typeface="Calibri" pitchFamily="34" charset="-122"/>
+                <a:cs typeface="Calibri" pitchFamily="34" charset="-120"/>
+              </a:rPr>
+              <a:t>• A maneira correta de fazer a manutenção</a:t>
+            </a:r>
+            <a:endParaRPr lang="en-US" sz="1400" dirty="0"/>
           </a:p>
           <a:p>
             <a:pPr algn="l" marL="342900" indent="-342900">
+              <a:spcAft>
+                <a:spcPts val="400"/>
+              </a:spcAft>
               <a:buSzPct val="100000"/>
               <a:buChar char="•"/>
             </a:pPr>
             <a:r>
               <a:rPr lang="en-US" sz="1300" dirty="0">
                 <a:solidFill>
-                  <a:srgbClr val="F7F3EE"/>
-                </a:solidFill>
-                <a:latin typeface="Calibri" pitchFamily="34" charset="0"/>
-                <a:ea typeface="Calibri" pitchFamily="34" charset="-122"/>
-                <a:cs typeface="Calibri" pitchFamily="34" charset="-120"/>
-              </a:rPr>
-              <a:t>Com linguagem adequada para o boletim escolar</a:t>
-            </a:r>
-            <a:endParaRPr lang="en-US" sz="1300" dirty="0"/>
+                  <a:srgbClr val="2D2D2D"/>
+                </a:solidFill>
+                <a:latin typeface="Calibri" pitchFamily="34" charset="0"/>
+                <a:ea typeface="Calibri" pitchFamily="34" charset="-122"/>
+                <a:cs typeface="Calibri" pitchFamily="34" charset="-120"/>
+              </a:rPr>
+              <a:t>• Procedimentos de segurança</a:t>
+            </a:r>
+            <a:endParaRPr lang="en-US" sz="1400" dirty="0"/>
           </a:p>
           <a:p>
             <a:pPr algn="l" marL="342900" indent="-342900">
+              <a:spcAft>
+                <a:spcPts val="600"/>
+              </a:spcAft>
               <a:buSzPct val="100000"/>
               <a:buChar char="•"/>
             </a:pPr>
             <a:r>
               <a:rPr lang="en-US" sz="1300" dirty="0">
                 <a:solidFill>
-                  <a:srgbClr val="F7F3EE"/>
-                </a:solidFill>
-                <a:latin typeface="Calibri" pitchFamily="34" charset="0"/>
-                <a:ea typeface="Calibri" pitchFamily="34" charset="-122"/>
-                <a:cs typeface="Calibri" pitchFamily="34" charset="-120"/>
-              </a:rPr>
-              <a:t>Sugestões pedagógicas para a família</a:t>
-            </a:r>
-            <a:endParaRPr lang="en-US" sz="1300" dirty="0"/>
+                  <a:srgbClr val="2D2D2D"/>
+                </a:solidFill>
+                <a:latin typeface="Calibri" pitchFamily="34" charset="0"/>
+                <a:ea typeface="Calibri" pitchFamily="34" charset="-122"/>
+                <a:cs typeface="Calibri" pitchFamily="34" charset="-120"/>
+              </a:rPr>
+              <a:t>• Modos de condução específicos (estrada, cidade, off-road)</a:t>
+            </a:r>
+            <a:endParaRPr lang="en-US" sz="1400" dirty="0"/>
+          </a:p>
+        </p:txBody>
+      </p:sp>
+      <p:sp>
+        <p:nvSpPr>
+          <p:cNvPr id="8" name="Text 6"/>
+          <p:cNvSpPr/>
+          <p:nvPr/>
+        </p:nvSpPr>
+        <p:spPr>
+          <a:xfrm>
+            <a:off x="4937760" y="1280160"/>
+            <a:ext cx="3566160" cy="3108960"/>
+          </a:xfrm>
+          <a:prstGeom prst="rect">
+            <a:avLst/>
+          </a:prstGeom>
+          <a:noFill/>
+          <a:ln/>
+        </p:spPr>
+        <p:txBody>
+          <a:bodyPr wrap="square" lIns="0" tIns="0" rIns="0" bIns="0" rtlCol="0" anchor="t"/>
+          <a:lstStyle/>
+          <a:p>
+            <a:pPr algn="l" indent="0" marL="0">
+              <a:spcAft>
+                <a:spcPts val="600"/>
+              </a:spcAft>
+              <a:buNone/>
+            </a:pPr>
+            <a:r>
+              <a:rPr lang="en-US" sz="1600" b="1" dirty="0">
+                <a:solidFill>
+                  <a:srgbClr val="5B8C5A"/>
+                </a:solidFill>
+                <a:latin typeface="Calibri" pitchFamily="34" charset="0"/>
+                <a:ea typeface="Calibri" pitchFamily="34" charset="-122"/>
+                <a:cs typeface="Calibri" pitchFamily="34" charset="-120"/>
+              </a:rPr>
+              <a:t>As Skills fazem o mesmo com a IA:</a:t>
+            </a:r>
+            <a:endParaRPr lang="en-US" sz="1400" dirty="0"/>
+          </a:p>
+          <a:p>
+            <a:pPr algn="l" indent="0" marL="0">
+              <a:spcAft>
+                <a:spcPts val="600"/>
+              </a:spcAft>
+              <a:buNone/>
+            </a:pPr>
+            <a:r>
+              <a:rPr lang="en-US" sz="1300" dirty="0">
+                <a:solidFill>
+                  <a:srgbClr val="2D2D2D"/>
+                </a:solidFill>
+                <a:latin typeface="Calibri" pitchFamily="34" charset="0"/>
+                <a:ea typeface="Calibri" pitchFamily="34" charset="-122"/>
+                <a:cs typeface="Calibri" pitchFamily="34" charset="-120"/>
+              </a:rPr>
+              <a:t>São arquivos de instrução que ensinam o modelo de IA a:</a:t>
+            </a:r>
+            <a:endParaRPr lang="en-US" sz="1400" dirty="0"/>
           </a:p>
           <a:p>
             <a:pPr algn="l" marL="342900" indent="-342900">
+              <a:spcAft>
+                <a:spcPts val="400"/>
+              </a:spcAft>
               <a:buSzPct val="100000"/>
               <a:buChar char="•"/>
             </a:pPr>
             <a:r>
               <a:rPr lang="en-US" sz="1300" dirty="0">
                 <a:solidFill>
-                  <a:srgbClr val="F7F3EE"/>
-                </a:solidFill>
-                <a:latin typeface="Calibri" pitchFamily="34" charset="0"/>
-                <a:ea typeface="Calibri" pitchFamily="34" charset="-122"/>
-                <a:cs typeface="Calibri" pitchFamily="34" charset="-120"/>
-              </a:rPr>
-              <a:t>Estratégias de intervenção em sala de aula</a:t>
-            </a:r>
-            <a:endParaRPr lang="en-US" sz="1300" dirty="0"/>
+                  <a:srgbClr val="2D2D2D"/>
+                </a:solidFill>
+                <a:latin typeface="Calibri" pitchFamily="34" charset="0"/>
+                <a:ea typeface="Calibri" pitchFamily="34" charset="-122"/>
+                <a:cs typeface="Calibri" pitchFamily="34" charset="-120"/>
+              </a:rPr>
+              <a:t>Saber quem é você e seu contexto</a:t>
+            </a:r>
+            <a:endParaRPr lang="en-US" sz="1400" dirty="0"/>
+          </a:p>
+          <a:p>
+            <a:pPr algn="l" marL="342900" indent="-342900">
+              <a:spcAft>
+                <a:spcPts val="400"/>
+              </a:spcAft>
+              <a:buSzPct val="100000"/>
+              <a:buChar char="•"/>
+            </a:pPr>
+            <a:r>
+              <a:rPr lang="en-US" sz="1300" dirty="0">
+                <a:solidFill>
+                  <a:srgbClr val="2D2D2D"/>
+                </a:solidFill>
+                <a:latin typeface="Calibri" pitchFamily="34" charset="0"/>
+                <a:ea typeface="Calibri" pitchFamily="34" charset="-122"/>
+                <a:cs typeface="Calibri" pitchFamily="34" charset="-120"/>
+              </a:rPr>
+              <a:t>Seguir regras da sua escola</a:t>
+            </a:r>
+            <a:endParaRPr lang="en-US" sz="1400" dirty="0"/>
+          </a:p>
+          <a:p>
+            <a:pPr algn="l" marL="342900" indent="-342900">
+              <a:spcAft>
+                <a:spcPts val="400"/>
+              </a:spcAft>
+              <a:buSzPct val="100000"/>
+              <a:buChar char="•"/>
+            </a:pPr>
+            <a:r>
+              <a:rPr lang="en-US" sz="1300" dirty="0">
+                <a:solidFill>
+                  <a:srgbClr val="2D2D2D"/>
+                </a:solidFill>
+                <a:latin typeface="Calibri" pitchFamily="34" charset="0"/>
+                <a:ea typeface="Calibri" pitchFamily="34" charset="-122"/>
+                <a:cs typeface="Calibri" pitchFamily="34" charset="-120"/>
+              </a:rPr>
+              <a:t>Usar os documentos certos</a:t>
+            </a:r>
+            <a:endParaRPr lang="en-US" sz="1400" dirty="0"/>
+          </a:p>
+          <a:p>
+            <a:pPr algn="l" marL="342900" indent="-342900">
+              <a:spcAft>
+                <a:spcPts val="400"/>
+              </a:spcAft>
+              <a:buSzPct val="100000"/>
+              <a:buChar char="•"/>
+            </a:pPr>
+            <a:r>
+              <a:rPr lang="en-US" sz="1300" dirty="0">
+                <a:solidFill>
+                  <a:srgbClr val="2D2D2D"/>
+                </a:solidFill>
+                <a:latin typeface="Calibri" pitchFamily="34" charset="0"/>
+                <a:ea typeface="Calibri" pitchFamily="34" charset="-122"/>
+                <a:cs typeface="Calibri" pitchFamily="34" charset="-120"/>
+              </a:rPr>
+              <a:t>Falar como um especialista pedagógico</a:t>
+            </a:r>
+            <a:endParaRPr lang="en-US" sz="1400" dirty="0"/>
+          </a:p>
+          <a:p>
+            <a:pPr algn="l" marL="342900" indent="-342900">
+              <a:spcAft>
+                <a:spcPts val="600"/>
+              </a:spcAft>
+              <a:buSzPct val="100000"/>
+              <a:buChar char="•"/>
+            </a:pPr>
+            <a:r>
+              <a:rPr lang="en-US" sz="1300" dirty="0">
+                <a:solidFill>
+                  <a:srgbClr val="2D2D2D"/>
+                </a:solidFill>
+                <a:latin typeface="Calibri" pitchFamily="34" charset="0"/>
+                <a:ea typeface="Calibri" pitchFamily="34" charset="-122"/>
+                <a:cs typeface="Calibri" pitchFamily="34" charset="-120"/>
+              </a:rPr>
+              <a:t>Seguir processos passo a passo</a:t>
+            </a:r>
+            <a:endParaRPr lang="en-US" sz="1400" dirty="0"/>
+          </a:p>
+          <a:p>
+            <a:pPr algn="l" indent="0" marL="0">
+              <a:spcAft>
+                <a:spcPts val="400"/>
+              </a:spcAft>
+              <a:buNone/>
+            </a:pPr>
+            <a:r>
+              <a:rPr lang="en-US" sz="1300" b="1" i="1" dirty="0">
+                <a:solidFill>
+                  <a:srgbClr val="2D2D2D"/>
+                </a:solidFill>
+                <a:latin typeface="Calibri" pitchFamily="34" charset="0"/>
+                <a:ea typeface="Calibri" pitchFamily="34" charset="-122"/>
+                <a:cs typeface="Calibri" pitchFamily="34" charset="-120"/>
+              </a:rPr>
+              <a:t>Sem a skill o modelo "até funciona". Com ela, ele age como um profissional da sua área.</a:t>
+            </a:r>
+            <a:endParaRPr lang="en-US" sz="1400" dirty="0"/>
           </a:p>
         </p:txBody>
       </p:sp>
